--- a/output/wordlabs-light-3day.pptx
+++ b/output/wordlabs-light-3day.pptx
@@ -4240,7 +4240,7 @@
                 <a:ea typeface="Calibri" pitchFamily="34" charset="-122"/>
                 <a:cs typeface="Calibri" pitchFamily="34" charset="-120"/>
               </a:rPr>
-              <a:t>"brightness, illumination, not heavy"</a:t>
+              <a:t>"brightness; not heavy"</a:t>
             </a:r>
             <a:endParaRPr lang="en-US" sz="2200" dirty="0"/>
           </a:p>
@@ -4279,7 +4279,7 @@
                 <a:ea typeface="Calibri" pitchFamily="34" charset="-122"/>
                 <a:cs typeface="Calibri" pitchFamily="34" charset="-120"/>
               </a:rPr>
-              <a:t>Origin: Latin: lux</a:t>
+              <a:t>Origin: Core English root</a:t>
             </a:r>
             <a:endParaRPr lang="en-US" sz="1300" dirty="0"/>
           </a:p>
@@ -5288,7 +5288,7 @@
                 <a:ea typeface="Calibri" pitchFamily="34" charset="-122"/>
                 <a:cs typeface="Calibri" pitchFamily="34" charset="-120"/>
               </a:rPr>
-              <a:t>Word Labs  •  wordlabs.app  •  Root: 'light' = brightness, illumination, not heavy</a:t>
+              <a:t>Word Labs  •  wordlabs.app  •  Root: 'light' = brightness; not heavy</a:t>
             </a:r>
             <a:endParaRPr lang="en-US" sz="800" dirty="0"/>
           </a:p>
@@ -5928,7 +5928,7 @@
                 <a:ea typeface="Calibri" pitchFamily="34" charset="-122"/>
                 <a:cs typeface="Calibri" pitchFamily="34" charset="-120"/>
               </a:rPr>
-              <a:t>Word Labs  •  wordlabs.app  •  Root: 'light' = brightness, illumination, not heavy</a:t>
+              <a:t>Word Labs  •  wordlabs.app  •  Root: 'light' = brightness; not heavy</a:t>
             </a:r>
             <a:endParaRPr lang="en-US" sz="800" dirty="0"/>
           </a:p>
@@ -6040,7 +6040,7 @@
                 <a:ea typeface="Calibri" pitchFamily="34" charset="-122"/>
                 <a:cs typeface="Calibri" pitchFamily="34" charset="-120"/>
               </a:rPr>
-              <a:t>The </a:t>
+              <a:t>The stage </a:t>
             </a:r>
             <a:pPr algn="l" indent="0" marL="0">
               <a:buNone/>
@@ -6057,7 +6057,7 @@
                 <a:ea typeface="Calibri" pitchFamily="34" charset="-122"/>
                 <a:cs typeface="Calibri" pitchFamily="34" charset="-120"/>
               </a:rPr>
-              <a:t>moonlight</a:t>
+              <a:t>lighting</a:t>
             </a:r>
             <a:pPr algn="l" indent="0" marL="0">
               <a:buNone/>
@@ -6071,7 +6071,7 @@
                 <a:ea typeface="Calibri" pitchFamily="34" charset="-122"/>
                 <a:cs typeface="Calibri" pitchFamily="34" charset="-120"/>
               </a:rPr>
-              <a:t> was so bright that it could </a:t>
+              <a:t> made the actors easy to see. Grandma was </a:t>
             </a:r>
             <a:pPr algn="l" indent="0" marL="0">
               <a:buNone/>
@@ -6088,7 +6088,7 @@
                 <a:ea typeface="Calibri" pitchFamily="34" charset="-122"/>
                 <a:cs typeface="Calibri" pitchFamily="34" charset="-120"/>
               </a:rPr>
-              <a:t>enlighten</a:t>
+              <a:t>delighted</a:t>
             </a:r>
             <a:pPr algn="l" indent="0" marL="0">
               <a:buNone/>
@@ -6102,7 +6102,7 @@
                 <a:ea typeface="Calibri" pitchFamily="34" charset="-122"/>
                 <a:cs typeface="Calibri" pitchFamily="34" charset="-120"/>
               </a:rPr>
-              <a:t> the whole garden without any lamps.</a:t>
+              <a:t> to see all her grandchildren at the party.</a:t>
             </a:r>
             <a:endParaRPr lang="en-US" sz="1800" dirty="0"/>
           </a:p>
@@ -6257,7 +6257,7 @@
                 <a:ea typeface="Trebuchet MS" pitchFamily="34" charset="-122"/>
                 <a:cs typeface="Trebuchet MS" pitchFamily="34" charset="-120"/>
               </a:rPr>
-              <a:t>moonlight</a:t>
+              <a:t>lighting</a:t>
             </a:r>
             <a:endParaRPr lang="en-US" sz="1400" dirty="0"/>
           </a:p>
@@ -6385,7 +6385,7 @@
                 <a:ea typeface="Trebuchet MS" pitchFamily="34" charset="-122"/>
                 <a:cs typeface="Trebuchet MS" pitchFamily="34" charset="-120"/>
               </a:rPr>
-              <a:t>enlighten</a:t>
+              <a:t>delighted</a:t>
             </a:r>
             <a:endParaRPr lang="en-US" sz="1400" dirty="0"/>
           </a:p>
@@ -6716,7 +6716,7 @@
                 <a:ea typeface="Calibri" pitchFamily="34" charset="-122"/>
                 <a:cs typeface="Calibri" pitchFamily="34" charset="-120"/>
               </a:rPr>
-              <a:t>Word Labs  •  wordlabs.app  •  Root: 'light' = brightness, illumination, not heavy</a:t>
+              <a:t>Word Labs  •  wordlabs.app  •  Root: 'light' = brightness; not heavy</a:t>
             </a:r>
             <a:endParaRPr lang="en-US" sz="800" dirty="0"/>
           </a:p>
@@ -6855,7 +6855,7 @@
                 <a:ea typeface="Trebuchet MS" pitchFamily="34" charset="-122"/>
                 <a:cs typeface="Trebuchet MS" pitchFamily="34" charset="-120"/>
               </a:rPr>
-              <a:t>moonlight</a:t>
+              <a:t>lighting</a:t>
             </a:r>
             <a:endParaRPr lang="en-US" sz="2800" dirty="0"/>
           </a:p>
@@ -7543,7 +7543,7 @@
                 <a:ea typeface="Calibri" pitchFamily="34" charset="-122"/>
                 <a:cs typeface="Calibri" pitchFamily="34" charset="-120"/>
               </a:rPr>
-              <a:t>Word Labs  •  wordlabs.app  •  Root: 'light' = brightness, illumination, not heavy</a:t>
+              <a:t>Word Labs  •  wordlabs.app  •  Root: 'light' = brightness; not heavy</a:t>
             </a:r>
             <a:endParaRPr lang="en-US" sz="800" dirty="0"/>
           </a:p>
@@ -7682,7 +7682,7 @@
                 <a:ea typeface="Trebuchet MS" pitchFamily="34" charset="-122"/>
                 <a:cs typeface="Trebuchet MS" pitchFamily="34" charset="-120"/>
               </a:rPr>
-              <a:t>moonlight</a:t>
+              <a:t>lighting</a:t>
             </a:r>
             <a:endParaRPr lang="en-US" sz="2800" dirty="0"/>
           </a:p>
@@ -7771,11 +7771,11 @@
             </a:avLst>
           </a:prstGeom>
           <a:solidFill>
-            <a:srgbClr val="DDD6FE"/>
+            <a:srgbClr val="CCFBF1"/>
           </a:solidFill>
           <a:ln w="19050">
             <a:solidFill>
-              <a:srgbClr val="7C3AED"/>
+              <a:srgbClr val="0D9488"/>
             </a:solidFill>
             <a:prstDash val="solid"/>
           </a:ln>
@@ -7815,13 +7815,13 @@
             <a:r>
               <a:rPr lang="en-US" sz="1300" b="1" dirty="0">
                 <a:solidFill>
-                  <a:srgbClr val="4C1D95"/>
+                  <a:srgbClr val="0F766E"/>
                 </a:solidFill>
                 <a:latin typeface="Trebuchet MS" pitchFamily="34" charset="0"/>
                 <a:ea typeface="Trebuchet MS" pitchFamily="34" charset="-122"/>
                 <a:cs typeface="Trebuchet MS" pitchFamily="34" charset="-120"/>
               </a:rPr>
-              <a:t>moon</a:t>
+              <a:t>light</a:t>
             </a:r>
             <a:endParaRPr lang="en-US" sz="1300" dirty="0"/>
           </a:p>
@@ -7860,7 +7860,7 @@
                 <a:ea typeface="Calibri" pitchFamily="34" charset="-122"/>
                 <a:cs typeface="Calibri" pitchFamily="34" charset="-120"/>
               </a:rPr>
-              <a:t>the moon</a:t>
+              <a:t>brightness; not heavy</a:t>
             </a:r>
             <a:endParaRPr lang="en-US" sz="850" dirty="0"/>
           </a:p>
@@ -7883,11 +7883,11 @@
             </a:avLst>
           </a:prstGeom>
           <a:solidFill>
-            <a:srgbClr val="CCFBF1"/>
+            <a:srgbClr val="FCE7F3"/>
           </a:solidFill>
           <a:ln w="19050">
             <a:solidFill>
-              <a:srgbClr val="0D9488"/>
+              <a:srgbClr val="DB2777"/>
             </a:solidFill>
             <a:prstDash val="solid"/>
           </a:ln>
@@ -7927,13 +7927,13 @@
             <a:r>
               <a:rPr lang="en-US" sz="1300" b="1" dirty="0">
                 <a:solidFill>
-                  <a:srgbClr val="0F766E"/>
+                  <a:srgbClr val="9D174D"/>
                 </a:solidFill>
                 <a:latin typeface="Trebuchet MS" pitchFamily="34" charset="0"/>
                 <a:ea typeface="Trebuchet MS" pitchFamily="34" charset="-122"/>
                 <a:cs typeface="Trebuchet MS" pitchFamily="34" charset="-120"/>
               </a:rPr>
-              <a:t>light</a:t>
+              <a:t>ing</a:t>
             </a:r>
             <a:endParaRPr lang="en-US" sz="1300" dirty="0"/>
           </a:p>
@@ -7972,7 +7972,7 @@
                 <a:ea typeface="Calibri" pitchFamily="34" charset="-122"/>
                 <a:cs typeface="Calibri" pitchFamily="34" charset="-120"/>
               </a:rPr>
-              <a:t>brightness, illumination</a:t>
+              <a:t>happening now</a:t>
             </a:r>
             <a:endParaRPr lang="en-US" sz="850" dirty="0"/>
           </a:p>
@@ -8528,7 +8528,7 @@
                 <a:ea typeface="Calibri" pitchFamily="34" charset="-122"/>
                 <a:cs typeface="Calibri" pitchFamily="34" charset="-120"/>
               </a:rPr>
-              <a:t>Word Labs  •  wordlabs.app  •  Root: 'light' = brightness, illumination, not heavy</a:t>
+              <a:t>Word Labs  •  wordlabs.app  •  Root: 'light' = brightness; not heavy</a:t>
             </a:r>
             <a:endParaRPr lang="en-US" sz="800" dirty="0"/>
           </a:p>
@@ -8667,7 +8667,7 @@
                 <a:ea typeface="Trebuchet MS" pitchFamily="34" charset="-122"/>
                 <a:cs typeface="Trebuchet MS" pitchFamily="34" charset="-120"/>
               </a:rPr>
-              <a:t>moonlight</a:t>
+              <a:t>lighting</a:t>
             </a:r>
             <a:endParaRPr lang="en-US" sz="2800" dirty="0"/>
           </a:p>
@@ -8756,11 +8756,11 @@
             </a:avLst>
           </a:prstGeom>
           <a:solidFill>
-            <a:srgbClr val="DDD6FE"/>
+            <a:srgbClr val="CCFBF1"/>
           </a:solidFill>
           <a:ln w="19050">
             <a:solidFill>
-              <a:srgbClr val="7C3AED"/>
+              <a:srgbClr val="0D9488"/>
             </a:solidFill>
             <a:prstDash val="solid"/>
           </a:ln>
@@ -8800,13 +8800,13 @@
             <a:r>
               <a:rPr lang="en-US" sz="1300" b="1" dirty="0">
                 <a:solidFill>
-                  <a:srgbClr val="4C1D95"/>
+                  <a:srgbClr val="0F766E"/>
                 </a:solidFill>
                 <a:latin typeface="Trebuchet MS" pitchFamily="34" charset="0"/>
                 <a:ea typeface="Trebuchet MS" pitchFamily="34" charset="-122"/>
                 <a:cs typeface="Trebuchet MS" pitchFamily="34" charset="-120"/>
               </a:rPr>
-              <a:t>moon</a:t>
+              <a:t>light</a:t>
             </a:r>
             <a:endParaRPr lang="en-US" sz="1300" dirty="0"/>
           </a:p>
@@ -8845,7 +8845,7 @@
                 <a:ea typeface="Calibri" pitchFamily="34" charset="-122"/>
                 <a:cs typeface="Calibri" pitchFamily="34" charset="-120"/>
               </a:rPr>
-              <a:t>the moon</a:t>
+              <a:t>brightness; not heavy</a:t>
             </a:r>
             <a:endParaRPr lang="en-US" sz="850" dirty="0"/>
           </a:p>
@@ -8868,11 +8868,11 @@
             </a:avLst>
           </a:prstGeom>
           <a:solidFill>
-            <a:srgbClr val="CCFBF1"/>
+            <a:srgbClr val="FCE7F3"/>
           </a:solidFill>
           <a:ln w="19050">
             <a:solidFill>
-              <a:srgbClr val="0D9488"/>
+              <a:srgbClr val="DB2777"/>
             </a:solidFill>
             <a:prstDash val="solid"/>
           </a:ln>
@@ -8912,13 +8912,13 @@
             <a:r>
               <a:rPr lang="en-US" sz="1300" b="1" dirty="0">
                 <a:solidFill>
-                  <a:srgbClr val="0F766E"/>
+                  <a:srgbClr val="9D174D"/>
                 </a:solidFill>
                 <a:latin typeface="Trebuchet MS" pitchFamily="34" charset="0"/>
                 <a:ea typeface="Trebuchet MS" pitchFamily="34" charset="-122"/>
                 <a:cs typeface="Trebuchet MS" pitchFamily="34" charset="-120"/>
               </a:rPr>
-              <a:t>light</a:t>
+              <a:t>ing</a:t>
             </a:r>
             <a:endParaRPr lang="en-US" sz="1300" dirty="0"/>
           </a:p>
@@ -8957,7 +8957,7 @@
                 <a:ea typeface="Calibri" pitchFamily="34" charset="-122"/>
                 <a:cs typeface="Calibri" pitchFamily="34" charset="-120"/>
               </a:rPr>
-              <a:t>brightness, illumination</a:t>
+              <a:t>happening now</a:t>
             </a:r>
             <a:endParaRPr lang="en-US" sz="850" dirty="0"/>
           </a:p>
@@ -9116,7 +9116,7 @@
                 <a:ea typeface="Trebuchet MS" pitchFamily="34" charset="-122"/>
                 <a:cs typeface="Trebuchet MS" pitchFamily="34" charset="-120"/>
               </a:rPr>
-              <a:t>moon</a:t>
+              <a:t>light</a:t>
             </a:r>
             <a:endParaRPr lang="en-US" sz="1400" dirty="0"/>
           </a:p>
@@ -9221,7 +9221,7 @@
                 <a:ea typeface="Trebuchet MS" pitchFamily="34" charset="-122"/>
                 <a:cs typeface="Trebuchet MS" pitchFamily="34" charset="-120"/>
               </a:rPr>
-              <a:t>light</a:t>
+              <a:t>ing</a:t>
             </a:r>
             <a:endParaRPr lang="en-US" sz="1400" dirty="0"/>
           </a:p>
@@ -9645,7 +9645,7 @@
                 <a:ea typeface="Calibri" pitchFamily="34" charset="-122"/>
                 <a:cs typeface="Calibri" pitchFamily="34" charset="-120"/>
               </a:rPr>
-              <a:t>Word Labs  •  wordlabs.app  •  Root: 'light' = brightness, illumination, not heavy</a:t>
+              <a:t>Word Labs  •  wordlabs.app  •  Root: 'light' = brightness; not heavy</a:t>
             </a:r>
             <a:endParaRPr lang="en-US" sz="800" dirty="0"/>
           </a:p>
@@ -9784,7 +9784,7 @@
                 <a:ea typeface="Trebuchet MS" pitchFamily="34" charset="-122"/>
                 <a:cs typeface="Trebuchet MS" pitchFamily="34" charset="-120"/>
               </a:rPr>
-              <a:t>moonlight</a:t>
+              <a:t>lighting</a:t>
             </a:r>
             <a:endParaRPr lang="en-US" sz="2800" dirty="0"/>
           </a:p>
@@ -9873,11 +9873,11 @@
             </a:avLst>
           </a:prstGeom>
           <a:solidFill>
-            <a:srgbClr val="DDD6FE"/>
+            <a:srgbClr val="CCFBF1"/>
           </a:solidFill>
           <a:ln w="19050">
             <a:solidFill>
-              <a:srgbClr val="7C3AED"/>
+              <a:srgbClr val="0D9488"/>
             </a:solidFill>
             <a:prstDash val="solid"/>
           </a:ln>
@@ -9917,13 +9917,13 @@
             <a:r>
               <a:rPr lang="en-US" sz="1300" b="1" dirty="0">
                 <a:solidFill>
-                  <a:srgbClr val="4C1D95"/>
+                  <a:srgbClr val="0F766E"/>
                 </a:solidFill>
                 <a:latin typeface="Trebuchet MS" pitchFamily="34" charset="0"/>
                 <a:ea typeface="Trebuchet MS" pitchFamily="34" charset="-122"/>
                 <a:cs typeface="Trebuchet MS" pitchFamily="34" charset="-120"/>
               </a:rPr>
-              <a:t>moon</a:t>
+              <a:t>light</a:t>
             </a:r>
             <a:endParaRPr lang="en-US" sz="1300" dirty="0"/>
           </a:p>
@@ -9962,7 +9962,7 @@
                 <a:ea typeface="Calibri" pitchFamily="34" charset="-122"/>
                 <a:cs typeface="Calibri" pitchFamily="34" charset="-120"/>
               </a:rPr>
-              <a:t>the moon</a:t>
+              <a:t>brightness; not heavy</a:t>
             </a:r>
             <a:endParaRPr lang="en-US" sz="850" dirty="0"/>
           </a:p>
@@ -9985,11 +9985,11 @@
             </a:avLst>
           </a:prstGeom>
           <a:solidFill>
-            <a:srgbClr val="CCFBF1"/>
+            <a:srgbClr val="FCE7F3"/>
           </a:solidFill>
           <a:ln w="19050">
             <a:solidFill>
-              <a:srgbClr val="0D9488"/>
+              <a:srgbClr val="DB2777"/>
             </a:solidFill>
             <a:prstDash val="solid"/>
           </a:ln>
@@ -10029,13 +10029,13 @@
             <a:r>
               <a:rPr lang="en-US" sz="1300" b="1" dirty="0">
                 <a:solidFill>
-                  <a:srgbClr val="0F766E"/>
+                  <a:srgbClr val="9D174D"/>
                 </a:solidFill>
                 <a:latin typeface="Trebuchet MS" pitchFamily="34" charset="0"/>
                 <a:ea typeface="Trebuchet MS" pitchFamily="34" charset="-122"/>
                 <a:cs typeface="Trebuchet MS" pitchFamily="34" charset="-120"/>
               </a:rPr>
-              <a:t>light</a:t>
+              <a:t>ing</a:t>
             </a:r>
             <a:endParaRPr lang="en-US" sz="1300" dirty="0"/>
           </a:p>
@@ -10074,7 +10074,7 @@
                 <a:ea typeface="Calibri" pitchFamily="34" charset="-122"/>
                 <a:cs typeface="Calibri" pitchFamily="34" charset="-120"/>
               </a:rPr>
-              <a:t>brightness, illumination</a:t>
+              <a:t>happening now</a:t>
             </a:r>
             <a:endParaRPr lang="en-US" sz="850" dirty="0"/>
           </a:p>
@@ -10233,7 +10233,7 @@
                 <a:ea typeface="Trebuchet MS" pitchFamily="34" charset="-122"/>
                 <a:cs typeface="Trebuchet MS" pitchFamily="34" charset="-120"/>
               </a:rPr>
-              <a:t>moon</a:t>
+              <a:t>light</a:t>
             </a:r>
             <a:endParaRPr lang="en-US" sz="1400" dirty="0"/>
           </a:p>
@@ -10338,7 +10338,7 @@
                 <a:ea typeface="Trebuchet MS" pitchFamily="34" charset="-122"/>
                 <a:cs typeface="Trebuchet MS" pitchFamily="34" charset="-120"/>
               </a:rPr>
-              <a:t>light</a:t>
+              <a:t>ing</a:t>
             </a:r>
             <a:endParaRPr lang="en-US" sz="1400" dirty="0"/>
           </a:p>
@@ -10419,11 +10419,11 @@
         <p:spPr>
           <a:xfrm>
             <a:off x="1874520" y="4096512"/>
-            <a:ext cx="6903720" cy="804672"/>
+            <a:ext cx="6903720" cy="658368"/>
           </a:xfrm>
           <a:prstGeom prst="rect">
             <a:avLst>
-              <a:gd name="adj" fmla="val 6818"/>
+              <a:gd name="adj" fmla="val 8333"/>
             </a:avLst>
           </a:prstGeom>
           <a:solidFill>
@@ -10445,12 +10445,12 @@
         </p:nvSpPr>
         <p:spPr>
           <a:xfrm>
-            <a:off x="2254649" y="4169664"/>
-            <a:ext cx="685800" cy="384048"/>
+            <a:off x="2427732" y="4169664"/>
+            <a:ext cx="685800" cy="475488"/>
           </a:xfrm>
           <a:prstGeom prst="rect">
             <a:avLst>
-              <a:gd name="adj" fmla="val 9524"/>
+              <a:gd name="adj" fmla="val 7692"/>
             </a:avLst>
           </a:prstGeom>
           <a:solidFill>
@@ -10472,8 +10472,8 @@
         </p:nvSpPr>
         <p:spPr>
           <a:xfrm>
-            <a:off x="2254649" y="4169664"/>
-            <a:ext cx="685800" cy="384048"/>
+            <a:off x="2427732" y="4169664"/>
+            <a:ext cx="685800" cy="475488"/>
           </a:xfrm>
           <a:prstGeom prst="rect">
             <a:avLst/>
@@ -10497,7 +10497,7 @@
                 <a:ea typeface="Trebuchet MS" pitchFamily="34" charset="-122"/>
                 <a:cs typeface="Trebuchet MS" pitchFamily="34" charset="-120"/>
               </a:rPr>
-              <a:t>m</a:t>
+              <a:t>l</a:t>
             </a:r>
             <a:endParaRPr lang="en-US" sz="900" dirty="0"/>
           </a:p>
@@ -10511,12 +10511,12 @@
         </p:nvSpPr>
         <p:spPr>
           <a:xfrm>
-            <a:off x="3293146" y="4169664"/>
-            <a:ext cx="685800" cy="384048"/>
+            <a:off x="3639312" y="4169664"/>
+            <a:ext cx="685800" cy="475488"/>
           </a:xfrm>
           <a:prstGeom prst="rect">
             <a:avLst>
-              <a:gd name="adj" fmla="val 9524"/>
+              <a:gd name="adj" fmla="val 7692"/>
             </a:avLst>
           </a:prstGeom>
           <a:solidFill>
@@ -10538,8 +10538,8 @@
         </p:nvSpPr>
         <p:spPr>
           <a:xfrm>
-            <a:off x="3293146" y="4169664"/>
-            <a:ext cx="685800" cy="384048"/>
+            <a:off x="3639312" y="4169664"/>
+            <a:ext cx="685800" cy="475488"/>
           </a:xfrm>
           <a:prstGeom prst="rect">
             <a:avLst/>
@@ -10563,7 +10563,7 @@
                 <a:ea typeface="Trebuchet MS" pitchFamily="34" charset="-122"/>
                 <a:cs typeface="Trebuchet MS" pitchFamily="34" charset="-120"/>
               </a:rPr>
-              <a:t>oo</a:t>
+              <a:t>igh</a:t>
             </a:r>
             <a:endParaRPr lang="en-US" sz="900" dirty="0"/>
           </a:p>
@@ -10577,12 +10577,12 @@
         </p:nvSpPr>
         <p:spPr>
           <a:xfrm>
-            <a:off x="4331643" y="4169664"/>
-            <a:ext cx="685800" cy="384048"/>
+            <a:off x="4850892" y="4169664"/>
+            <a:ext cx="685800" cy="475488"/>
           </a:xfrm>
           <a:prstGeom prst="rect">
             <a:avLst>
-              <a:gd name="adj" fmla="val 9524"/>
+              <a:gd name="adj" fmla="val 7692"/>
             </a:avLst>
           </a:prstGeom>
           <a:solidFill>
@@ -10604,8 +10604,8 @@
         </p:nvSpPr>
         <p:spPr>
           <a:xfrm>
-            <a:off x="4331643" y="4169664"/>
-            <a:ext cx="685800" cy="384048"/>
+            <a:off x="4850892" y="4169664"/>
+            <a:ext cx="685800" cy="475488"/>
           </a:xfrm>
           <a:prstGeom prst="rect">
             <a:avLst/>
@@ -10629,7 +10629,7 @@
                 <a:ea typeface="Trebuchet MS" pitchFamily="34" charset="-122"/>
                 <a:cs typeface="Trebuchet MS" pitchFamily="34" charset="-120"/>
               </a:rPr>
-              <a:t>n</a:t>
+              <a:t>t</a:t>
             </a:r>
             <a:endParaRPr lang="en-US" sz="900" dirty="0"/>
           </a:p>
@@ -10643,12 +10643,12 @@
         </p:nvSpPr>
         <p:spPr>
           <a:xfrm>
-            <a:off x="5370141" y="4169664"/>
-            <a:ext cx="685800" cy="384048"/>
+            <a:off x="6062472" y="4169664"/>
+            <a:ext cx="685800" cy="475488"/>
           </a:xfrm>
           <a:prstGeom prst="rect">
             <a:avLst>
-              <a:gd name="adj" fmla="val 9524"/>
+              <a:gd name="adj" fmla="val 7692"/>
             </a:avLst>
           </a:prstGeom>
           <a:solidFill>
@@ -10670,8 +10670,8 @@
         </p:nvSpPr>
         <p:spPr>
           <a:xfrm>
-            <a:off x="5370141" y="4169664"/>
-            <a:ext cx="685800" cy="384048"/>
+            <a:off x="6062472" y="4169664"/>
+            <a:ext cx="685800" cy="475488"/>
           </a:xfrm>
           <a:prstGeom prst="rect">
             <a:avLst/>
@@ -10695,7 +10695,7 @@
                 <a:ea typeface="Trebuchet MS" pitchFamily="34" charset="-122"/>
                 <a:cs typeface="Trebuchet MS" pitchFamily="34" charset="-120"/>
               </a:rPr>
-              <a:t>l</a:t>
+              <a:t>i</a:t>
             </a:r>
             <a:endParaRPr lang="en-US" sz="900" dirty="0"/>
           </a:p>
@@ -10709,12 +10709,12 @@
         </p:nvSpPr>
         <p:spPr>
           <a:xfrm>
-            <a:off x="6408638" y="4169664"/>
-            <a:ext cx="685800" cy="384048"/>
+            <a:off x="7274052" y="4169664"/>
+            <a:ext cx="685800" cy="475488"/>
           </a:xfrm>
           <a:prstGeom prst="rect">
             <a:avLst>
-              <a:gd name="adj" fmla="val 9524"/>
+              <a:gd name="adj" fmla="val 7692"/>
             </a:avLst>
           </a:prstGeom>
           <a:solidFill>
@@ -10736,8 +10736,8 @@
         </p:nvSpPr>
         <p:spPr>
           <a:xfrm>
-            <a:off x="6408638" y="4169664"/>
-            <a:ext cx="685800" cy="384048"/>
+            <a:off x="7274052" y="4169664"/>
+            <a:ext cx="685800" cy="475488"/>
           </a:xfrm>
           <a:prstGeom prst="rect">
             <a:avLst/>
@@ -10761,112 +10761,7 @@
                 <a:ea typeface="Trebuchet MS" pitchFamily="34" charset="-122"/>
                 <a:cs typeface="Trebuchet MS" pitchFamily="34" charset="-120"/>
               </a:rPr>
-              <a:t>igh</a:t>
-            </a:r>
-            <a:endParaRPr lang="en-US" sz="900" dirty="0"/>
-          </a:p>
-        </p:txBody>
-      </p:sp>
-      <p:sp>
-        <p:nvSpPr>
-          <p:cNvPr id="43" name="Text 41"/>
-          <p:cNvSpPr/>
-          <p:nvPr/>
-        </p:nvSpPr>
-        <p:spPr>
-          <a:xfrm>
-            <a:off x="6408638" y="4572000"/>
-            <a:ext cx="685800" cy="219456"/>
-          </a:xfrm>
-          <a:prstGeom prst="rect">
-            <a:avLst/>
-          </a:prstGeom>
-          <a:noFill/>
-          <a:ln/>
-        </p:spPr>
-        <p:txBody>
-          <a:bodyPr wrap="square" lIns="0" tIns="0" rIns="0" bIns="0" rtlCol="0" anchor="t"/>
-          <a:lstStyle/>
-          <a:p>
-            <a:pPr algn="ctr" indent="0" marL="0">
-              <a:buNone/>
-            </a:pPr>
-            <a:r>
-              <a:rPr lang="en-US" sz="750" i="1" dirty="0">
-                <a:solidFill>
-                  <a:srgbClr val="94A3B8"/>
-                </a:solidFill>
-                <a:latin typeface="Calibri" pitchFamily="34" charset="0"/>
-                <a:ea typeface="Calibri" pitchFamily="34" charset="-122"/>
-                <a:cs typeface="Calibri" pitchFamily="34" charset="-120"/>
-              </a:rPr>
-              <a:t>/igh/</a:t>
-            </a:r>
-            <a:endParaRPr lang="en-US" sz="750" dirty="0"/>
-          </a:p>
-        </p:txBody>
-      </p:sp>
-      <p:sp>
-        <p:nvSpPr>
-          <p:cNvPr id="44" name="Shape 42"/>
-          <p:cNvSpPr/>
-          <p:nvPr/>
-        </p:nvSpPr>
-        <p:spPr>
-          <a:xfrm>
-            <a:off x="7447135" y="4169664"/>
-            <a:ext cx="685800" cy="384048"/>
-          </a:xfrm>
-          <a:prstGeom prst="rect">
-            <a:avLst>
-              <a:gd name="adj" fmla="val 9524"/>
-            </a:avLst>
-          </a:prstGeom>
-          <a:solidFill>
-            <a:srgbClr val="FFFFFF"/>
-          </a:solidFill>
-          <a:ln w="12700">
-            <a:solidFill>
-              <a:srgbClr val="DB2777"/>
-            </a:solidFill>
-            <a:prstDash val="solid"/>
-          </a:ln>
-        </p:spPr>
-      </p:sp>
-      <p:sp>
-        <p:nvSpPr>
-          <p:cNvPr id="45" name="Text 43"/>
-          <p:cNvSpPr/>
-          <p:nvPr/>
-        </p:nvSpPr>
-        <p:spPr>
-          <a:xfrm>
-            <a:off x="7447135" y="4169664"/>
-            <a:ext cx="685800" cy="384048"/>
-          </a:xfrm>
-          <a:prstGeom prst="rect">
-            <a:avLst/>
-          </a:prstGeom>
-          <a:noFill/>
-          <a:ln/>
-        </p:spPr>
-        <p:txBody>
-          <a:bodyPr wrap="square" lIns="0" tIns="0" rIns="0" bIns="0" rtlCol="0" anchor="ctr"/>
-          <a:lstStyle/>
-          <a:p>
-            <a:pPr algn="ctr" indent="0" marL="0">
-              <a:buNone/>
-            </a:pPr>
-            <a:r>
-              <a:rPr lang="en-US" sz="900" b="1" dirty="0">
-                <a:solidFill>
-                  <a:srgbClr val="9D174D"/>
-                </a:solidFill>
-                <a:latin typeface="Trebuchet MS" pitchFamily="34" charset="0"/>
-                <a:ea typeface="Trebuchet MS" pitchFamily="34" charset="-122"/>
-                <a:cs typeface="Trebuchet MS" pitchFamily="34" charset="-120"/>
-              </a:rPr>
-              <a:t>t</a:t>
+              <a:t>ng</a:t>
             </a:r>
             <a:endParaRPr lang="en-US" sz="900" dirty="0"/>
           </a:p>
@@ -11158,7 +11053,7 @@
                 <a:ea typeface="Calibri" pitchFamily="34" charset="-122"/>
                 <a:cs typeface="Calibri" pitchFamily="34" charset="-120"/>
               </a:rPr>
-              <a:t>Word Labs  •  wordlabs.app  •  Root: 'light' = brightness, illumination, not heavy</a:t>
+              <a:t>Word Labs  •  wordlabs.app  •  Root: 'light' = brightness; not heavy</a:t>
             </a:r>
             <a:endParaRPr lang="en-US" sz="800" dirty="0"/>
           </a:p>
@@ -11297,7 +11192,7 @@
                 <a:ea typeface="Trebuchet MS" pitchFamily="34" charset="-122"/>
                 <a:cs typeface="Trebuchet MS" pitchFamily="34" charset="-120"/>
               </a:rPr>
-              <a:t>enlighten</a:t>
+              <a:t>delighted</a:t>
             </a:r>
             <a:endParaRPr lang="en-US" sz="2800" dirty="0"/>
           </a:p>
@@ -11985,7 +11880,7 @@
                 <a:ea typeface="Calibri" pitchFamily="34" charset="-122"/>
                 <a:cs typeface="Calibri" pitchFamily="34" charset="-120"/>
               </a:rPr>
-              <a:t>Word Labs  •  wordlabs.app  •  Root: 'light' = brightness, illumination, not heavy</a:t>
+              <a:t>Word Labs  •  wordlabs.app  •  Root: 'light' = brightness; not heavy</a:t>
             </a:r>
             <a:endParaRPr lang="en-US" sz="800" dirty="0"/>
           </a:p>
@@ -12124,7 +12019,7 @@
                 <a:ea typeface="Trebuchet MS" pitchFamily="34" charset="-122"/>
                 <a:cs typeface="Trebuchet MS" pitchFamily="34" charset="-120"/>
               </a:rPr>
-              <a:t>enlighten</a:t>
+              <a:t>delighted</a:t>
             </a:r>
             <a:endParaRPr lang="en-US" sz="2800" dirty="0"/>
           </a:p>
@@ -12263,7 +12158,7 @@
                 <a:ea typeface="Trebuchet MS" pitchFamily="34" charset="-122"/>
                 <a:cs typeface="Trebuchet MS" pitchFamily="34" charset="-120"/>
               </a:rPr>
-              <a:t>en</a:t>
+              <a:t>de</a:t>
             </a:r>
             <a:endParaRPr lang="en-US" sz="1300" dirty="0"/>
           </a:p>
@@ -12302,7 +12197,7 @@
                 <a:ea typeface="Calibri" pitchFamily="34" charset="-122"/>
                 <a:cs typeface="Calibri" pitchFamily="34" charset="-120"/>
               </a:rPr>
-              <a:t>to make or cause</a:t>
+              <a:t>undo; remove; down</a:t>
             </a:r>
             <a:endParaRPr lang="en-US" sz="850" dirty="0"/>
           </a:p>
@@ -12414,7 +12309,7 @@
                 <a:ea typeface="Calibri" pitchFamily="34" charset="-122"/>
                 <a:cs typeface="Calibri" pitchFamily="34" charset="-120"/>
               </a:rPr>
-              <a:t>brightness, illumination</a:t>
+              <a:t>brightness; not heavy</a:t>
             </a:r>
             <a:endParaRPr lang="en-US" sz="850" dirty="0"/>
           </a:p>
@@ -12487,7 +12382,7 @@
                 <a:ea typeface="Trebuchet MS" pitchFamily="34" charset="-122"/>
                 <a:cs typeface="Trebuchet MS" pitchFamily="34" charset="-120"/>
               </a:rPr>
-              <a:t>en</a:t>
+              <a:t>ed</a:t>
             </a:r>
             <a:endParaRPr lang="en-US" sz="1300" dirty="0"/>
           </a:p>
@@ -12526,7 +12421,7 @@
                 <a:ea typeface="Calibri" pitchFamily="34" charset="-122"/>
                 <a:cs typeface="Calibri" pitchFamily="34" charset="-120"/>
               </a:rPr>
-              <a:t>to cause or become</a:t>
+              <a:t>past tense</a:t>
             </a:r>
             <a:endParaRPr lang="en-US" sz="850" dirty="0"/>
           </a:p>
@@ -13082,7 +12977,7 @@
                 <a:ea typeface="Calibri" pitchFamily="34" charset="-122"/>
                 <a:cs typeface="Calibri" pitchFamily="34" charset="-120"/>
               </a:rPr>
-              <a:t>Word Labs  •  wordlabs.app  •  Root: 'light' = brightness, illumination, not heavy</a:t>
+              <a:t>Word Labs  •  wordlabs.app  •  Root: 'light' = brightness; not heavy</a:t>
             </a:r>
             <a:endParaRPr lang="en-US" sz="800" dirty="0"/>
           </a:p>
@@ -13221,7 +13116,7 @@
                 <a:ea typeface="Trebuchet MS" pitchFamily="34" charset="-122"/>
                 <a:cs typeface="Trebuchet MS" pitchFamily="34" charset="-120"/>
               </a:rPr>
-              <a:t>enlighten</a:t>
+              <a:t>delighted</a:t>
             </a:r>
             <a:endParaRPr lang="en-US" sz="2800" dirty="0"/>
           </a:p>
@@ -13360,7 +13255,7 @@
                 <a:ea typeface="Trebuchet MS" pitchFamily="34" charset="-122"/>
                 <a:cs typeface="Trebuchet MS" pitchFamily="34" charset="-120"/>
               </a:rPr>
-              <a:t>en</a:t>
+              <a:t>de</a:t>
             </a:r>
             <a:endParaRPr lang="en-US" sz="1300" dirty="0"/>
           </a:p>
@@ -13399,7 +13294,7 @@
                 <a:ea typeface="Calibri" pitchFamily="34" charset="-122"/>
                 <a:cs typeface="Calibri" pitchFamily="34" charset="-120"/>
               </a:rPr>
-              <a:t>to make or cause</a:t>
+              <a:t>undo; remove; down</a:t>
             </a:r>
             <a:endParaRPr lang="en-US" sz="850" dirty="0"/>
           </a:p>
@@ -13511,7 +13406,7 @@
                 <a:ea typeface="Calibri" pitchFamily="34" charset="-122"/>
                 <a:cs typeface="Calibri" pitchFamily="34" charset="-120"/>
               </a:rPr>
-              <a:t>brightness, illumination</a:t>
+              <a:t>brightness; not heavy</a:t>
             </a:r>
             <a:endParaRPr lang="en-US" sz="850" dirty="0"/>
           </a:p>
@@ -13584,7 +13479,7 @@
                 <a:ea typeface="Trebuchet MS" pitchFamily="34" charset="-122"/>
                 <a:cs typeface="Trebuchet MS" pitchFamily="34" charset="-120"/>
               </a:rPr>
-              <a:t>en</a:t>
+              <a:t>ed</a:t>
             </a:r>
             <a:endParaRPr lang="en-US" sz="1300" dirty="0"/>
           </a:p>
@@ -13623,7 +13518,7 @@
                 <a:ea typeface="Calibri" pitchFamily="34" charset="-122"/>
                 <a:cs typeface="Calibri" pitchFamily="34" charset="-120"/>
               </a:rPr>
-              <a:t>to cause or become</a:t>
+              <a:t>past tense</a:t>
             </a:r>
             <a:endParaRPr lang="en-US" sz="850" dirty="0"/>
           </a:p>
@@ -13782,7 +13677,7 @@
                 <a:ea typeface="Trebuchet MS" pitchFamily="34" charset="-122"/>
                 <a:cs typeface="Trebuchet MS" pitchFamily="34" charset="-120"/>
               </a:rPr>
-              <a:t>en</a:t>
+              <a:t>de</a:t>
             </a:r>
             <a:endParaRPr lang="en-US" sz="1400" dirty="0"/>
           </a:p>
@@ -13992,7 +13887,7 @@
                 <a:ea typeface="Trebuchet MS" pitchFamily="34" charset="-122"/>
                 <a:cs typeface="Trebuchet MS" pitchFamily="34" charset="-120"/>
               </a:rPr>
-              <a:t>en</a:t>
+              <a:t>ed</a:t>
             </a:r>
             <a:endParaRPr lang="en-US" sz="1400" dirty="0"/>
           </a:p>
@@ -14325,7 +14220,7 @@
                 <a:ea typeface="Calibri" pitchFamily="34" charset="-122"/>
                 <a:cs typeface="Calibri" pitchFamily="34" charset="-120"/>
               </a:rPr>
-              <a:t>Root 'light' — brightness, illumination, not heavy</a:t>
+              <a:t>Root 'light' — brightness; not heavy</a:t>
             </a:r>
             <a:endParaRPr lang="en-US" sz="1600" dirty="0"/>
           </a:p>
@@ -14681,7 +14576,7 @@
                 <a:ea typeface="Calibri" pitchFamily="34" charset="-122"/>
                 <a:cs typeface="Calibri" pitchFamily="34" charset="-120"/>
               </a:rPr>
-              <a:t>Word Labs  •  wordlabs.app  •  Root: 'light' = brightness, illumination, not heavy</a:t>
+              <a:t>Word Labs  •  wordlabs.app  •  Root: 'light' = brightness; not heavy</a:t>
             </a:r>
             <a:endParaRPr lang="en-US" sz="800" dirty="0"/>
           </a:p>
@@ -14820,7 +14715,7 @@
                 <a:ea typeface="Trebuchet MS" pitchFamily="34" charset="-122"/>
                 <a:cs typeface="Trebuchet MS" pitchFamily="34" charset="-120"/>
               </a:rPr>
-              <a:t>enlighten</a:t>
+              <a:t>delighted</a:t>
             </a:r>
             <a:endParaRPr lang="en-US" sz="2800" dirty="0"/>
           </a:p>
@@ -14959,7 +14854,7 @@
                 <a:ea typeface="Trebuchet MS" pitchFamily="34" charset="-122"/>
                 <a:cs typeface="Trebuchet MS" pitchFamily="34" charset="-120"/>
               </a:rPr>
-              <a:t>en</a:t>
+              <a:t>de</a:t>
             </a:r>
             <a:endParaRPr lang="en-US" sz="1300" dirty="0"/>
           </a:p>
@@ -14998,7 +14893,7 @@
                 <a:ea typeface="Calibri" pitchFamily="34" charset="-122"/>
                 <a:cs typeface="Calibri" pitchFamily="34" charset="-120"/>
               </a:rPr>
-              <a:t>to make or cause</a:t>
+              <a:t>undo; remove; down</a:t>
             </a:r>
             <a:endParaRPr lang="en-US" sz="850" dirty="0"/>
           </a:p>
@@ -15110,7 +15005,7 @@
                 <a:ea typeface="Calibri" pitchFamily="34" charset="-122"/>
                 <a:cs typeface="Calibri" pitchFamily="34" charset="-120"/>
               </a:rPr>
-              <a:t>brightness, illumination</a:t>
+              <a:t>brightness; not heavy</a:t>
             </a:r>
             <a:endParaRPr lang="en-US" sz="850" dirty="0"/>
           </a:p>
@@ -15183,7 +15078,7 @@
                 <a:ea typeface="Trebuchet MS" pitchFamily="34" charset="-122"/>
                 <a:cs typeface="Trebuchet MS" pitchFamily="34" charset="-120"/>
               </a:rPr>
-              <a:t>en</a:t>
+              <a:t>ed</a:t>
             </a:r>
             <a:endParaRPr lang="en-US" sz="1300" dirty="0"/>
           </a:p>
@@ -15222,7 +15117,7 @@
                 <a:ea typeface="Calibri" pitchFamily="34" charset="-122"/>
                 <a:cs typeface="Calibri" pitchFamily="34" charset="-120"/>
               </a:rPr>
-              <a:t>to cause or become</a:t>
+              <a:t>past tense</a:t>
             </a:r>
             <a:endParaRPr lang="en-US" sz="850" dirty="0"/>
           </a:p>
@@ -15381,7 +15276,7 @@
                 <a:ea typeface="Trebuchet MS" pitchFamily="34" charset="-122"/>
                 <a:cs typeface="Trebuchet MS" pitchFamily="34" charset="-120"/>
               </a:rPr>
-              <a:t>en</a:t>
+              <a:t>de</a:t>
             </a:r>
             <a:endParaRPr lang="en-US" sz="1400" dirty="0"/>
           </a:p>
@@ -15591,7 +15486,7 @@
                 <a:ea typeface="Trebuchet MS" pitchFamily="34" charset="-122"/>
                 <a:cs typeface="Trebuchet MS" pitchFamily="34" charset="-120"/>
               </a:rPr>
-              <a:t>en</a:t>
+              <a:t>ed</a:t>
             </a:r>
             <a:endParaRPr lang="en-US" sz="1400" dirty="0"/>
           </a:p>
@@ -15672,11 +15567,11 @@
         <p:spPr>
           <a:xfrm>
             <a:off x="1874520" y="4096512"/>
-            <a:ext cx="6903720" cy="804672"/>
+            <a:ext cx="6903720" cy="658368"/>
           </a:xfrm>
           <a:prstGeom prst="rect">
             <a:avLst>
-              <a:gd name="adj" fmla="val 6818"/>
+              <a:gd name="adj" fmla="val 8333"/>
             </a:avLst>
           </a:prstGeom>
           <a:solidFill>
@@ -15698,12 +15593,12 @@
         </p:nvSpPr>
         <p:spPr>
           <a:xfrm>
-            <a:off x="2124837" y="4169664"/>
-            <a:ext cx="685800" cy="384048"/>
+            <a:off x="2254649" y="4169664"/>
+            <a:ext cx="685800" cy="475488"/>
           </a:xfrm>
           <a:prstGeom prst="rect">
             <a:avLst>
-              <a:gd name="adj" fmla="val 9524"/>
+              <a:gd name="adj" fmla="val 7692"/>
             </a:avLst>
           </a:prstGeom>
           <a:solidFill>
@@ -15725,8 +15620,8 @@
         </p:nvSpPr>
         <p:spPr>
           <a:xfrm>
-            <a:off x="2124837" y="4169664"/>
-            <a:ext cx="685800" cy="384048"/>
+            <a:off x="2254649" y="4169664"/>
+            <a:ext cx="685800" cy="475488"/>
           </a:xfrm>
           <a:prstGeom prst="rect">
             <a:avLst/>
@@ -15750,7 +15645,7 @@
                 <a:ea typeface="Trebuchet MS" pitchFamily="34" charset="-122"/>
                 <a:cs typeface="Trebuchet MS" pitchFamily="34" charset="-120"/>
               </a:rPr>
-              <a:t>e</a:t>
+              <a:t>d</a:t>
             </a:r>
             <a:endParaRPr lang="en-US" sz="900" dirty="0"/>
           </a:p>
@@ -15764,12 +15659,12 @@
         </p:nvSpPr>
         <p:spPr>
           <a:xfrm>
-            <a:off x="3033522" y="4169664"/>
-            <a:ext cx="685800" cy="384048"/>
+            <a:off x="3293146" y="4169664"/>
+            <a:ext cx="685800" cy="475488"/>
           </a:xfrm>
           <a:prstGeom prst="rect">
             <a:avLst>
-              <a:gd name="adj" fmla="val 9524"/>
+              <a:gd name="adj" fmla="val 7692"/>
             </a:avLst>
           </a:prstGeom>
           <a:solidFill>
@@ -15791,8 +15686,8 @@
         </p:nvSpPr>
         <p:spPr>
           <a:xfrm>
-            <a:off x="3033522" y="4169664"/>
-            <a:ext cx="685800" cy="384048"/>
+            <a:off x="3293146" y="4169664"/>
+            <a:ext cx="685800" cy="475488"/>
           </a:xfrm>
           <a:prstGeom prst="rect">
             <a:avLst/>
@@ -15816,7 +15711,7 @@
                 <a:ea typeface="Trebuchet MS" pitchFamily="34" charset="-122"/>
                 <a:cs typeface="Trebuchet MS" pitchFamily="34" charset="-120"/>
               </a:rPr>
-              <a:t>n</a:t>
+              <a:t>e</a:t>
             </a:r>
             <a:endParaRPr lang="en-US" sz="900" dirty="0"/>
           </a:p>
@@ -15830,12 +15725,12 @@
         </p:nvSpPr>
         <p:spPr>
           <a:xfrm>
-            <a:off x="3942207" y="4169664"/>
-            <a:ext cx="685800" cy="384048"/>
+            <a:off x="4331643" y="4169664"/>
+            <a:ext cx="685800" cy="475488"/>
           </a:xfrm>
           <a:prstGeom prst="rect">
             <a:avLst>
-              <a:gd name="adj" fmla="val 9524"/>
+              <a:gd name="adj" fmla="val 7692"/>
             </a:avLst>
           </a:prstGeom>
           <a:solidFill>
@@ -15857,8 +15752,8 @@
         </p:nvSpPr>
         <p:spPr>
           <a:xfrm>
-            <a:off x="3942207" y="4169664"/>
-            <a:ext cx="685800" cy="384048"/>
+            <a:off x="4331643" y="4169664"/>
+            <a:ext cx="685800" cy="475488"/>
           </a:xfrm>
           <a:prstGeom prst="rect">
             <a:avLst/>
@@ -15896,12 +15791,12 @@
         </p:nvSpPr>
         <p:spPr>
           <a:xfrm>
-            <a:off x="4850892" y="4169664"/>
-            <a:ext cx="685800" cy="384048"/>
+            <a:off x="5370141" y="4169664"/>
+            <a:ext cx="685800" cy="475488"/>
           </a:xfrm>
           <a:prstGeom prst="rect">
             <a:avLst>
-              <a:gd name="adj" fmla="val 9524"/>
+              <a:gd name="adj" fmla="val 7692"/>
             </a:avLst>
           </a:prstGeom>
           <a:solidFill>
@@ -15923,8 +15818,8 @@
         </p:nvSpPr>
         <p:spPr>
           <a:xfrm>
-            <a:off x="4850892" y="4169664"/>
-            <a:ext cx="685800" cy="384048"/>
+            <a:off x="5370141" y="4169664"/>
+            <a:ext cx="685800" cy="475488"/>
           </a:xfrm>
           <a:prstGeom prst="rect">
             <a:avLst/>
@@ -15956,57 +15851,18 @@
       </p:sp>
       <p:sp>
         <p:nvSpPr>
-          <p:cNvPr id="47" name="Text 45"/>
-          <p:cNvSpPr/>
-          <p:nvPr/>
-        </p:nvSpPr>
-        <p:spPr>
-          <a:xfrm>
-            <a:off x="4850892" y="4572000"/>
-            <a:ext cx="685800" cy="219456"/>
-          </a:xfrm>
-          <a:prstGeom prst="rect">
-            <a:avLst/>
-          </a:prstGeom>
-          <a:noFill/>
-          <a:ln/>
-        </p:spPr>
-        <p:txBody>
-          <a:bodyPr wrap="square" lIns="0" tIns="0" rIns="0" bIns="0" rtlCol="0" anchor="t"/>
-          <a:lstStyle/>
-          <a:p>
-            <a:pPr algn="ctr" indent="0" marL="0">
-              <a:buNone/>
-            </a:pPr>
-            <a:r>
-              <a:rPr lang="en-US" sz="750" i="1" dirty="0">
-                <a:solidFill>
-                  <a:srgbClr val="94A3B8"/>
-                </a:solidFill>
-                <a:latin typeface="Calibri" pitchFamily="34" charset="0"/>
-                <a:ea typeface="Calibri" pitchFamily="34" charset="-122"/>
-                <a:cs typeface="Calibri" pitchFamily="34" charset="-120"/>
-              </a:rPr>
-              <a:t>/igh/</a:t>
-            </a:r>
-            <a:endParaRPr lang="en-US" sz="750" dirty="0"/>
-          </a:p>
-        </p:txBody>
-      </p:sp>
-      <p:sp>
-        <p:nvSpPr>
-          <p:cNvPr id="48" name="Shape 46"/>
-          <p:cNvSpPr/>
-          <p:nvPr/>
-        </p:nvSpPr>
-        <p:spPr>
-          <a:xfrm>
-            <a:off x="5759577" y="4169664"/>
-            <a:ext cx="685800" cy="384048"/>
+          <p:cNvPr id="47" name="Shape 45"/>
+          <p:cNvSpPr/>
+          <p:nvPr/>
+        </p:nvSpPr>
+        <p:spPr>
+          <a:xfrm>
+            <a:off x="6408638" y="4169664"/>
+            <a:ext cx="685800" cy="475488"/>
           </a:xfrm>
           <a:prstGeom prst="rect">
             <a:avLst>
-              <a:gd name="adj" fmla="val 9524"/>
+              <a:gd name="adj" fmla="val 7692"/>
             </a:avLst>
           </a:prstGeom>
           <a:solidFill>
@@ -16022,14 +15878,14 @@
       </p:sp>
       <p:sp>
         <p:nvSpPr>
-          <p:cNvPr id="49" name="Text 47"/>
-          <p:cNvSpPr/>
-          <p:nvPr/>
-        </p:nvSpPr>
-        <p:spPr>
-          <a:xfrm>
-            <a:off x="5759577" y="4169664"/>
-            <a:ext cx="685800" cy="384048"/>
+          <p:cNvPr id="48" name="Text 46"/>
+          <p:cNvSpPr/>
+          <p:nvPr/>
+        </p:nvSpPr>
+        <p:spPr>
+          <a:xfrm>
+            <a:off x="6408638" y="4169664"/>
+            <a:ext cx="685800" cy="475488"/>
           </a:xfrm>
           <a:prstGeom prst="rect">
             <a:avLst/>
@@ -16061,18 +15917,18 @@
       </p:sp>
       <p:sp>
         <p:nvSpPr>
-          <p:cNvPr id="50" name="Shape 48"/>
-          <p:cNvSpPr/>
-          <p:nvPr/>
-        </p:nvSpPr>
-        <p:spPr>
-          <a:xfrm>
-            <a:off x="6668262" y="4169664"/>
-            <a:ext cx="685800" cy="384048"/>
+          <p:cNvPr id="49" name="Shape 47"/>
+          <p:cNvSpPr/>
+          <p:nvPr/>
+        </p:nvSpPr>
+        <p:spPr>
+          <a:xfrm>
+            <a:off x="7447135" y="4169664"/>
+            <a:ext cx="685800" cy="475488"/>
           </a:xfrm>
           <a:prstGeom prst="rect">
             <a:avLst>
-              <a:gd name="adj" fmla="val 9524"/>
+              <a:gd name="adj" fmla="val 7692"/>
             </a:avLst>
           </a:prstGeom>
           <a:solidFill>
@@ -16088,14 +15944,14 @@
       </p:sp>
       <p:sp>
         <p:nvSpPr>
-          <p:cNvPr id="51" name="Text 49"/>
-          <p:cNvSpPr/>
-          <p:nvPr/>
-        </p:nvSpPr>
-        <p:spPr>
-          <a:xfrm>
-            <a:off x="6668262" y="4169664"/>
-            <a:ext cx="685800" cy="384048"/>
+          <p:cNvPr id="50" name="Text 48"/>
+          <p:cNvSpPr/>
+          <p:nvPr/>
+        </p:nvSpPr>
+        <p:spPr>
+          <a:xfrm>
+            <a:off x="7447135" y="4169664"/>
+            <a:ext cx="685800" cy="475488"/>
           </a:xfrm>
           <a:prstGeom prst="rect">
             <a:avLst/>
@@ -16119,73 +15975,7 @@
                 <a:ea typeface="Trebuchet MS" pitchFamily="34" charset="-122"/>
                 <a:cs typeface="Trebuchet MS" pitchFamily="34" charset="-120"/>
               </a:rPr>
-              <a:t>e</a:t>
-            </a:r>
-            <a:endParaRPr lang="en-US" sz="900" dirty="0"/>
-          </a:p>
-        </p:txBody>
-      </p:sp>
-      <p:sp>
-        <p:nvSpPr>
-          <p:cNvPr id="52" name="Shape 50"/>
-          <p:cNvSpPr/>
-          <p:nvPr/>
-        </p:nvSpPr>
-        <p:spPr>
-          <a:xfrm>
-            <a:off x="7576947" y="4169664"/>
-            <a:ext cx="685800" cy="384048"/>
-          </a:xfrm>
-          <a:prstGeom prst="rect">
-            <a:avLst>
-              <a:gd name="adj" fmla="val 9524"/>
-            </a:avLst>
-          </a:prstGeom>
-          <a:solidFill>
-            <a:srgbClr val="FFFFFF"/>
-          </a:solidFill>
-          <a:ln w="12700">
-            <a:solidFill>
-              <a:srgbClr val="DB2777"/>
-            </a:solidFill>
-            <a:prstDash val="solid"/>
-          </a:ln>
-        </p:spPr>
-      </p:sp>
-      <p:sp>
-        <p:nvSpPr>
-          <p:cNvPr id="53" name="Text 51"/>
-          <p:cNvSpPr/>
-          <p:nvPr/>
-        </p:nvSpPr>
-        <p:spPr>
-          <a:xfrm>
-            <a:off x="7576947" y="4169664"/>
-            <a:ext cx="685800" cy="384048"/>
-          </a:xfrm>
-          <a:prstGeom prst="rect">
-            <a:avLst/>
-          </a:prstGeom>
-          <a:noFill/>
-          <a:ln/>
-        </p:spPr>
-        <p:txBody>
-          <a:bodyPr wrap="square" lIns="0" tIns="0" rIns="0" bIns="0" rtlCol="0" anchor="ctr"/>
-          <a:lstStyle/>
-          <a:p>
-            <a:pPr algn="ctr" indent="0" marL="0">
-              <a:buNone/>
-            </a:pPr>
-            <a:r>
-              <a:rPr lang="en-US" sz="900" b="1" dirty="0">
-                <a:solidFill>
-                  <a:srgbClr val="9D174D"/>
-                </a:solidFill>
-                <a:latin typeface="Trebuchet MS" pitchFamily="34" charset="0"/>
-                <a:ea typeface="Trebuchet MS" pitchFamily="34" charset="-122"/>
-                <a:cs typeface="Trebuchet MS" pitchFamily="34" charset="-120"/>
-              </a:rPr>
-              <a:t>n</a:t>
+              <a:t>ed</a:t>
             </a:r>
             <a:endParaRPr lang="en-US" sz="900" dirty="0"/>
           </a:p>
@@ -16759,7 +16549,7 @@
                 <a:ea typeface="Calibri" pitchFamily="34" charset="-122"/>
                 <a:cs typeface="Calibri" pitchFamily="34" charset="-120"/>
               </a:rPr>
-              <a:t>Word Labs  •  wordlabs.app  •  Root: 'light' = brightness, illumination, not heavy</a:t>
+              <a:t>Word Labs  •  wordlabs.app  •  Root: 'light' = brightness; not heavy</a:t>
             </a:r>
             <a:endParaRPr lang="en-US" sz="800" dirty="0"/>
           </a:p>
@@ -17093,7 +16883,7 @@
                 <a:ea typeface="Trebuchet MS" pitchFamily="34" charset="-122"/>
                 <a:cs typeface="Trebuchet MS" pitchFamily="34" charset="-120"/>
               </a:rPr>
-              <a:t>2</a:t>
+              <a:t>0</a:t>
             </a:r>
             <a:pPr algn="ctr" indent="0" marL="0">
               <a:buNone/>
@@ -17107,7 +16897,7 @@
                 <a:ea typeface="Trebuchet MS" pitchFamily="34" charset="-122"/>
                 <a:cs typeface="Trebuchet MS" pitchFamily="34" charset="-120"/>
               </a:rPr>
-              <a:t>  punctuation marks</a:t>
+              <a:t>  punctuation mark</a:t>
             </a:r>
             <a:endParaRPr lang="en-US" sz="2800" dirty="0"/>
           </a:p>
@@ -17399,7 +17189,7 @@
                 <a:ea typeface="Calibri" pitchFamily="34" charset="-122"/>
                 <a:cs typeface="Calibri" pitchFamily="34" charset="-120"/>
               </a:rPr>
-              <a:t>Word Labs  •  wordlabs.app  •  Root: 'light' = brightness, illumination, not heavy</a:t>
+              <a:t>Word Labs  •  wordlabs.app  •  Root: 'light' = brightness; not heavy</a:t>
             </a:r>
             <a:endParaRPr lang="en-US" sz="800" dirty="0"/>
           </a:p>
@@ -17511,7 +17301,7 @@
                 <a:ea typeface="Calibri" pitchFamily="34" charset="-122"/>
                 <a:cs typeface="Calibri" pitchFamily="34" charset="-120"/>
               </a:rPr>
-              <a:t>Walking </a:t>
+              <a:t>We had a </a:t>
             </a:r>
             <a:pPr algn="l" indent="0" marL="0">
               <a:buNone/>
@@ -17528,7 +17318,7 @@
                 <a:ea typeface="Calibri" pitchFamily="34" charset="-122"/>
                 <a:cs typeface="Calibri" pitchFamily="34" charset="-120"/>
               </a:rPr>
-              <a:t>lightly</a:t>
+              <a:t>delightful</a:t>
             </a:r>
             <a:pPr algn="l" indent="0" marL="0">
               <a:buNone/>
@@ -17542,7 +17332,7 @@
                 <a:ea typeface="Calibri" pitchFamily="34" charset="-122"/>
                 <a:cs typeface="Calibri" pitchFamily="34" charset="-120"/>
               </a:rPr>
-              <a:t> across the room, she felt </a:t>
+              <a:t> afternoon picnicking by the lake. The monk searched for years to find </a:t>
             </a:r>
             <a:pPr algn="l" indent="0" marL="0">
               <a:buNone/>
@@ -17559,7 +17349,7 @@
                 <a:ea typeface="Calibri" pitchFamily="34" charset="-122"/>
                 <a:cs typeface="Calibri" pitchFamily="34" charset="-120"/>
               </a:rPr>
-              <a:t>delight</a:t>
+              <a:t>enlightenment</a:t>
             </a:r>
             <a:pPr algn="l" indent="0" marL="0">
               <a:buNone/>
@@ -17573,7 +17363,7 @@
                 <a:ea typeface="Calibri" pitchFamily="34" charset="-122"/>
                 <a:cs typeface="Calibri" pitchFamily="34" charset="-120"/>
               </a:rPr>
-              <a:t> when the </a:t>
+              <a:t>. The </a:t>
             </a:r>
             <a:pPr algn="l" indent="0" marL="0">
               <a:buNone/>
@@ -17590,7 +17380,7 @@
                 <a:ea typeface="Calibri" pitchFamily="34" charset="-122"/>
                 <a:cs typeface="Calibri" pitchFamily="34" charset="-120"/>
               </a:rPr>
-              <a:t>spotlight</a:t>
+              <a:t>ultralight</a:t>
             </a:r>
             <a:pPr algn="l" indent="0" marL="0">
               <a:buNone/>
@@ -17604,7 +17394,7 @@
                 <a:ea typeface="Calibri" pitchFamily="34" charset="-122"/>
                 <a:cs typeface="Calibri" pitchFamily="34" charset="-120"/>
               </a:rPr>
-              <a:t> found her on the stage.</a:t>
+              <a:t> tent was easy to carry up the mountain.</a:t>
             </a:r>
             <a:endParaRPr lang="en-US" sz="1800" dirty="0"/>
           </a:p>
@@ -17759,7 +17549,7 @@
                 <a:ea typeface="Trebuchet MS" pitchFamily="34" charset="-122"/>
                 <a:cs typeface="Trebuchet MS" pitchFamily="34" charset="-120"/>
               </a:rPr>
-              <a:t>lightly</a:t>
+              <a:t>delightful</a:t>
             </a:r>
             <a:endParaRPr lang="en-US" sz="1400" dirty="0"/>
           </a:p>
@@ -17887,7 +17677,7 @@
                 <a:ea typeface="Trebuchet MS" pitchFamily="34" charset="-122"/>
                 <a:cs typeface="Trebuchet MS" pitchFamily="34" charset="-120"/>
               </a:rPr>
-              <a:t>delight</a:t>
+              <a:t>enlightenment</a:t>
             </a:r>
             <a:endParaRPr lang="en-US" sz="1400" dirty="0"/>
           </a:p>
@@ -18015,7 +17805,7 @@
                 <a:ea typeface="Trebuchet MS" pitchFamily="34" charset="-122"/>
                 <a:cs typeface="Trebuchet MS" pitchFamily="34" charset="-120"/>
               </a:rPr>
-              <a:t>spotlight</a:t>
+              <a:t>ultralight</a:t>
             </a:r>
             <a:endParaRPr lang="en-US" sz="1400" dirty="0"/>
           </a:p>
@@ -18346,7 +18136,7 @@
                 <a:ea typeface="Calibri" pitchFamily="34" charset="-122"/>
                 <a:cs typeface="Calibri" pitchFamily="34" charset="-120"/>
               </a:rPr>
-              <a:t>Word Labs  •  wordlabs.app  •  Root: 'light' = brightness, illumination, not heavy</a:t>
+              <a:t>Word Labs  •  wordlabs.app  •  Root: 'light' = brightness; not heavy</a:t>
             </a:r>
             <a:endParaRPr lang="en-US" sz="800" dirty="0"/>
           </a:p>
@@ -18485,7 +18275,7 @@
                 <a:ea typeface="Trebuchet MS" pitchFamily="34" charset="-122"/>
                 <a:cs typeface="Trebuchet MS" pitchFamily="34" charset="-120"/>
               </a:rPr>
-              <a:t>lightly</a:t>
+              <a:t>delightful</a:t>
             </a:r>
             <a:endParaRPr lang="en-US" sz="2800" dirty="0"/>
           </a:p>
@@ -19173,7 +18963,7 @@
                 <a:ea typeface="Calibri" pitchFamily="34" charset="-122"/>
                 <a:cs typeface="Calibri" pitchFamily="34" charset="-120"/>
               </a:rPr>
-              <a:t>Word Labs  •  wordlabs.app  •  Root: 'light' = brightness, illumination, not heavy</a:t>
+              <a:t>Word Labs  •  wordlabs.app  •  Root: 'light' = brightness; not heavy</a:t>
             </a:r>
             <a:endParaRPr lang="en-US" sz="800" dirty="0"/>
           </a:p>
@@ -19312,7 +19102,7 @@
                 <a:ea typeface="Trebuchet MS" pitchFamily="34" charset="-122"/>
                 <a:cs typeface="Trebuchet MS" pitchFamily="34" charset="-120"/>
               </a:rPr>
-              <a:t>lightly</a:t>
+              <a:t>delightful</a:t>
             </a:r>
             <a:endParaRPr lang="en-US" sz="2800" dirty="0"/>
           </a:p>
@@ -19392,7 +19182,7 @@
         </p:nvSpPr>
         <p:spPr>
           <a:xfrm>
-            <a:off x="2938272" y="2258568"/>
+            <a:off x="2221992" y="2258568"/>
             <a:ext cx="1828800" cy="292608"/>
           </a:xfrm>
           <a:prstGeom prst="rect">
@@ -19401,11 +19191,11 @@
             </a:avLst>
           </a:prstGeom>
           <a:solidFill>
-            <a:srgbClr val="CCFBF1"/>
+            <a:srgbClr val="DDD6FE"/>
           </a:solidFill>
           <a:ln w="19050">
             <a:solidFill>
-              <a:srgbClr val="0D9488"/>
+              <a:srgbClr val="7C3AED"/>
             </a:solidFill>
             <a:prstDash val="solid"/>
           </a:ln>
@@ -19426,7 +19216,7 @@
         </p:nvSpPr>
         <p:spPr>
           <a:xfrm>
-            <a:off x="2938272" y="2258568"/>
+            <a:off x="2221992" y="2258568"/>
             <a:ext cx="1828800" cy="292608"/>
           </a:xfrm>
           <a:prstGeom prst="rect">
@@ -19445,13 +19235,13 @@
             <a:r>
               <a:rPr lang="en-US" sz="1300" b="1" dirty="0">
                 <a:solidFill>
-                  <a:srgbClr val="0F766E"/>
+                  <a:srgbClr val="4C1D95"/>
                 </a:solidFill>
                 <a:latin typeface="Trebuchet MS" pitchFamily="34" charset="0"/>
                 <a:ea typeface="Trebuchet MS" pitchFamily="34" charset="-122"/>
                 <a:cs typeface="Trebuchet MS" pitchFamily="34" charset="-120"/>
               </a:rPr>
-              <a:t>light</a:t>
+              <a:t>de</a:t>
             </a:r>
             <a:endParaRPr lang="en-US" sz="1300" dirty="0"/>
           </a:p>
@@ -19465,7 +19255,7 @@
         </p:nvSpPr>
         <p:spPr>
           <a:xfrm>
-            <a:off x="2938272" y="2569464"/>
+            <a:off x="2221992" y="2569464"/>
             <a:ext cx="1828800" cy="201168"/>
           </a:xfrm>
           <a:prstGeom prst="rect">
@@ -19490,7 +19280,7 @@
                 <a:ea typeface="Calibri" pitchFamily="34" charset="-122"/>
                 <a:cs typeface="Calibri" pitchFamily="34" charset="-120"/>
               </a:rPr>
-              <a:t>brightness; not heavy</a:t>
+              <a:t>undo; remove; down</a:t>
             </a:r>
             <a:endParaRPr lang="en-US" sz="850" dirty="0"/>
           </a:p>
@@ -19504,7 +19294,7 @@
         </p:nvSpPr>
         <p:spPr>
           <a:xfrm>
-            <a:off x="5803392" y="2258568"/>
+            <a:off x="4370832" y="2258568"/>
             <a:ext cx="1828800" cy="292608"/>
           </a:xfrm>
           <a:prstGeom prst="rect">
@@ -19513,11 +19303,11 @@
             </a:avLst>
           </a:prstGeom>
           <a:solidFill>
-            <a:srgbClr val="FCE7F3"/>
+            <a:srgbClr val="CCFBF1"/>
           </a:solidFill>
           <a:ln w="19050">
             <a:solidFill>
-              <a:srgbClr val="DB2777"/>
+              <a:srgbClr val="0D9488"/>
             </a:solidFill>
             <a:prstDash val="solid"/>
           </a:ln>
@@ -19538,7 +19328,7 @@
         </p:nvSpPr>
         <p:spPr>
           <a:xfrm>
-            <a:off x="5803392" y="2258568"/>
+            <a:off x="4370832" y="2258568"/>
             <a:ext cx="1828800" cy="292608"/>
           </a:xfrm>
           <a:prstGeom prst="rect">
@@ -19557,13 +19347,13 @@
             <a:r>
               <a:rPr lang="en-US" sz="1300" b="1" dirty="0">
                 <a:solidFill>
-                  <a:srgbClr val="9D174D"/>
+                  <a:srgbClr val="0F766E"/>
                 </a:solidFill>
                 <a:latin typeface="Trebuchet MS" pitchFamily="34" charset="0"/>
                 <a:ea typeface="Trebuchet MS" pitchFamily="34" charset="-122"/>
                 <a:cs typeface="Trebuchet MS" pitchFamily="34" charset="-120"/>
               </a:rPr>
-              <a:t>ly</a:t>
+              <a:t>light</a:t>
             </a:r>
             <a:endParaRPr lang="en-US" sz="1300" dirty="0"/>
           </a:p>
@@ -19577,7 +19367,7 @@
         </p:nvSpPr>
         <p:spPr>
           <a:xfrm>
-            <a:off x="5803392" y="2569464"/>
+            <a:off x="4370832" y="2569464"/>
             <a:ext cx="1828800" cy="201168"/>
           </a:xfrm>
           <a:prstGeom prst="rect">
@@ -19602,7 +19392,7 @@
                 <a:ea typeface="Calibri" pitchFamily="34" charset="-122"/>
                 <a:cs typeface="Calibri" pitchFamily="34" charset="-120"/>
               </a:rPr>
-              <a:t>in a way that is</a:t>
+              <a:t>brightness; not heavy</a:t>
             </a:r>
             <a:endParaRPr lang="en-US" sz="850" dirty="0"/>
           </a:p>
@@ -19611,6 +19401,118 @@
       <p:sp>
         <p:nvSpPr>
           <p:cNvPr id="22" name="Shape 20"/>
+          <p:cNvSpPr/>
+          <p:nvPr/>
+        </p:nvSpPr>
+        <p:spPr>
+          <a:xfrm>
+            <a:off x="6519672" y="2258568"/>
+            <a:ext cx="1828800" cy="292608"/>
+          </a:xfrm>
+          <a:prstGeom prst="rect">
+            <a:avLst>
+              <a:gd name="adj" fmla="val 25000"/>
+            </a:avLst>
+          </a:prstGeom>
+          <a:solidFill>
+            <a:srgbClr val="FCE7F3"/>
+          </a:solidFill>
+          <a:ln w="19050">
+            <a:solidFill>
+              <a:srgbClr val="DB2777"/>
+            </a:solidFill>
+            <a:prstDash val="solid"/>
+          </a:ln>
+          <a:effectLst>
+            <a:outerShdw sx="100000" sy="100000" kx="0" ky="0" algn="bl" rotWithShape="0" blurRad="101600" dist="38100" dir="8100000">
+              <a:srgbClr val="000000">
+                <a:alpha val="12000"/>
+              </a:srgbClr>
+            </a:outerShdw>
+          </a:effectLst>
+        </p:spPr>
+      </p:sp>
+      <p:sp>
+        <p:nvSpPr>
+          <p:cNvPr id="23" name="Text 21"/>
+          <p:cNvSpPr/>
+          <p:nvPr/>
+        </p:nvSpPr>
+        <p:spPr>
+          <a:xfrm>
+            <a:off x="6519672" y="2258568"/>
+            <a:ext cx="1828800" cy="292608"/>
+          </a:xfrm>
+          <a:prstGeom prst="rect">
+            <a:avLst/>
+          </a:prstGeom>
+          <a:noFill/>
+          <a:ln/>
+        </p:spPr>
+        <p:txBody>
+          <a:bodyPr wrap="square" lIns="0" tIns="0" rIns="0" bIns="0" rtlCol="0" anchor="ctr"/>
+          <a:lstStyle/>
+          <a:p>
+            <a:pPr algn="ctr" indent="0" marL="0">
+              <a:buNone/>
+            </a:pPr>
+            <a:r>
+              <a:rPr lang="en-US" sz="1300" b="1" dirty="0">
+                <a:solidFill>
+                  <a:srgbClr val="9D174D"/>
+                </a:solidFill>
+                <a:latin typeface="Trebuchet MS" pitchFamily="34" charset="0"/>
+                <a:ea typeface="Trebuchet MS" pitchFamily="34" charset="-122"/>
+                <a:cs typeface="Trebuchet MS" pitchFamily="34" charset="-120"/>
+              </a:rPr>
+              <a:t>ful</a:t>
+            </a:r>
+            <a:endParaRPr lang="en-US" sz="1300" dirty="0"/>
+          </a:p>
+        </p:txBody>
+      </p:sp>
+      <p:sp>
+        <p:nvSpPr>
+          <p:cNvPr id="24" name="Text 22"/>
+          <p:cNvSpPr/>
+          <p:nvPr/>
+        </p:nvSpPr>
+        <p:spPr>
+          <a:xfrm>
+            <a:off x="6519672" y="2569464"/>
+            <a:ext cx="1828800" cy="201168"/>
+          </a:xfrm>
+          <a:prstGeom prst="rect">
+            <a:avLst/>
+          </a:prstGeom>
+          <a:noFill/>
+          <a:ln/>
+        </p:spPr>
+        <p:txBody>
+          <a:bodyPr wrap="square" lIns="0" tIns="0" rIns="0" bIns="0" rtlCol="0" anchor="t"/>
+          <a:lstStyle/>
+          <a:p>
+            <a:pPr algn="ctr" indent="0" marL="0">
+              <a:buNone/>
+            </a:pPr>
+            <a:r>
+              <a:rPr lang="en-US" sz="850" dirty="0">
+                <a:solidFill>
+                  <a:srgbClr val="475569"/>
+                </a:solidFill>
+                <a:latin typeface="Calibri" pitchFamily="34" charset="0"/>
+                <a:ea typeface="Calibri" pitchFamily="34" charset="-122"/>
+                <a:cs typeface="Calibri" pitchFamily="34" charset="-120"/>
+              </a:rPr>
+              <a:t>full of</a:t>
+            </a:r>
+            <a:endParaRPr lang="en-US" sz="850" dirty="0"/>
+          </a:p>
+        </p:txBody>
+      </p:sp>
+      <p:sp>
+        <p:nvSpPr>
+          <p:cNvPr id="25" name="Shape 23"/>
           <p:cNvSpPr/>
           <p:nvPr/>
         </p:nvSpPr>
@@ -19637,7 +19539,7 @@
       </p:sp>
       <p:sp>
         <p:nvSpPr>
-          <p:cNvPr id="23" name="Text 21"/>
+          <p:cNvPr id="26" name="Text 24"/>
           <p:cNvSpPr/>
           <p:nvPr/>
         </p:nvSpPr>
@@ -19676,7 +19578,7 @@
       </p:sp>
       <p:sp>
         <p:nvSpPr>
-          <p:cNvPr id="24" name="Shape 22"/>
+          <p:cNvPr id="27" name="Shape 25"/>
           <p:cNvSpPr/>
           <p:nvPr/>
         </p:nvSpPr>
@@ -19703,7 +19605,7 @@
       </p:sp>
       <p:sp>
         <p:nvSpPr>
-          <p:cNvPr id="25" name="Text 23"/>
+          <p:cNvPr id="28" name="Text 26"/>
           <p:cNvSpPr/>
           <p:nvPr/>
         </p:nvSpPr>
@@ -19742,7 +19644,7 @@
       </p:sp>
       <p:sp>
         <p:nvSpPr>
-          <p:cNvPr id="26" name="Shape 24"/>
+          <p:cNvPr id="29" name="Shape 27"/>
           <p:cNvSpPr/>
           <p:nvPr/>
         </p:nvSpPr>
@@ -19769,7 +19671,7 @@
       </p:sp>
       <p:sp>
         <p:nvSpPr>
-          <p:cNvPr id="27" name="Text 25"/>
+          <p:cNvPr id="30" name="Text 28"/>
           <p:cNvSpPr/>
           <p:nvPr/>
         </p:nvSpPr>
@@ -19808,7 +19710,7 @@
       </p:sp>
       <p:sp>
         <p:nvSpPr>
-          <p:cNvPr id="28" name="Shape 26"/>
+          <p:cNvPr id="31" name="Shape 29"/>
           <p:cNvSpPr/>
           <p:nvPr/>
         </p:nvSpPr>
@@ -19835,7 +19737,7 @@
       </p:sp>
       <p:sp>
         <p:nvSpPr>
-          <p:cNvPr id="29" name="Text 27"/>
+          <p:cNvPr id="32" name="Text 30"/>
           <p:cNvSpPr/>
           <p:nvPr/>
         </p:nvSpPr>
@@ -20158,7 +20060,7 @@
                 <a:ea typeface="Calibri" pitchFamily="34" charset="-122"/>
                 <a:cs typeface="Calibri" pitchFamily="34" charset="-120"/>
               </a:rPr>
-              <a:t>Word Labs  •  wordlabs.app  •  Root: 'light' = brightness, illumination, not heavy</a:t>
+              <a:t>Word Labs  •  wordlabs.app  •  Root: 'light' = brightness; not heavy</a:t>
             </a:r>
             <a:endParaRPr lang="en-US" sz="800" dirty="0"/>
           </a:p>
@@ -20297,7 +20199,7 @@
                 <a:ea typeface="Trebuchet MS" pitchFamily="34" charset="-122"/>
                 <a:cs typeface="Trebuchet MS" pitchFamily="34" charset="-120"/>
               </a:rPr>
-              <a:t>lightly</a:t>
+              <a:t>delightful</a:t>
             </a:r>
             <a:endParaRPr lang="en-US" sz="2800" dirty="0"/>
           </a:p>
@@ -20377,7 +20279,7 @@
         </p:nvSpPr>
         <p:spPr>
           <a:xfrm>
-            <a:off x="2938272" y="2258568"/>
+            <a:off x="2221992" y="2258568"/>
             <a:ext cx="1828800" cy="292608"/>
           </a:xfrm>
           <a:prstGeom prst="rect">
@@ -20386,11 +20288,11 @@
             </a:avLst>
           </a:prstGeom>
           <a:solidFill>
-            <a:srgbClr val="CCFBF1"/>
+            <a:srgbClr val="DDD6FE"/>
           </a:solidFill>
           <a:ln w="19050">
             <a:solidFill>
-              <a:srgbClr val="0D9488"/>
+              <a:srgbClr val="7C3AED"/>
             </a:solidFill>
             <a:prstDash val="solid"/>
           </a:ln>
@@ -20411,7 +20313,7 @@
         </p:nvSpPr>
         <p:spPr>
           <a:xfrm>
-            <a:off x="2938272" y="2258568"/>
+            <a:off x="2221992" y="2258568"/>
             <a:ext cx="1828800" cy="292608"/>
           </a:xfrm>
           <a:prstGeom prst="rect">
@@ -20430,13 +20332,13 @@
             <a:r>
               <a:rPr lang="en-US" sz="1300" b="1" dirty="0">
                 <a:solidFill>
-                  <a:srgbClr val="0F766E"/>
+                  <a:srgbClr val="4C1D95"/>
                 </a:solidFill>
                 <a:latin typeface="Trebuchet MS" pitchFamily="34" charset="0"/>
                 <a:ea typeface="Trebuchet MS" pitchFamily="34" charset="-122"/>
                 <a:cs typeface="Trebuchet MS" pitchFamily="34" charset="-120"/>
               </a:rPr>
-              <a:t>light</a:t>
+              <a:t>de</a:t>
             </a:r>
             <a:endParaRPr lang="en-US" sz="1300" dirty="0"/>
           </a:p>
@@ -20450,7 +20352,7 @@
         </p:nvSpPr>
         <p:spPr>
           <a:xfrm>
-            <a:off x="2938272" y="2569464"/>
+            <a:off x="2221992" y="2569464"/>
             <a:ext cx="1828800" cy="201168"/>
           </a:xfrm>
           <a:prstGeom prst="rect">
@@ -20475,7 +20377,7 @@
                 <a:ea typeface="Calibri" pitchFamily="34" charset="-122"/>
                 <a:cs typeface="Calibri" pitchFamily="34" charset="-120"/>
               </a:rPr>
-              <a:t>brightness; not heavy</a:t>
+              <a:t>undo; remove; down</a:t>
             </a:r>
             <a:endParaRPr lang="en-US" sz="850" dirty="0"/>
           </a:p>
@@ -20489,7 +20391,7 @@
         </p:nvSpPr>
         <p:spPr>
           <a:xfrm>
-            <a:off x="5803392" y="2258568"/>
+            <a:off x="4370832" y="2258568"/>
             <a:ext cx="1828800" cy="292608"/>
           </a:xfrm>
           <a:prstGeom prst="rect">
@@ -20498,11 +20400,11 @@
             </a:avLst>
           </a:prstGeom>
           <a:solidFill>
-            <a:srgbClr val="FCE7F3"/>
+            <a:srgbClr val="CCFBF1"/>
           </a:solidFill>
           <a:ln w="19050">
             <a:solidFill>
-              <a:srgbClr val="DB2777"/>
+              <a:srgbClr val="0D9488"/>
             </a:solidFill>
             <a:prstDash val="solid"/>
           </a:ln>
@@ -20523,7 +20425,7 @@
         </p:nvSpPr>
         <p:spPr>
           <a:xfrm>
-            <a:off x="5803392" y="2258568"/>
+            <a:off x="4370832" y="2258568"/>
             <a:ext cx="1828800" cy="292608"/>
           </a:xfrm>
           <a:prstGeom prst="rect">
@@ -20542,13 +20444,13 @@
             <a:r>
               <a:rPr lang="en-US" sz="1300" b="1" dirty="0">
                 <a:solidFill>
-                  <a:srgbClr val="9D174D"/>
+                  <a:srgbClr val="0F766E"/>
                 </a:solidFill>
                 <a:latin typeface="Trebuchet MS" pitchFamily="34" charset="0"/>
                 <a:ea typeface="Trebuchet MS" pitchFamily="34" charset="-122"/>
                 <a:cs typeface="Trebuchet MS" pitchFamily="34" charset="-120"/>
               </a:rPr>
-              <a:t>ly</a:t>
+              <a:t>light</a:t>
             </a:r>
             <a:endParaRPr lang="en-US" sz="1300" dirty="0"/>
           </a:p>
@@ -20562,7 +20464,7 @@
         </p:nvSpPr>
         <p:spPr>
           <a:xfrm>
-            <a:off x="5803392" y="2569464"/>
+            <a:off x="4370832" y="2569464"/>
             <a:ext cx="1828800" cy="201168"/>
           </a:xfrm>
           <a:prstGeom prst="rect">
@@ -20587,7 +20489,7 @@
                 <a:ea typeface="Calibri" pitchFamily="34" charset="-122"/>
                 <a:cs typeface="Calibri" pitchFamily="34" charset="-120"/>
               </a:rPr>
-              <a:t>in a way that is</a:t>
+              <a:t>brightness; not heavy</a:t>
             </a:r>
             <a:endParaRPr lang="en-US" sz="850" dirty="0"/>
           </a:p>
@@ -20596,6 +20498,118 @@
       <p:sp>
         <p:nvSpPr>
           <p:cNvPr id="22" name="Shape 20"/>
+          <p:cNvSpPr/>
+          <p:nvPr/>
+        </p:nvSpPr>
+        <p:spPr>
+          <a:xfrm>
+            <a:off x="6519672" y="2258568"/>
+            <a:ext cx="1828800" cy="292608"/>
+          </a:xfrm>
+          <a:prstGeom prst="rect">
+            <a:avLst>
+              <a:gd name="adj" fmla="val 25000"/>
+            </a:avLst>
+          </a:prstGeom>
+          <a:solidFill>
+            <a:srgbClr val="FCE7F3"/>
+          </a:solidFill>
+          <a:ln w="19050">
+            <a:solidFill>
+              <a:srgbClr val="DB2777"/>
+            </a:solidFill>
+            <a:prstDash val="solid"/>
+          </a:ln>
+          <a:effectLst>
+            <a:outerShdw sx="100000" sy="100000" kx="0" ky="0" algn="bl" rotWithShape="0" blurRad="101600" dist="38100" dir="8100000">
+              <a:srgbClr val="000000">
+                <a:alpha val="12000"/>
+              </a:srgbClr>
+            </a:outerShdw>
+          </a:effectLst>
+        </p:spPr>
+      </p:sp>
+      <p:sp>
+        <p:nvSpPr>
+          <p:cNvPr id="23" name="Text 21"/>
+          <p:cNvSpPr/>
+          <p:nvPr/>
+        </p:nvSpPr>
+        <p:spPr>
+          <a:xfrm>
+            <a:off x="6519672" y="2258568"/>
+            <a:ext cx="1828800" cy="292608"/>
+          </a:xfrm>
+          <a:prstGeom prst="rect">
+            <a:avLst/>
+          </a:prstGeom>
+          <a:noFill/>
+          <a:ln/>
+        </p:spPr>
+        <p:txBody>
+          <a:bodyPr wrap="square" lIns="0" tIns="0" rIns="0" bIns="0" rtlCol="0" anchor="ctr"/>
+          <a:lstStyle/>
+          <a:p>
+            <a:pPr algn="ctr" indent="0" marL="0">
+              <a:buNone/>
+            </a:pPr>
+            <a:r>
+              <a:rPr lang="en-US" sz="1300" b="1" dirty="0">
+                <a:solidFill>
+                  <a:srgbClr val="9D174D"/>
+                </a:solidFill>
+                <a:latin typeface="Trebuchet MS" pitchFamily="34" charset="0"/>
+                <a:ea typeface="Trebuchet MS" pitchFamily="34" charset="-122"/>
+                <a:cs typeface="Trebuchet MS" pitchFamily="34" charset="-120"/>
+              </a:rPr>
+              <a:t>ful</a:t>
+            </a:r>
+            <a:endParaRPr lang="en-US" sz="1300" dirty="0"/>
+          </a:p>
+        </p:txBody>
+      </p:sp>
+      <p:sp>
+        <p:nvSpPr>
+          <p:cNvPr id="24" name="Text 22"/>
+          <p:cNvSpPr/>
+          <p:nvPr/>
+        </p:nvSpPr>
+        <p:spPr>
+          <a:xfrm>
+            <a:off x="6519672" y="2569464"/>
+            <a:ext cx="1828800" cy="201168"/>
+          </a:xfrm>
+          <a:prstGeom prst="rect">
+            <a:avLst/>
+          </a:prstGeom>
+          <a:noFill/>
+          <a:ln/>
+        </p:spPr>
+        <p:txBody>
+          <a:bodyPr wrap="square" lIns="0" tIns="0" rIns="0" bIns="0" rtlCol="0" anchor="t"/>
+          <a:lstStyle/>
+          <a:p>
+            <a:pPr algn="ctr" indent="0" marL="0">
+              <a:buNone/>
+            </a:pPr>
+            <a:r>
+              <a:rPr lang="en-US" sz="850" dirty="0">
+                <a:solidFill>
+                  <a:srgbClr val="475569"/>
+                </a:solidFill>
+                <a:latin typeface="Calibri" pitchFamily="34" charset="0"/>
+                <a:ea typeface="Calibri" pitchFamily="34" charset="-122"/>
+                <a:cs typeface="Calibri" pitchFamily="34" charset="-120"/>
+              </a:rPr>
+              <a:t>full of</a:t>
+            </a:r>
+            <a:endParaRPr lang="en-US" sz="850" dirty="0"/>
+          </a:p>
+        </p:txBody>
+      </p:sp>
+      <p:sp>
+        <p:nvSpPr>
+          <p:cNvPr id="25" name="Shape 23"/>
           <p:cNvSpPr/>
           <p:nvPr/>
         </p:nvSpPr>
@@ -20622,7 +20636,7 @@
       </p:sp>
       <p:sp>
         <p:nvSpPr>
-          <p:cNvPr id="23" name="Text 21"/>
+          <p:cNvPr id="26" name="Text 24"/>
           <p:cNvSpPr/>
           <p:nvPr/>
         </p:nvSpPr>
@@ -20661,7 +20675,7 @@
       </p:sp>
       <p:sp>
         <p:nvSpPr>
-          <p:cNvPr id="24" name="Shape 22"/>
+          <p:cNvPr id="27" name="Shape 25"/>
           <p:cNvSpPr/>
           <p:nvPr/>
         </p:nvSpPr>
@@ -20688,13 +20702,13 @@
       </p:sp>
       <p:sp>
         <p:nvSpPr>
-          <p:cNvPr id="25" name="Shape 23"/>
-          <p:cNvSpPr/>
-          <p:nvPr/>
-        </p:nvSpPr>
-        <p:spPr>
-          <a:xfrm>
-            <a:off x="2999232" y="3364992"/>
+          <p:cNvPr id="28" name="Shape 26"/>
+          <p:cNvSpPr/>
+          <p:nvPr/>
+        </p:nvSpPr>
+        <p:spPr>
+          <a:xfrm>
+            <a:off x="2313432" y="3364992"/>
             <a:ext cx="1645920" cy="475488"/>
           </a:xfrm>
           <a:prstGeom prst="rect">
@@ -20715,13 +20729,13 @@
       </p:sp>
       <p:sp>
         <p:nvSpPr>
-          <p:cNvPr id="26" name="Text 24"/>
-          <p:cNvSpPr/>
-          <p:nvPr/>
-        </p:nvSpPr>
-        <p:spPr>
-          <a:xfrm>
-            <a:off x="2999232" y="3364992"/>
+          <p:cNvPr id="29" name="Text 27"/>
+          <p:cNvSpPr/>
+          <p:nvPr/>
+        </p:nvSpPr>
+        <p:spPr>
+          <a:xfrm>
+            <a:off x="2313432" y="3364992"/>
             <a:ext cx="1645920" cy="475488"/>
           </a:xfrm>
           <a:prstGeom prst="rect">
@@ -20746,7 +20760,7 @@
                 <a:ea typeface="Trebuchet MS" pitchFamily="34" charset="-122"/>
                 <a:cs typeface="Trebuchet MS" pitchFamily="34" charset="-120"/>
               </a:rPr>
-              <a:t>light</a:t>
+              <a:t>de</a:t>
             </a:r>
             <a:endParaRPr lang="en-US" sz="1400" dirty="0"/>
           </a:p>
@@ -20754,14 +20768,14 @@
       </p:sp>
       <p:sp>
         <p:nvSpPr>
-          <p:cNvPr id="27" name="Text 25"/>
-          <p:cNvSpPr/>
-          <p:nvPr/>
-        </p:nvSpPr>
-        <p:spPr>
-          <a:xfrm>
-            <a:off x="4645152" y="3364992"/>
-            <a:ext cx="1097280" cy="475488"/>
+          <p:cNvPr id="30" name="Text 28"/>
+          <p:cNvSpPr/>
+          <p:nvPr/>
+        </p:nvSpPr>
+        <p:spPr>
+          <a:xfrm>
+            <a:off x="3959352" y="3364992"/>
+            <a:ext cx="411480" cy="475488"/>
           </a:xfrm>
           <a:prstGeom prst="rect">
             <a:avLst/>
@@ -20793,13 +20807,13 @@
       </p:sp>
       <p:sp>
         <p:nvSpPr>
-          <p:cNvPr id="28" name="Shape 26"/>
-          <p:cNvSpPr/>
-          <p:nvPr/>
-        </p:nvSpPr>
-        <p:spPr>
-          <a:xfrm>
-            <a:off x="5742432" y="3364992"/>
+          <p:cNvPr id="31" name="Shape 29"/>
+          <p:cNvSpPr/>
+          <p:nvPr/>
+        </p:nvSpPr>
+        <p:spPr>
+          <a:xfrm>
+            <a:off x="4370832" y="3364992"/>
             <a:ext cx="1645920" cy="475488"/>
           </a:xfrm>
           <a:prstGeom prst="rect">
@@ -20820,13 +20834,13 @@
       </p:sp>
       <p:sp>
         <p:nvSpPr>
-          <p:cNvPr id="29" name="Text 27"/>
-          <p:cNvSpPr/>
-          <p:nvPr/>
-        </p:nvSpPr>
-        <p:spPr>
-          <a:xfrm>
-            <a:off x="5742432" y="3364992"/>
+          <p:cNvPr id="32" name="Text 30"/>
+          <p:cNvSpPr/>
+          <p:nvPr/>
+        </p:nvSpPr>
+        <p:spPr>
+          <a:xfrm>
+            <a:off x="4370832" y="3364992"/>
             <a:ext cx="1645920" cy="475488"/>
           </a:xfrm>
           <a:prstGeom prst="rect">
@@ -20851,7 +20865,7 @@
                 <a:ea typeface="Trebuchet MS" pitchFamily="34" charset="-122"/>
                 <a:cs typeface="Trebuchet MS" pitchFamily="34" charset="-120"/>
               </a:rPr>
-              <a:t>ly</a:t>
+              <a:t>light</a:t>
             </a:r>
             <a:endParaRPr lang="en-US" sz="1400" dirty="0"/>
           </a:p>
@@ -20859,7 +20873,112 @@
       </p:sp>
       <p:sp>
         <p:nvSpPr>
-          <p:cNvPr id="30" name="Shape 28"/>
+          <p:cNvPr id="33" name="Text 31"/>
+          <p:cNvSpPr/>
+          <p:nvPr/>
+        </p:nvSpPr>
+        <p:spPr>
+          <a:xfrm>
+            <a:off x="6016752" y="3364992"/>
+            <a:ext cx="411480" cy="475488"/>
+          </a:xfrm>
+          <a:prstGeom prst="rect">
+            <a:avLst/>
+          </a:prstGeom>
+          <a:noFill/>
+          <a:ln/>
+        </p:spPr>
+        <p:txBody>
+          <a:bodyPr wrap="square" lIns="0" tIns="0" rIns="0" bIns="0" rtlCol="0" anchor="ctr"/>
+          <a:lstStyle/>
+          <a:p>
+            <a:pPr algn="ctr" indent="0" marL="0">
+              <a:buNone/>
+            </a:pPr>
+            <a:r>
+              <a:rPr lang="en-US" sz="1600" b="1" dirty="0">
+                <a:solidFill>
+                  <a:srgbClr val="0D9488"/>
+                </a:solidFill>
+                <a:latin typeface="Trebuchet MS" pitchFamily="34" charset="0"/>
+                <a:ea typeface="Trebuchet MS" pitchFamily="34" charset="-122"/>
+                <a:cs typeface="Trebuchet MS" pitchFamily="34" charset="-120"/>
+              </a:rPr>
+              <a:t>·</a:t>
+            </a:r>
+            <a:endParaRPr lang="en-US" sz="1600" dirty="0"/>
+          </a:p>
+        </p:txBody>
+      </p:sp>
+      <p:sp>
+        <p:nvSpPr>
+          <p:cNvPr id="34" name="Shape 32"/>
+          <p:cNvSpPr/>
+          <p:nvPr/>
+        </p:nvSpPr>
+        <p:spPr>
+          <a:xfrm>
+            <a:off x="6428232" y="3364992"/>
+            <a:ext cx="1645920" cy="475488"/>
+          </a:xfrm>
+          <a:prstGeom prst="rect">
+            <a:avLst>
+              <a:gd name="adj" fmla="val 9615"/>
+            </a:avLst>
+          </a:prstGeom>
+          <a:solidFill>
+            <a:srgbClr val="FFFFFF"/>
+          </a:solidFill>
+          <a:ln w="12700">
+            <a:solidFill>
+              <a:srgbClr val="0D9488"/>
+            </a:solidFill>
+            <a:prstDash val="solid"/>
+          </a:ln>
+        </p:spPr>
+      </p:sp>
+      <p:sp>
+        <p:nvSpPr>
+          <p:cNvPr id="35" name="Text 33"/>
+          <p:cNvSpPr/>
+          <p:nvPr/>
+        </p:nvSpPr>
+        <p:spPr>
+          <a:xfrm>
+            <a:off x="6428232" y="3364992"/>
+            <a:ext cx="1645920" cy="475488"/>
+          </a:xfrm>
+          <a:prstGeom prst="rect">
+            <a:avLst/>
+          </a:prstGeom>
+          <a:noFill/>
+          <a:ln/>
+        </p:spPr>
+        <p:txBody>
+          <a:bodyPr wrap="square" lIns="0" tIns="0" rIns="0" bIns="0" rtlCol="0" anchor="ctr"/>
+          <a:lstStyle/>
+          <a:p>
+            <a:pPr algn="ctr" indent="0" marL="0">
+              <a:buNone/>
+            </a:pPr>
+            <a:r>
+              <a:rPr lang="en-US" sz="1400" b="1" dirty="0">
+                <a:solidFill>
+                  <a:srgbClr val="0D9488"/>
+                </a:solidFill>
+                <a:latin typeface="Trebuchet MS" pitchFamily="34" charset="0"/>
+                <a:ea typeface="Trebuchet MS" pitchFamily="34" charset="-122"/>
+                <a:cs typeface="Trebuchet MS" pitchFamily="34" charset="-120"/>
+              </a:rPr>
+              <a:t>ful</a:t>
+            </a:r>
+            <a:endParaRPr lang="en-US" sz="1400" dirty="0"/>
+          </a:p>
+        </p:txBody>
+      </p:sp>
+      <p:sp>
+        <p:nvSpPr>
+          <p:cNvPr id="36" name="Shape 34"/>
           <p:cNvSpPr/>
           <p:nvPr/>
         </p:nvSpPr>
@@ -20886,7 +21005,7 @@
       </p:sp>
       <p:sp>
         <p:nvSpPr>
-          <p:cNvPr id="31" name="Text 29"/>
+          <p:cNvPr id="37" name="Text 35"/>
           <p:cNvSpPr/>
           <p:nvPr/>
         </p:nvSpPr>
@@ -20925,7 +21044,7 @@
       </p:sp>
       <p:sp>
         <p:nvSpPr>
-          <p:cNvPr id="32" name="Shape 30"/>
+          <p:cNvPr id="38" name="Shape 36"/>
           <p:cNvSpPr/>
           <p:nvPr/>
         </p:nvSpPr>
@@ -20952,7 +21071,7 @@
       </p:sp>
       <p:sp>
         <p:nvSpPr>
-          <p:cNvPr id="33" name="Text 31"/>
+          <p:cNvPr id="39" name="Text 37"/>
           <p:cNvSpPr/>
           <p:nvPr/>
         </p:nvSpPr>
@@ -21275,7 +21394,7 @@
                 <a:ea typeface="Calibri" pitchFamily="34" charset="-122"/>
                 <a:cs typeface="Calibri" pitchFamily="34" charset="-120"/>
               </a:rPr>
-              <a:t>Word Labs  •  wordlabs.app  •  Root: 'light' = brightness, illumination, not heavy</a:t>
+              <a:t>Word Labs  •  wordlabs.app  •  Root: 'light' = brightness; not heavy</a:t>
             </a:r>
             <a:endParaRPr lang="en-US" sz="800" dirty="0"/>
           </a:p>
@@ -21414,7 +21533,7 @@
                 <a:ea typeface="Trebuchet MS" pitchFamily="34" charset="-122"/>
                 <a:cs typeface="Trebuchet MS" pitchFamily="34" charset="-120"/>
               </a:rPr>
-              <a:t>lightly</a:t>
+              <a:t>delightful</a:t>
             </a:r>
             <a:endParaRPr lang="en-US" sz="2800" dirty="0"/>
           </a:p>
@@ -21494,7 +21613,7 @@
         </p:nvSpPr>
         <p:spPr>
           <a:xfrm>
-            <a:off x="2938272" y="2258568"/>
+            <a:off x="2221992" y="2258568"/>
             <a:ext cx="1828800" cy="292608"/>
           </a:xfrm>
           <a:prstGeom prst="rect">
@@ -21503,11 +21622,11 @@
             </a:avLst>
           </a:prstGeom>
           <a:solidFill>
-            <a:srgbClr val="CCFBF1"/>
+            <a:srgbClr val="DDD6FE"/>
           </a:solidFill>
           <a:ln w="19050">
             <a:solidFill>
-              <a:srgbClr val="0D9488"/>
+              <a:srgbClr val="7C3AED"/>
             </a:solidFill>
             <a:prstDash val="solid"/>
           </a:ln>
@@ -21528,7 +21647,7 @@
         </p:nvSpPr>
         <p:spPr>
           <a:xfrm>
-            <a:off x="2938272" y="2258568"/>
+            <a:off x="2221992" y="2258568"/>
             <a:ext cx="1828800" cy="292608"/>
           </a:xfrm>
           <a:prstGeom prst="rect">
@@ -21547,13 +21666,13 @@
             <a:r>
               <a:rPr lang="en-US" sz="1300" b="1" dirty="0">
                 <a:solidFill>
-                  <a:srgbClr val="0F766E"/>
+                  <a:srgbClr val="4C1D95"/>
                 </a:solidFill>
                 <a:latin typeface="Trebuchet MS" pitchFamily="34" charset="0"/>
                 <a:ea typeface="Trebuchet MS" pitchFamily="34" charset="-122"/>
                 <a:cs typeface="Trebuchet MS" pitchFamily="34" charset="-120"/>
               </a:rPr>
-              <a:t>light</a:t>
+              <a:t>de</a:t>
             </a:r>
             <a:endParaRPr lang="en-US" sz="1300" dirty="0"/>
           </a:p>
@@ -21567,7 +21686,7 @@
         </p:nvSpPr>
         <p:spPr>
           <a:xfrm>
-            <a:off x="2938272" y="2569464"/>
+            <a:off x="2221992" y="2569464"/>
             <a:ext cx="1828800" cy="201168"/>
           </a:xfrm>
           <a:prstGeom prst="rect">
@@ -21592,7 +21711,7 @@
                 <a:ea typeface="Calibri" pitchFamily="34" charset="-122"/>
                 <a:cs typeface="Calibri" pitchFamily="34" charset="-120"/>
               </a:rPr>
-              <a:t>brightness; not heavy</a:t>
+              <a:t>undo; remove; down</a:t>
             </a:r>
             <a:endParaRPr lang="en-US" sz="850" dirty="0"/>
           </a:p>
@@ -21606,7 +21725,7 @@
         </p:nvSpPr>
         <p:spPr>
           <a:xfrm>
-            <a:off x="5803392" y="2258568"/>
+            <a:off x="4370832" y="2258568"/>
             <a:ext cx="1828800" cy="292608"/>
           </a:xfrm>
           <a:prstGeom prst="rect">
@@ -21615,11 +21734,11 @@
             </a:avLst>
           </a:prstGeom>
           <a:solidFill>
-            <a:srgbClr val="FCE7F3"/>
+            <a:srgbClr val="CCFBF1"/>
           </a:solidFill>
           <a:ln w="19050">
             <a:solidFill>
-              <a:srgbClr val="DB2777"/>
+              <a:srgbClr val="0D9488"/>
             </a:solidFill>
             <a:prstDash val="solid"/>
           </a:ln>
@@ -21640,7 +21759,7 @@
         </p:nvSpPr>
         <p:spPr>
           <a:xfrm>
-            <a:off x="5803392" y="2258568"/>
+            <a:off x="4370832" y="2258568"/>
             <a:ext cx="1828800" cy="292608"/>
           </a:xfrm>
           <a:prstGeom prst="rect">
@@ -21659,13 +21778,13 @@
             <a:r>
               <a:rPr lang="en-US" sz="1300" b="1" dirty="0">
                 <a:solidFill>
-                  <a:srgbClr val="9D174D"/>
+                  <a:srgbClr val="0F766E"/>
                 </a:solidFill>
                 <a:latin typeface="Trebuchet MS" pitchFamily="34" charset="0"/>
                 <a:ea typeface="Trebuchet MS" pitchFamily="34" charset="-122"/>
                 <a:cs typeface="Trebuchet MS" pitchFamily="34" charset="-120"/>
               </a:rPr>
-              <a:t>ly</a:t>
+              <a:t>light</a:t>
             </a:r>
             <a:endParaRPr lang="en-US" sz="1300" dirty="0"/>
           </a:p>
@@ -21679,7 +21798,7 @@
         </p:nvSpPr>
         <p:spPr>
           <a:xfrm>
-            <a:off x="5803392" y="2569464"/>
+            <a:off x="4370832" y="2569464"/>
             <a:ext cx="1828800" cy="201168"/>
           </a:xfrm>
           <a:prstGeom prst="rect">
@@ -21704,7 +21823,7 @@
                 <a:ea typeface="Calibri" pitchFamily="34" charset="-122"/>
                 <a:cs typeface="Calibri" pitchFamily="34" charset="-120"/>
               </a:rPr>
-              <a:t>in a way that is</a:t>
+              <a:t>brightness; not heavy</a:t>
             </a:r>
             <a:endParaRPr lang="en-US" sz="850" dirty="0"/>
           </a:p>
@@ -21713,6 +21832,118 @@
       <p:sp>
         <p:nvSpPr>
           <p:cNvPr id="22" name="Shape 20"/>
+          <p:cNvSpPr/>
+          <p:nvPr/>
+        </p:nvSpPr>
+        <p:spPr>
+          <a:xfrm>
+            <a:off x="6519672" y="2258568"/>
+            <a:ext cx="1828800" cy="292608"/>
+          </a:xfrm>
+          <a:prstGeom prst="rect">
+            <a:avLst>
+              <a:gd name="adj" fmla="val 25000"/>
+            </a:avLst>
+          </a:prstGeom>
+          <a:solidFill>
+            <a:srgbClr val="FCE7F3"/>
+          </a:solidFill>
+          <a:ln w="19050">
+            <a:solidFill>
+              <a:srgbClr val="DB2777"/>
+            </a:solidFill>
+            <a:prstDash val="solid"/>
+          </a:ln>
+          <a:effectLst>
+            <a:outerShdw sx="100000" sy="100000" kx="0" ky="0" algn="bl" rotWithShape="0" blurRad="101600" dist="38100" dir="8100000">
+              <a:srgbClr val="000000">
+                <a:alpha val="12000"/>
+              </a:srgbClr>
+            </a:outerShdw>
+          </a:effectLst>
+        </p:spPr>
+      </p:sp>
+      <p:sp>
+        <p:nvSpPr>
+          <p:cNvPr id="23" name="Text 21"/>
+          <p:cNvSpPr/>
+          <p:nvPr/>
+        </p:nvSpPr>
+        <p:spPr>
+          <a:xfrm>
+            <a:off x="6519672" y="2258568"/>
+            <a:ext cx="1828800" cy="292608"/>
+          </a:xfrm>
+          <a:prstGeom prst="rect">
+            <a:avLst/>
+          </a:prstGeom>
+          <a:noFill/>
+          <a:ln/>
+        </p:spPr>
+        <p:txBody>
+          <a:bodyPr wrap="square" lIns="0" tIns="0" rIns="0" bIns="0" rtlCol="0" anchor="ctr"/>
+          <a:lstStyle/>
+          <a:p>
+            <a:pPr algn="ctr" indent="0" marL="0">
+              <a:buNone/>
+            </a:pPr>
+            <a:r>
+              <a:rPr lang="en-US" sz="1300" b="1" dirty="0">
+                <a:solidFill>
+                  <a:srgbClr val="9D174D"/>
+                </a:solidFill>
+                <a:latin typeface="Trebuchet MS" pitchFamily="34" charset="0"/>
+                <a:ea typeface="Trebuchet MS" pitchFamily="34" charset="-122"/>
+                <a:cs typeface="Trebuchet MS" pitchFamily="34" charset="-120"/>
+              </a:rPr>
+              <a:t>ful</a:t>
+            </a:r>
+            <a:endParaRPr lang="en-US" sz="1300" dirty="0"/>
+          </a:p>
+        </p:txBody>
+      </p:sp>
+      <p:sp>
+        <p:nvSpPr>
+          <p:cNvPr id="24" name="Text 22"/>
+          <p:cNvSpPr/>
+          <p:nvPr/>
+        </p:nvSpPr>
+        <p:spPr>
+          <a:xfrm>
+            <a:off x="6519672" y="2569464"/>
+            <a:ext cx="1828800" cy="201168"/>
+          </a:xfrm>
+          <a:prstGeom prst="rect">
+            <a:avLst/>
+          </a:prstGeom>
+          <a:noFill/>
+          <a:ln/>
+        </p:spPr>
+        <p:txBody>
+          <a:bodyPr wrap="square" lIns="0" tIns="0" rIns="0" bIns="0" rtlCol="0" anchor="t"/>
+          <a:lstStyle/>
+          <a:p>
+            <a:pPr algn="ctr" indent="0" marL="0">
+              <a:buNone/>
+            </a:pPr>
+            <a:r>
+              <a:rPr lang="en-US" sz="850" dirty="0">
+                <a:solidFill>
+                  <a:srgbClr val="475569"/>
+                </a:solidFill>
+                <a:latin typeface="Calibri" pitchFamily="34" charset="0"/>
+                <a:ea typeface="Calibri" pitchFamily="34" charset="-122"/>
+                <a:cs typeface="Calibri" pitchFamily="34" charset="-120"/>
+              </a:rPr>
+              <a:t>full of</a:t>
+            </a:r>
+            <a:endParaRPr lang="en-US" sz="850" dirty="0"/>
+          </a:p>
+        </p:txBody>
+      </p:sp>
+      <p:sp>
+        <p:nvSpPr>
+          <p:cNvPr id="25" name="Shape 23"/>
           <p:cNvSpPr/>
           <p:nvPr/>
         </p:nvSpPr>
@@ -21739,7 +21970,7 @@
       </p:sp>
       <p:sp>
         <p:nvSpPr>
-          <p:cNvPr id="23" name="Text 21"/>
+          <p:cNvPr id="26" name="Text 24"/>
           <p:cNvSpPr/>
           <p:nvPr/>
         </p:nvSpPr>
@@ -21778,7 +22009,7 @@
       </p:sp>
       <p:sp>
         <p:nvSpPr>
-          <p:cNvPr id="24" name="Shape 22"/>
+          <p:cNvPr id="27" name="Shape 25"/>
           <p:cNvSpPr/>
           <p:nvPr/>
         </p:nvSpPr>
@@ -21805,13 +22036,13 @@
       </p:sp>
       <p:sp>
         <p:nvSpPr>
-          <p:cNvPr id="25" name="Shape 23"/>
-          <p:cNvSpPr/>
-          <p:nvPr/>
-        </p:nvSpPr>
-        <p:spPr>
-          <a:xfrm>
-            <a:off x="2999232" y="3364992"/>
+          <p:cNvPr id="28" name="Shape 26"/>
+          <p:cNvSpPr/>
+          <p:nvPr/>
+        </p:nvSpPr>
+        <p:spPr>
+          <a:xfrm>
+            <a:off x="2313432" y="3364992"/>
             <a:ext cx="1645920" cy="475488"/>
           </a:xfrm>
           <a:prstGeom prst="rect">
@@ -21832,13 +22063,13 @@
       </p:sp>
       <p:sp>
         <p:nvSpPr>
-          <p:cNvPr id="26" name="Text 24"/>
-          <p:cNvSpPr/>
-          <p:nvPr/>
-        </p:nvSpPr>
-        <p:spPr>
-          <a:xfrm>
-            <a:off x="2999232" y="3364992"/>
+          <p:cNvPr id="29" name="Text 27"/>
+          <p:cNvSpPr/>
+          <p:nvPr/>
+        </p:nvSpPr>
+        <p:spPr>
+          <a:xfrm>
+            <a:off x="2313432" y="3364992"/>
             <a:ext cx="1645920" cy="475488"/>
           </a:xfrm>
           <a:prstGeom prst="rect">
@@ -21863,7 +22094,7 @@
                 <a:ea typeface="Trebuchet MS" pitchFamily="34" charset="-122"/>
                 <a:cs typeface="Trebuchet MS" pitchFamily="34" charset="-120"/>
               </a:rPr>
-              <a:t>light</a:t>
+              <a:t>de</a:t>
             </a:r>
             <a:endParaRPr lang="en-US" sz="1400" dirty="0"/>
           </a:p>
@@ -21871,14 +22102,14 @@
       </p:sp>
       <p:sp>
         <p:nvSpPr>
-          <p:cNvPr id="27" name="Text 25"/>
-          <p:cNvSpPr/>
-          <p:nvPr/>
-        </p:nvSpPr>
-        <p:spPr>
-          <a:xfrm>
-            <a:off x="4645152" y="3364992"/>
-            <a:ext cx="1097280" cy="475488"/>
+          <p:cNvPr id="30" name="Text 28"/>
+          <p:cNvSpPr/>
+          <p:nvPr/>
+        </p:nvSpPr>
+        <p:spPr>
+          <a:xfrm>
+            <a:off x="3959352" y="3364992"/>
+            <a:ext cx="411480" cy="475488"/>
           </a:xfrm>
           <a:prstGeom prst="rect">
             <a:avLst/>
@@ -21910,13 +22141,13 @@
       </p:sp>
       <p:sp>
         <p:nvSpPr>
-          <p:cNvPr id="28" name="Shape 26"/>
-          <p:cNvSpPr/>
-          <p:nvPr/>
-        </p:nvSpPr>
-        <p:spPr>
-          <a:xfrm>
-            <a:off x="5742432" y="3364992"/>
+          <p:cNvPr id="31" name="Shape 29"/>
+          <p:cNvSpPr/>
+          <p:nvPr/>
+        </p:nvSpPr>
+        <p:spPr>
+          <a:xfrm>
+            <a:off x="4370832" y="3364992"/>
             <a:ext cx="1645920" cy="475488"/>
           </a:xfrm>
           <a:prstGeom prst="rect">
@@ -21937,13 +22168,13 @@
       </p:sp>
       <p:sp>
         <p:nvSpPr>
-          <p:cNvPr id="29" name="Text 27"/>
-          <p:cNvSpPr/>
-          <p:nvPr/>
-        </p:nvSpPr>
-        <p:spPr>
-          <a:xfrm>
-            <a:off x="5742432" y="3364992"/>
+          <p:cNvPr id="32" name="Text 30"/>
+          <p:cNvSpPr/>
+          <p:nvPr/>
+        </p:nvSpPr>
+        <p:spPr>
+          <a:xfrm>
+            <a:off x="4370832" y="3364992"/>
             <a:ext cx="1645920" cy="475488"/>
           </a:xfrm>
           <a:prstGeom prst="rect">
@@ -21968,7 +22199,7 @@
                 <a:ea typeface="Trebuchet MS" pitchFamily="34" charset="-122"/>
                 <a:cs typeface="Trebuchet MS" pitchFamily="34" charset="-120"/>
               </a:rPr>
-              <a:t>ly</a:t>
+              <a:t>light</a:t>
             </a:r>
             <a:endParaRPr lang="en-US" sz="1400" dirty="0"/>
           </a:p>
@@ -21976,7 +22207,112 @@
       </p:sp>
       <p:sp>
         <p:nvSpPr>
-          <p:cNvPr id="30" name="Shape 28"/>
+          <p:cNvPr id="33" name="Text 31"/>
+          <p:cNvSpPr/>
+          <p:nvPr/>
+        </p:nvSpPr>
+        <p:spPr>
+          <a:xfrm>
+            <a:off x="6016752" y="3364992"/>
+            <a:ext cx="411480" cy="475488"/>
+          </a:xfrm>
+          <a:prstGeom prst="rect">
+            <a:avLst/>
+          </a:prstGeom>
+          <a:noFill/>
+          <a:ln/>
+        </p:spPr>
+        <p:txBody>
+          <a:bodyPr wrap="square" lIns="0" tIns="0" rIns="0" bIns="0" rtlCol="0" anchor="ctr"/>
+          <a:lstStyle/>
+          <a:p>
+            <a:pPr algn="ctr" indent="0" marL="0">
+              <a:buNone/>
+            </a:pPr>
+            <a:r>
+              <a:rPr lang="en-US" sz="1600" b="1" dirty="0">
+                <a:solidFill>
+                  <a:srgbClr val="0D9488"/>
+                </a:solidFill>
+                <a:latin typeface="Trebuchet MS" pitchFamily="34" charset="0"/>
+                <a:ea typeface="Trebuchet MS" pitchFamily="34" charset="-122"/>
+                <a:cs typeface="Trebuchet MS" pitchFamily="34" charset="-120"/>
+              </a:rPr>
+              <a:t>·</a:t>
+            </a:r>
+            <a:endParaRPr lang="en-US" sz="1600" dirty="0"/>
+          </a:p>
+        </p:txBody>
+      </p:sp>
+      <p:sp>
+        <p:nvSpPr>
+          <p:cNvPr id="34" name="Shape 32"/>
+          <p:cNvSpPr/>
+          <p:nvPr/>
+        </p:nvSpPr>
+        <p:spPr>
+          <a:xfrm>
+            <a:off x="6428232" y="3364992"/>
+            <a:ext cx="1645920" cy="475488"/>
+          </a:xfrm>
+          <a:prstGeom prst="rect">
+            <a:avLst>
+              <a:gd name="adj" fmla="val 9615"/>
+            </a:avLst>
+          </a:prstGeom>
+          <a:solidFill>
+            <a:srgbClr val="FFFFFF"/>
+          </a:solidFill>
+          <a:ln w="12700">
+            <a:solidFill>
+              <a:srgbClr val="0D9488"/>
+            </a:solidFill>
+            <a:prstDash val="solid"/>
+          </a:ln>
+        </p:spPr>
+      </p:sp>
+      <p:sp>
+        <p:nvSpPr>
+          <p:cNvPr id="35" name="Text 33"/>
+          <p:cNvSpPr/>
+          <p:nvPr/>
+        </p:nvSpPr>
+        <p:spPr>
+          <a:xfrm>
+            <a:off x="6428232" y="3364992"/>
+            <a:ext cx="1645920" cy="475488"/>
+          </a:xfrm>
+          <a:prstGeom prst="rect">
+            <a:avLst/>
+          </a:prstGeom>
+          <a:noFill/>
+          <a:ln/>
+        </p:spPr>
+        <p:txBody>
+          <a:bodyPr wrap="square" lIns="0" tIns="0" rIns="0" bIns="0" rtlCol="0" anchor="ctr"/>
+          <a:lstStyle/>
+          <a:p>
+            <a:pPr algn="ctr" indent="0" marL="0">
+              <a:buNone/>
+            </a:pPr>
+            <a:r>
+              <a:rPr lang="en-US" sz="1400" b="1" dirty="0">
+                <a:solidFill>
+                  <a:srgbClr val="0D9488"/>
+                </a:solidFill>
+                <a:latin typeface="Trebuchet MS" pitchFamily="34" charset="0"/>
+                <a:ea typeface="Trebuchet MS" pitchFamily="34" charset="-122"/>
+                <a:cs typeface="Trebuchet MS" pitchFamily="34" charset="-120"/>
+              </a:rPr>
+              <a:t>ful</a:t>
+            </a:r>
+            <a:endParaRPr lang="en-US" sz="1400" dirty="0"/>
+          </a:p>
+        </p:txBody>
+      </p:sp>
+      <p:sp>
+        <p:nvSpPr>
+          <p:cNvPr id="36" name="Shape 34"/>
           <p:cNvSpPr/>
           <p:nvPr/>
         </p:nvSpPr>
@@ -22003,7 +22339,7 @@
       </p:sp>
       <p:sp>
         <p:nvSpPr>
-          <p:cNvPr id="31" name="Text 29"/>
+          <p:cNvPr id="37" name="Text 35"/>
           <p:cNvSpPr/>
           <p:nvPr/>
         </p:nvSpPr>
@@ -22042,18 +22378,18 @@
       </p:sp>
       <p:sp>
         <p:nvSpPr>
-          <p:cNvPr id="32" name="Shape 30"/>
+          <p:cNvPr id="38" name="Shape 36"/>
           <p:cNvSpPr/>
           <p:nvPr/>
         </p:nvSpPr>
         <p:spPr>
           <a:xfrm>
             <a:off x="1874520" y="4096512"/>
-            <a:ext cx="6903720" cy="804672"/>
+            <a:ext cx="6903720" cy="658368"/>
           </a:xfrm>
           <a:prstGeom prst="rect">
             <a:avLst>
-              <a:gd name="adj" fmla="val 6818"/>
+              <a:gd name="adj" fmla="val 8333"/>
             </a:avLst>
           </a:prstGeom>
           <a:solidFill>
@@ -22069,18 +22405,18 @@
       </p:sp>
       <p:sp>
         <p:nvSpPr>
-          <p:cNvPr id="33" name="Shape 31"/>
-          <p:cNvSpPr/>
-          <p:nvPr/>
-        </p:nvSpPr>
-        <p:spPr>
-          <a:xfrm>
-            <a:off x="2427732" y="4169664"/>
-            <a:ext cx="685800" cy="384048"/>
+          <p:cNvPr id="39" name="Shape 37"/>
+          <p:cNvSpPr/>
+          <p:nvPr/>
+        </p:nvSpPr>
+        <p:spPr>
+          <a:xfrm>
+            <a:off x="2023872" y="4169664"/>
+            <a:ext cx="685800" cy="475488"/>
           </a:xfrm>
           <a:prstGeom prst="rect">
             <a:avLst>
-              <a:gd name="adj" fmla="val 9524"/>
+              <a:gd name="adj" fmla="val 7692"/>
             </a:avLst>
           </a:prstGeom>
           <a:solidFill>
@@ -22096,14 +22432,14 @@
       </p:sp>
       <p:sp>
         <p:nvSpPr>
-          <p:cNvPr id="34" name="Text 32"/>
-          <p:cNvSpPr/>
-          <p:nvPr/>
-        </p:nvSpPr>
-        <p:spPr>
-          <a:xfrm>
-            <a:off x="2427732" y="4169664"/>
-            <a:ext cx="685800" cy="384048"/>
+          <p:cNvPr id="40" name="Text 38"/>
+          <p:cNvSpPr/>
+          <p:nvPr/>
+        </p:nvSpPr>
+        <p:spPr>
+          <a:xfrm>
+            <a:off x="2023872" y="4169664"/>
+            <a:ext cx="685800" cy="475488"/>
           </a:xfrm>
           <a:prstGeom prst="rect">
             <a:avLst/>
@@ -22127,7 +22463,7 @@
                 <a:ea typeface="Trebuchet MS" pitchFamily="34" charset="-122"/>
                 <a:cs typeface="Trebuchet MS" pitchFamily="34" charset="-120"/>
               </a:rPr>
-              <a:t>l</a:t>
+              <a:t>d</a:t>
             </a:r>
             <a:endParaRPr lang="en-US" sz="900" dirty="0"/>
           </a:p>
@@ -22135,18 +22471,18 @@
       </p:sp>
       <p:sp>
         <p:nvSpPr>
-          <p:cNvPr id="35" name="Shape 33"/>
-          <p:cNvSpPr/>
-          <p:nvPr/>
-        </p:nvSpPr>
-        <p:spPr>
-          <a:xfrm>
-            <a:off x="3639312" y="4169664"/>
-            <a:ext cx="685800" cy="384048"/>
+          <p:cNvPr id="41" name="Shape 39"/>
+          <p:cNvSpPr/>
+          <p:nvPr/>
+        </p:nvSpPr>
+        <p:spPr>
+          <a:xfrm>
+            <a:off x="2831592" y="4169664"/>
+            <a:ext cx="685800" cy="475488"/>
           </a:xfrm>
           <a:prstGeom prst="rect">
             <a:avLst>
-              <a:gd name="adj" fmla="val 9524"/>
+              <a:gd name="adj" fmla="val 7692"/>
             </a:avLst>
           </a:prstGeom>
           <a:solidFill>
@@ -22162,14 +22498,14 @@
       </p:sp>
       <p:sp>
         <p:nvSpPr>
-          <p:cNvPr id="36" name="Text 34"/>
-          <p:cNvSpPr/>
-          <p:nvPr/>
-        </p:nvSpPr>
-        <p:spPr>
-          <a:xfrm>
-            <a:off x="3639312" y="4169664"/>
-            <a:ext cx="685800" cy="384048"/>
+          <p:cNvPr id="42" name="Text 40"/>
+          <p:cNvSpPr/>
+          <p:nvPr/>
+        </p:nvSpPr>
+        <p:spPr>
+          <a:xfrm>
+            <a:off x="2831592" y="4169664"/>
+            <a:ext cx="685800" cy="475488"/>
           </a:xfrm>
           <a:prstGeom prst="rect">
             <a:avLst/>
@@ -22193,7 +22529,7 @@
                 <a:ea typeface="Trebuchet MS" pitchFamily="34" charset="-122"/>
                 <a:cs typeface="Trebuchet MS" pitchFamily="34" charset="-120"/>
               </a:rPr>
-              <a:t>igh</a:t>
+              <a:t>e</a:t>
             </a:r>
             <a:endParaRPr lang="en-US" sz="900" dirty="0"/>
           </a:p>
@@ -22201,57 +22537,18 @@
       </p:sp>
       <p:sp>
         <p:nvSpPr>
-          <p:cNvPr id="37" name="Text 35"/>
-          <p:cNvSpPr/>
-          <p:nvPr/>
-        </p:nvSpPr>
-        <p:spPr>
-          <a:xfrm>
-            <a:off x="3639312" y="4572000"/>
-            <a:ext cx="685800" cy="219456"/>
-          </a:xfrm>
-          <a:prstGeom prst="rect">
-            <a:avLst/>
-          </a:prstGeom>
-          <a:noFill/>
-          <a:ln/>
-        </p:spPr>
-        <p:txBody>
-          <a:bodyPr wrap="square" lIns="0" tIns="0" rIns="0" bIns="0" rtlCol="0" anchor="t"/>
-          <a:lstStyle/>
-          <a:p>
-            <a:pPr algn="ctr" indent="0" marL="0">
-              <a:buNone/>
-            </a:pPr>
-            <a:r>
-              <a:rPr lang="en-US" sz="750" i="1" dirty="0">
-                <a:solidFill>
-                  <a:srgbClr val="94A3B8"/>
-                </a:solidFill>
-                <a:latin typeface="Calibri" pitchFamily="34" charset="0"/>
-                <a:ea typeface="Calibri" pitchFamily="34" charset="-122"/>
-                <a:cs typeface="Calibri" pitchFamily="34" charset="-120"/>
-              </a:rPr>
-              <a:t>/igh/</a:t>
-            </a:r>
-            <a:endParaRPr lang="en-US" sz="750" dirty="0"/>
-          </a:p>
-        </p:txBody>
-      </p:sp>
-      <p:sp>
-        <p:nvSpPr>
-          <p:cNvPr id="38" name="Shape 36"/>
-          <p:cNvSpPr/>
-          <p:nvPr/>
-        </p:nvSpPr>
-        <p:spPr>
-          <a:xfrm>
-            <a:off x="4850892" y="4169664"/>
-            <a:ext cx="685800" cy="384048"/>
+          <p:cNvPr id="43" name="Shape 41"/>
+          <p:cNvSpPr/>
+          <p:nvPr/>
+        </p:nvSpPr>
+        <p:spPr>
+          <a:xfrm>
+            <a:off x="3639312" y="4169664"/>
+            <a:ext cx="685800" cy="475488"/>
           </a:xfrm>
           <a:prstGeom prst="rect">
             <a:avLst>
-              <a:gd name="adj" fmla="val 9524"/>
+              <a:gd name="adj" fmla="val 7692"/>
             </a:avLst>
           </a:prstGeom>
           <a:solidFill>
@@ -22267,14 +22564,14 @@
       </p:sp>
       <p:sp>
         <p:nvSpPr>
-          <p:cNvPr id="39" name="Text 37"/>
-          <p:cNvSpPr/>
-          <p:nvPr/>
-        </p:nvSpPr>
-        <p:spPr>
-          <a:xfrm>
-            <a:off x="4850892" y="4169664"/>
-            <a:ext cx="685800" cy="384048"/>
+          <p:cNvPr id="44" name="Text 42"/>
+          <p:cNvSpPr/>
+          <p:nvPr/>
+        </p:nvSpPr>
+        <p:spPr>
+          <a:xfrm>
+            <a:off x="3639312" y="4169664"/>
+            <a:ext cx="685800" cy="475488"/>
           </a:xfrm>
           <a:prstGeom prst="rect">
             <a:avLst/>
@@ -22298,7 +22595,7 @@
                 <a:ea typeface="Trebuchet MS" pitchFamily="34" charset="-122"/>
                 <a:cs typeface="Trebuchet MS" pitchFamily="34" charset="-120"/>
               </a:rPr>
-              <a:t>t</a:t>
+              <a:t>l</a:t>
             </a:r>
             <a:endParaRPr lang="en-US" sz="900" dirty="0"/>
           </a:p>
@@ -22306,18 +22603,18 @@
       </p:sp>
       <p:sp>
         <p:nvSpPr>
-          <p:cNvPr id="40" name="Shape 38"/>
-          <p:cNvSpPr/>
-          <p:nvPr/>
-        </p:nvSpPr>
-        <p:spPr>
-          <a:xfrm>
-            <a:off x="6062472" y="4169664"/>
-            <a:ext cx="685800" cy="384048"/>
+          <p:cNvPr id="45" name="Shape 43"/>
+          <p:cNvSpPr/>
+          <p:nvPr/>
+        </p:nvSpPr>
+        <p:spPr>
+          <a:xfrm>
+            <a:off x="4447032" y="4169664"/>
+            <a:ext cx="685800" cy="475488"/>
           </a:xfrm>
           <a:prstGeom prst="rect">
             <a:avLst>
-              <a:gd name="adj" fmla="val 9524"/>
+              <a:gd name="adj" fmla="val 7692"/>
             </a:avLst>
           </a:prstGeom>
           <a:solidFill>
@@ -22333,14 +22630,14 @@
       </p:sp>
       <p:sp>
         <p:nvSpPr>
-          <p:cNvPr id="41" name="Text 39"/>
-          <p:cNvSpPr/>
-          <p:nvPr/>
-        </p:nvSpPr>
-        <p:spPr>
-          <a:xfrm>
-            <a:off x="6062472" y="4169664"/>
-            <a:ext cx="685800" cy="384048"/>
+          <p:cNvPr id="46" name="Text 44"/>
+          <p:cNvSpPr/>
+          <p:nvPr/>
+        </p:nvSpPr>
+        <p:spPr>
+          <a:xfrm>
+            <a:off x="4447032" y="4169664"/>
+            <a:ext cx="685800" cy="475488"/>
           </a:xfrm>
           <a:prstGeom prst="rect">
             <a:avLst/>
@@ -22364,7 +22661,7 @@
                 <a:ea typeface="Trebuchet MS" pitchFamily="34" charset="-122"/>
                 <a:cs typeface="Trebuchet MS" pitchFamily="34" charset="-120"/>
               </a:rPr>
-              <a:t>l</a:t>
+              <a:t>igh</a:t>
             </a:r>
             <a:endParaRPr lang="en-US" sz="900" dirty="0"/>
           </a:p>
@@ -22372,18 +22669,18 @@
       </p:sp>
       <p:sp>
         <p:nvSpPr>
-          <p:cNvPr id="42" name="Shape 40"/>
-          <p:cNvSpPr/>
-          <p:nvPr/>
-        </p:nvSpPr>
-        <p:spPr>
-          <a:xfrm>
-            <a:off x="7274052" y="4169664"/>
-            <a:ext cx="685800" cy="384048"/>
+          <p:cNvPr id="47" name="Shape 45"/>
+          <p:cNvSpPr/>
+          <p:nvPr/>
+        </p:nvSpPr>
+        <p:spPr>
+          <a:xfrm>
+            <a:off x="5254752" y="4169664"/>
+            <a:ext cx="685800" cy="475488"/>
           </a:xfrm>
           <a:prstGeom prst="rect">
             <a:avLst>
-              <a:gd name="adj" fmla="val 9524"/>
+              <a:gd name="adj" fmla="val 7692"/>
             </a:avLst>
           </a:prstGeom>
           <a:solidFill>
@@ -22399,14 +22696,14 @@
       </p:sp>
       <p:sp>
         <p:nvSpPr>
-          <p:cNvPr id="43" name="Text 41"/>
-          <p:cNvSpPr/>
-          <p:nvPr/>
-        </p:nvSpPr>
-        <p:spPr>
-          <a:xfrm>
-            <a:off x="7274052" y="4169664"/>
-            <a:ext cx="685800" cy="384048"/>
+          <p:cNvPr id="48" name="Text 46"/>
+          <p:cNvSpPr/>
+          <p:nvPr/>
+        </p:nvSpPr>
+        <p:spPr>
+          <a:xfrm>
+            <a:off x="5254752" y="4169664"/>
+            <a:ext cx="685800" cy="475488"/>
           </a:xfrm>
           <a:prstGeom prst="rect">
             <a:avLst/>
@@ -22430,7 +22727,205 @@
                 <a:ea typeface="Trebuchet MS" pitchFamily="34" charset="-122"/>
                 <a:cs typeface="Trebuchet MS" pitchFamily="34" charset="-120"/>
               </a:rPr>
-              <a:t>y</a:t>
+              <a:t>t</a:t>
+            </a:r>
+            <a:endParaRPr lang="en-US" sz="900" dirty="0"/>
+          </a:p>
+        </p:txBody>
+      </p:sp>
+      <p:sp>
+        <p:nvSpPr>
+          <p:cNvPr id="49" name="Shape 47"/>
+          <p:cNvSpPr/>
+          <p:nvPr/>
+        </p:nvSpPr>
+        <p:spPr>
+          <a:xfrm>
+            <a:off x="6062472" y="4169664"/>
+            <a:ext cx="685800" cy="475488"/>
+          </a:xfrm>
+          <a:prstGeom prst="rect">
+            <a:avLst>
+              <a:gd name="adj" fmla="val 7692"/>
+            </a:avLst>
+          </a:prstGeom>
+          <a:solidFill>
+            <a:srgbClr val="FFFFFF"/>
+          </a:solidFill>
+          <a:ln w="12700">
+            <a:solidFill>
+              <a:srgbClr val="DB2777"/>
+            </a:solidFill>
+            <a:prstDash val="solid"/>
+          </a:ln>
+        </p:spPr>
+      </p:sp>
+      <p:sp>
+        <p:nvSpPr>
+          <p:cNvPr id="50" name="Text 48"/>
+          <p:cNvSpPr/>
+          <p:nvPr/>
+        </p:nvSpPr>
+        <p:spPr>
+          <a:xfrm>
+            <a:off x="6062472" y="4169664"/>
+            <a:ext cx="685800" cy="475488"/>
+          </a:xfrm>
+          <a:prstGeom prst="rect">
+            <a:avLst/>
+          </a:prstGeom>
+          <a:noFill/>
+          <a:ln/>
+        </p:spPr>
+        <p:txBody>
+          <a:bodyPr wrap="square" lIns="0" tIns="0" rIns="0" bIns="0" rtlCol="0" anchor="ctr"/>
+          <a:lstStyle/>
+          <a:p>
+            <a:pPr algn="ctr" indent="0" marL="0">
+              <a:buNone/>
+            </a:pPr>
+            <a:r>
+              <a:rPr lang="en-US" sz="900" b="1" dirty="0">
+                <a:solidFill>
+                  <a:srgbClr val="9D174D"/>
+                </a:solidFill>
+                <a:latin typeface="Trebuchet MS" pitchFamily="34" charset="0"/>
+                <a:ea typeface="Trebuchet MS" pitchFamily="34" charset="-122"/>
+                <a:cs typeface="Trebuchet MS" pitchFamily="34" charset="-120"/>
+              </a:rPr>
+              <a:t>f</a:t>
+            </a:r>
+            <a:endParaRPr lang="en-US" sz="900" dirty="0"/>
+          </a:p>
+        </p:txBody>
+      </p:sp>
+      <p:sp>
+        <p:nvSpPr>
+          <p:cNvPr id="51" name="Shape 49"/>
+          <p:cNvSpPr/>
+          <p:nvPr/>
+        </p:nvSpPr>
+        <p:spPr>
+          <a:xfrm>
+            <a:off x="6870192" y="4169664"/>
+            <a:ext cx="685800" cy="475488"/>
+          </a:xfrm>
+          <a:prstGeom prst="rect">
+            <a:avLst>
+              <a:gd name="adj" fmla="val 7692"/>
+            </a:avLst>
+          </a:prstGeom>
+          <a:solidFill>
+            <a:srgbClr val="FFFFFF"/>
+          </a:solidFill>
+          <a:ln w="12700">
+            <a:solidFill>
+              <a:srgbClr val="DB2777"/>
+            </a:solidFill>
+            <a:prstDash val="solid"/>
+          </a:ln>
+        </p:spPr>
+      </p:sp>
+      <p:sp>
+        <p:nvSpPr>
+          <p:cNvPr id="52" name="Text 50"/>
+          <p:cNvSpPr/>
+          <p:nvPr/>
+        </p:nvSpPr>
+        <p:spPr>
+          <a:xfrm>
+            <a:off x="6870192" y="4169664"/>
+            <a:ext cx="685800" cy="475488"/>
+          </a:xfrm>
+          <a:prstGeom prst="rect">
+            <a:avLst/>
+          </a:prstGeom>
+          <a:noFill/>
+          <a:ln/>
+        </p:spPr>
+        <p:txBody>
+          <a:bodyPr wrap="square" lIns="0" tIns="0" rIns="0" bIns="0" rtlCol="0" anchor="ctr"/>
+          <a:lstStyle/>
+          <a:p>
+            <a:pPr algn="ctr" indent="0" marL="0">
+              <a:buNone/>
+            </a:pPr>
+            <a:r>
+              <a:rPr lang="en-US" sz="900" b="1" dirty="0">
+                <a:solidFill>
+                  <a:srgbClr val="9D174D"/>
+                </a:solidFill>
+                <a:latin typeface="Trebuchet MS" pitchFamily="34" charset="0"/>
+                <a:ea typeface="Trebuchet MS" pitchFamily="34" charset="-122"/>
+                <a:cs typeface="Trebuchet MS" pitchFamily="34" charset="-120"/>
+              </a:rPr>
+              <a:t>u</a:t>
+            </a:r>
+            <a:endParaRPr lang="en-US" sz="900" dirty="0"/>
+          </a:p>
+        </p:txBody>
+      </p:sp>
+      <p:sp>
+        <p:nvSpPr>
+          <p:cNvPr id="53" name="Shape 51"/>
+          <p:cNvSpPr/>
+          <p:nvPr/>
+        </p:nvSpPr>
+        <p:spPr>
+          <a:xfrm>
+            <a:off x="7677912" y="4169664"/>
+            <a:ext cx="685800" cy="475488"/>
+          </a:xfrm>
+          <a:prstGeom prst="rect">
+            <a:avLst>
+              <a:gd name="adj" fmla="val 7692"/>
+            </a:avLst>
+          </a:prstGeom>
+          <a:solidFill>
+            <a:srgbClr val="FFFFFF"/>
+          </a:solidFill>
+          <a:ln w="12700">
+            <a:solidFill>
+              <a:srgbClr val="DB2777"/>
+            </a:solidFill>
+            <a:prstDash val="solid"/>
+          </a:ln>
+        </p:spPr>
+      </p:sp>
+      <p:sp>
+        <p:nvSpPr>
+          <p:cNvPr id="54" name="Text 52"/>
+          <p:cNvSpPr/>
+          <p:nvPr/>
+        </p:nvSpPr>
+        <p:spPr>
+          <a:xfrm>
+            <a:off x="7677912" y="4169664"/>
+            <a:ext cx="685800" cy="475488"/>
+          </a:xfrm>
+          <a:prstGeom prst="rect">
+            <a:avLst/>
+          </a:prstGeom>
+          <a:noFill/>
+          <a:ln/>
+        </p:spPr>
+        <p:txBody>
+          <a:bodyPr wrap="square" lIns="0" tIns="0" rIns="0" bIns="0" rtlCol="0" anchor="ctr"/>
+          <a:lstStyle/>
+          <a:p>
+            <a:pPr algn="ctr" indent="0" marL="0">
+              <a:buNone/>
+            </a:pPr>
+            <a:r>
+              <a:rPr lang="en-US" sz="900" b="1" dirty="0">
+                <a:solidFill>
+                  <a:srgbClr val="9D174D"/>
+                </a:solidFill>
+                <a:latin typeface="Trebuchet MS" pitchFamily="34" charset="0"/>
+                <a:ea typeface="Trebuchet MS" pitchFamily="34" charset="-122"/>
+                <a:cs typeface="Trebuchet MS" pitchFamily="34" charset="-120"/>
+              </a:rPr>
+              <a:t>l</a:t>
             </a:r>
             <a:endParaRPr lang="en-US" sz="900" dirty="0"/>
           </a:p>
@@ -22722,7 +23217,7 @@
                 <a:ea typeface="Calibri" pitchFamily="34" charset="-122"/>
                 <a:cs typeface="Calibri" pitchFamily="34" charset="-120"/>
               </a:rPr>
-              <a:t>Word Labs  •  wordlabs.app  •  Root: 'light' = brightness, illumination, not heavy</a:t>
+              <a:t>Word Labs  •  wordlabs.app  •  Root: 'light' = brightness; not heavy</a:t>
             </a:r>
             <a:endParaRPr lang="en-US" sz="800" dirty="0"/>
           </a:p>
@@ -22861,7 +23356,7 @@
                 <a:ea typeface="Trebuchet MS" pitchFamily="34" charset="-122"/>
                 <a:cs typeface="Trebuchet MS" pitchFamily="34" charset="-120"/>
               </a:rPr>
-              <a:t>delight</a:t>
+              <a:t>enlightenment</a:t>
             </a:r>
             <a:endParaRPr lang="en-US" sz="2800" dirty="0"/>
           </a:p>
@@ -23549,7 +24044,7 @@
                 <a:ea typeface="Calibri" pitchFamily="34" charset="-122"/>
                 <a:cs typeface="Calibri" pitchFamily="34" charset="-120"/>
               </a:rPr>
-              <a:t>Word Labs  •  wordlabs.app  •  Root: 'light' = brightness, illumination, not heavy</a:t>
+              <a:t>Word Labs  •  wordlabs.app  •  Root: 'light' = brightness; not heavy</a:t>
             </a:r>
             <a:endParaRPr lang="en-US" sz="800" dirty="0"/>
           </a:p>
@@ -23688,7 +24183,7 @@
                 <a:ea typeface="Trebuchet MS" pitchFamily="34" charset="-122"/>
                 <a:cs typeface="Trebuchet MS" pitchFamily="34" charset="-120"/>
               </a:rPr>
-              <a:t>delight</a:t>
+              <a:t>enlightenment</a:t>
             </a:r>
             <a:endParaRPr lang="en-US" sz="2800" dirty="0"/>
           </a:p>
@@ -23768,8 +24263,8 @@
         </p:nvSpPr>
         <p:spPr>
           <a:xfrm>
-            <a:off x="2938272" y="2258568"/>
-            <a:ext cx="1828800" cy="292608"/>
+            <a:off x="1989734" y="2258568"/>
+            <a:ext cx="1581912" cy="292608"/>
           </a:xfrm>
           <a:prstGeom prst="rect">
             <a:avLst>
@@ -23802,8 +24297,8 @@
         </p:nvSpPr>
         <p:spPr>
           <a:xfrm>
-            <a:off x="2938272" y="2258568"/>
-            <a:ext cx="1828800" cy="292608"/>
+            <a:off x="1989734" y="2258568"/>
+            <a:ext cx="1581912" cy="292608"/>
           </a:xfrm>
           <a:prstGeom prst="rect">
             <a:avLst/>
@@ -23827,7 +24322,7 @@
                 <a:ea typeface="Trebuchet MS" pitchFamily="34" charset="-122"/>
                 <a:cs typeface="Trebuchet MS" pitchFamily="34" charset="-120"/>
               </a:rPr>
-              <a:t>de</a:t>
+              <a:t>en</a:t>
             </a:r>
             <a:endParaRPr lang="en-US" sz="1300" dirty="0"/>
           </a:p>
@@ -23841,8 +24336,8 @@
         </p:nvSpPr>
         <p:spPr>
           <a:xfrm>
-            <a:off x="2938272" y="2569464"/>
-            <a:ext cx="1828800" cy="201168"/>
+            <a:off x="1989734" y="2569464"/>
+            <a:ext cx="1581912" cy="201168"/>
           </a:xfrm>
           <a:prstGeom prst="rect">
             <a:avLst/>
@@ -23866,7 +24361,7 @@
                 <a:ea typeface="Calibri" pitchFamily="34" charset="-122"/>
                 <a:cs typeface="Calibri" pitchFamily="34" charset="-120"/>
               </a:rPr>
-              <a:t>from, away, or intensifying</a:t>
+              <a:t>made of; to make</a:t>
             </a:r>
             <a:endParaRPr lang="en-US" sz="850" dirty="0"/>
           </a:p>
@@ -23880,8 +24375,8 @@
         </p:nvSpPr>
         <p:spPr>
           <a:xfrm>
-            <a:off x="5803392" y="2258568"/>
-            <a:ext cx="1828800" cy="292608"/>
+            <a:off x="3659429" y="2258568"/>
+            <a:ext cx="1581912" cy="292608"/>
           </a:xfrm>
           <a:prstGeom prst="rect">
             <a:avLst>
@@ -23914,8 +24409,8 @@
         </p:nvSpPr>
         <p:spPr>
           <a:xfrm>
-            <a:off x="5803392" y="2258568"/>
-            <a:ext cx="1828800" cy="292608"/>
+            <a:off x="3659429" y="2258568"/>
+            <a:ext cx="1581912" cy="292608"/>
           </a:xfrm>
           <a:prstGeom prst="rect">
             <a:avLst/>
@@ -23953,8 +24448,8 @@
         </p:nvSpPr>
         <p:spPr>
           <a:xfrm>
-            <a:off x="5803392" y="2569464"/>
-            <a:ext cx="1828800" cy="201168"/>
+            <a:off x="3659429" y="2569464"/>
+            <a:ext cx="1581912" cy="201168"/>
           </a:xfrm>
           <a:prstGeom prst="rect">
             <a:avLst/>
@@ -23978,7 +24473,7 @@
                 <a:ea typeface="Calibri" pitchFamily="34" charset="-122"/>
                 <a:cs typeface="Calibri" pitchFamily="34" charset="-120"/>
               </a:rPr>
-              <a:t>brightness, joy</a:t>
+              <a:t>brightness; not heavy</a:t>
             </a:r>
             <a:endParaRPr lang="en-US" sz="850" dirty="0"/>
           </a:p>
@@ -23987,6 +24482,230 @@
       <p:sp>
         <p:nvSpPr>
           <p:cNvPr id="22" name="Shape 20"/>
+          <p:cNvSpPr/>
+          <p:nvPr/>
+        </p:nvSpPr>
+        <p:spPr>
+          <a:xfrm>
+            <a:off x="5329123" y="2258568"/>
+            <a:ext cx="1581912" cy="292608"/>
+          </a:xfrm>
+          <a:prstGeom prst="rect">
+            <a:avLst>
+              <a:gd name="adj" fmla="val 25000"/>
+            </a:avLst>
+          </a:prstGeom>
+          <a:solidFill>
+            <a:srgbClr val="FCE7F3"/>
+          </a:solidFill>
+          <a:ln w="19050">
+            <a:solidFill>
+              <a:srgbClr val="DB2777"/>
+            </a:solidFill>
+            <a:prstDash val="solid"/>
+          </a:ln>
+          <a:effectLst>
+            <a:outerShdw sx="100000" sy="100000" kx="0" ky="0" algn="bl" rotWithShape="0" blurRad="101600" dist="38100" dir="8100000">
+              <a:srgbClr val="000000">
+                <a:alpha val="12000"/>
+              </a:srgbClr>
+            </a:outerShdw>
+          </a:effectLst>
+        </p:spPr>
+      </p:sp>
+      <p:sp>
+        <p:nvSpPr>
+          <p:cNvPr id="23" name="Text 21"/>
+          <p:cNvSpPr/>
+          <p:nvPr/>
+        </p:nvSpPr>
+        <p:spPr>
+          <a:xfrm>
+            <a:off x="5329123" y="2258568"/>
+            <a:ext cx="1581912" cy="292608"/>
+          </a:xfrm>
+          <a:prstGeom prst="rect">
+            <a:avLst/>
+          </a:prstGeom>
+          <a:noFill/>
+          <a:ln/>
+        </p:spPr>
+        <p:txBody>
+          <a:bodyPr wrap="square" lIns="0" tIns="0" rIns="0" bIns="0" rtlCol="0" anchor="ctr"/>
+          <a:lstStyle/>
+          <a:p>
+            <a:pPr algn="ctr" indent="0" marL="0">
+              <a:buNone/>
+            </a:pPr>
+            <a:r>
+              <a:rPr lang="en-US" sz="1300" b="1" dirty="0">
+                <a:solidFill>
+                  <a:srgbClr val="9D174D"/>
+                </a:solidFill>
+                <a:latin typeface="Trebuchet MS" pitchFamily="34" charset="0"/>
+                <a:ea typeface="Trebuchet MS" pitchFamily="34" charset="-122"/>
+                <a:cs typeface="Trebuchet MS" pitchFamily="34" charset="-120"/>
+              </a:rPr>
+              <a:t>en</a:t>
+            </a:r>
+            <a:endParaRPr lang="en-US" sz="1300" dirty="0"/>
+          </a:p>
+        </p:txBody>
+      </p:sp>
+      <p:sp>
+        <p:nvSpPr>
+          <p:cNvPr id="24" name="Text 22"/>
+          <p:cNvSpPr/>
+          <p:nvPr/>
+        </p:nvSpPr>
+        <p:spPr>
+          <a:xfrm>
+            <a:off x="5329123" y="2569464"/>
+            <a:ext cx="1581912" cy="201168"/>
+          </a:xfrm>
+          <a:prstGeom prst="rect">
+            <a:avLst/>
+          </a:prstGeom>
+          <a:noFill/>
+          <a:ln/>
+        </p:spPr>
+        <p:txBody>
+          <a:bodyPr wrap="square" lIns="0" tIns="0" rIns="0" bIns="0" rtlCol="0" anchor="t"/>
+          <a:lstStyle/>
+          <a:p>
+            <a:pPr algn="ctr" indent="0" marL="0">
+              <a:buNone/>
+            </a:pPr>
+            <a:r>
+              <a:rPr lang="en-US" sz="850" dirty="0">
+                <a:solidFill>
+                  <a:srgbClr val="475569"/>
+                </a:solidFill>
+                <a:latin typeface="Calibri" pitchFamily="34" charset="0"/>
+                <a:ea typeface="Calibri" pitchFamily="34" charset="-122"/>
+                <a:cs typeface="Calibri" pitchFamily="34" charset="-120"/>
+              </a:rPr>
+              <a:t>made of; to make</a:t>
+            </a:r>
+            <a:endParaRPr lang="en-US" sz="850" dirty="0"/>
+          </a:p>
+        </p:txBody>
+      </p:sp>
+      <p:sp>
+        <p:nvSpPr>
+          <p:cNvPr id="25" name="Shape 23"/>
+          <p:cNvSpPr/>
+          <p:nvPr/>
+        </p:nvSpPr>
+        <p:spPr>
+          <a:xfrm>
+            <a:off x="6998818" y="2258568"/>
+            <a:ext cx="1581912" cy="292608"/>
+          </a:xfrm>
+          <a:prstGeom prst="rect">
+            <a:avLst>
+              <a:gd name="adj" fmla="val 25000"/>
+            </a:avLst>
+          </a:prstGeom>
+          <a:solidFill>
+            <a:srgbClr val="FCE7F3"/>
+          </a:solidFill>
+          <a:ln w="19050">
+            <a:solidFill>
+              <a:srgbClr val="DB2777"/>
+            </a:solidFill>
+            <a:prstDash val="solid"/>
+          </a:ln>
+          <a:effectLst>
+            <a:outerShdw sx="100000" sy="100000" kx="0" ky="0" algn="bl" rotWithShape="0" blurRad="101600" dist="38100" dir="8100000">
+              <a:srgbClr val="000000">
+                <a:alpha val="12000"/>
+              </a:srgbClr>
+            </a:outerShdw>
+          </a:effectLst>
+        </p:spPr>
+      </p:sp>
+      <p:sp>
+        <p:nvSpPr>
+          <p:cNvPr id="26" name="Text 24"/>
+          <p:cNvSpPr/>
+          <p:nvPr/>
+        </p:nvSpPr>
+        <p:spPr>
+          <a:xfrm>
+            <a:off x="6998818" y="2258568"/>
+            <a:ext cx="1581912" cy="292608"/>
+          </a:xfrm>
+          <a:prstGeom prst="rect">
+            <a:avLst/>
+          </a:prstGeom>
+          <a:noFill/>
+          <a:ln/>
+        </p:spPr>
+        <p:txBody>
+          <a:bodyPr wrap="square" lIns="0" tIns="0" rIns="0" bIns="0" rtlCol="0" anchor="ctr"/>
+          <a:lstStyle/>
+          <a:p>
+            <a:pPr algn="ctr" indent="0" marL="0">
+              <a:buNone/>
+            </a:pPr>
+            <a:r>
+              <a:rPr lang="en-US" sz="1300" b="1" dirty="0">
+                <a:solidFill>
+                  <a:srgbClr val="9D174D"/>
+                </a:solidFill>
+                <a:latin typeface="Trebuchet MS" pitchFamily="34" charset="0"/>
+                <a:ea typeface="Trebuchet MS" pitchFamily="34" charset="-122"/>
+                <a:cs typeface="Trebuchet MS" pitchFamily="34" charset="-120"/>
+              </a:rPr>
+              <a:t>ment</a:t>
+            </a:r>
+            <a:endParaRPr lang="en-US" sz="1300" dirty="0"/>
+          </a:p>
+        </p:txBody>
+      </p:sp>
+      <p:sp>
+        <p:nvSpPr>
+          <p:cNvPr id="27" name="Text 25"/>
+          <p:cNvSpPr/>
+          <p:nvPr/>
+        </p:nvSpPr>
+        <p:spPr>
+          <a:xfrm>
+            <a:off x="6998818" y="2569464"/>
+            <a:ext cx="1581912" cy="201168"/>
+          </a:xfrm>
+          <a:prstGeom prst="rect">
+            <a:avLst/>
+          </a:prstGeom>
+          <a:noFill/>
+          <a:ln/>
+        </p:spPr>
+        <p:txBody>
+          <a:bodyPr wrap="square" lIns="0" tIns="0" rIns="0" bIns="0" rtlCol="0" anchor="t"/>
+          <a:lstStyle/>
+          <a:p>
+            <a:pPr algn="ctr" indent="0" marL="0">
+              <a:buNone/>
+            </a:pPr>
+            <a:r>
+              <a:rPr lang="en-US" sz="850" dirty="0">
+                <a:solidFill>
+                  <a:srgbClr val="475569"/>
+                </a:solidFill>
+                <a:latin typeface="Calibri" pitchFamily="34" charset="0"/>
+                <a:ea typeface="Calibri" pitchFamily="34" charset="-122"/>
+                <a:cs typeface="Calibri" pitchFamily="34" charset="-120"/>
+              </a:rPr>
+              <a:t>result of action</a:t>
+            </a:r>
+            <a:endParaRPr lang="en-US" sz="850" dirty="0"/>
+          </a:p>
+        </p:txBody>
+      </p:sp>
+      <p:sp>
+        <p:nvSpPr>
+          <p:cNvPr id="28" name="Shape 26"/>
           <p:cNvSpPr/>
           <p:nvPr/>
         </p:nvSpPr>
@@ -24013,7 +24732,7 @@
       </p:sp>
       <p:sp>
         <p:nvSpPr>
-          <p:cNvPr id="23" name="Text 21"/>
+          <p:cNvPr id="29" name="Text 27"/>
           <p:cNvSpPr/>
           <p:nvPr/>
         </p:nvSpPr>
@@ -24052,7 +24771,7 @@
       </p:sp>
       <p:sp>
         <p:nvSpPr>
-          <p:cNvPr id="24" name="Shape 22"/>
+          <p:cNvPr id="30" name="Shape 28"/>
           <p:cNvSpPr/>
           <p:nvPr/>
         </p:nvSpPr>
@@ -24079,7 +24798,7 @@
       </p:sp>
       <p:sp>
         <p:nvSpPr>
-          <p:cNvPr id="25" name="Text 23"/>
+          <p:cNvPr id="31" name="Text 29"/>
           <p:cNvSpPr/>
           <p:nvPr/>
         </p:nvSpPr>
@@ -24118,7 +24837,7 @@
       </p:sp>
       <p:sp>
         <p:nvSpPr>
-          <p:cNvPr id="26" name="Shape 24"/>
+          <p:cNvPr id="32" name="Shape 30"/>
           <p:cNvSpPr/>
           <p:nvPr/>
         </p:nvSpPr>
@@ -24145,7 +24864,7 @@
       </p:sp>
       <p:sp>
         <p:nvSpPr>
-          <p:cNvPr id="27" name="Text 25"/>
+          <p:cNvPr id="33" name="Text 31"/>
           <p:cNvSpPr/>
           <p:nvPr/>
         </p:nvSpPr>
@@ -24184,7 +24903,7 @@
       </p:sp>
       <p:sp>
         <p:nvSpPr>
-          <p:cNvPr id="28" name="Shape 26"/>
+          <p:cNvPr id="34" name="Shape 32"/>
           <p:cNvSpPr/>
           <p:nvPr/>
         </p:nvSpPr>
@@ -24211,7 +24930,7 @@
       </p:sp>
       <p:sp>
         <p:nvSpPr>
-          <p:cNvPr id="29" name="Text 27"/>
+          <p:cNvPr id="35" name="Text 33"/>
           <p:cNvSpPr/>
           <p:nvPr/>
         </p:nvSpPr>
@@ -24534,7 +25253,7 @@
                 <a:ea typeface="Calibri" pitchFamily="34" charset="-122"/>
                 <a:cs typeface="Calibri" pitchFamily="34" charset="-120"/>
               </a:rPr>
-              <a:t>Word Labs  •  wordlabs.app  •  Root: 'light' = brightness, illumination, not heavy</a:t>
+              <a:t>Word Labs  •  wordlabs.app  •  Root: 'light' = brightness; not heavy</a:t>
             </a:r>
             <a:endParaRPr lang="en-US" sz="800" dirty="0"/>
           </a:p>
@@ -24607,7 +25326,7 @@
                 <a:ea typeface="Trebuchet MS" pitchFamily="34" charset="-122"/>
                 <a:cs typeface="Trebuchet MS" pitchFamily="34" charset="-120"/>
               </a:rPr>
-              <a:t>We are learning that the root 'light' means 'brightness, illumination, not heavy'.</a:t>
+              <a:t>We are learning that the root 'light' means 'brightness; not heavy'.</a:t>
             </a:r>
             <a:endParaRPr lang="en-US" sz="2000" dirty="0"/>
           </a:p>
@@ -25253,7 +25972,7 @@
                 <a:ea typeface="Calibri" pitchFamily="34" charset="-122"/>
                 <a:cs typeface="Calibri" pitchFamily="34" charset="-120"/>
               </a:rPr>
-              <a:t>Word Labs  •  wordlabs.app  •  Root: 'light' = brightness, illumination, not heavy</a:t>
+              <a:t>Word Labs  •  wordlabs.app  •  Root: 'light' = brightness; not heavy</a:t>
             </a:r>
             <a:endParaRPr lang="en-US" sz="800" dirty="0"/>
           </a:p>
@@ -25392,7 +26111,7 @@
                 <a:ea typeface="Trebuchet MS" pitchFamily="34" charset="-122"/>
                 <a:cs typeface="Trebuchet MS" pitchFamily="34" charset="-120"/>
               </a:rPr>
-              <a:t>delight</a:t>
+              <a:t>enlightenment</a:t>
             </a:r>
             <a:endParaRPr lang="en-US" sz="2800" dirty="0"/>
           </a:p>
@@ -25472,8 +26191,8 @@
         </p:nvSpPr>
         <p:spPr>
           <a:xfrm>
-            <a:off x="2938272" y="2258568"/>
-            <a:ext cx="1828800" cy="292608"/>
+            <a:off x="1989734" y="2258568"/>
+            <a:ext cx="1581912" cy="292608"/>
           </a:xfrm>
           <a:prstGeom prst="rect">
             <a:avLst>
@@ -25506,8 +26225,8 @@
         </p:nvSpPr>
         <p:spPr>
           <a:xfrm>
-            <a:off x="2938272" y="2258568"/>
-            <a:ext cx="1828800" cy="292608"/>
+            <a:off x="1989734" y="2258568"/>
+            <a:ext cx="1581912" cy="292608"/>
           </a:xfrm>
           <a:prstGeom prst="rect">
             <a:avLst/>
@@ -25531,7 +26250,7 @@
                 <a:ea typeface="Trebuchet MS" pitchFamily="34" charset="-122"/>
                 <a:cs typeface="Trebuchet MS" pitchFamily="34" charset="-120"/>
               </a:rPr>
-              <a:t>de</a:t>
+              <a:t>en</a:t>
             </a:r>
             <a:endParaRPr lang="en-US" sz="1300" dirty="0"/>
           </a:p>
@@ -25545,8 +26264,8 @@
         </p:nvSpPr>
         <p:spPr>
           <a:xfrm>
-            <a:off x="2938272" y="2569464"/>
-            <a:ext cx="1828800" cy="201168"/>
+            <a:off x="1989734" y="2569464"/>
+            <a:ext cx="1581912" cy="201168"/>
           </a:xfrm>
           <a:prstGeom prst="rect">
             <a:avLst/>
@@ -25570,7 +26289,7 @@
                 <a:ea typeface="Calibri" pitchFamily="34" charset="-122"/>
                 <a:cs typeface="Calibri" pitchFamily="34" charset="-120"/>
               </a:rPr>
-              <a:t>from, away, or intensifying</a:t>
+              <a:t>made of; to make</a:t>
             </a:r>
             <a:endParaRPr lang="en-US" sz="850" dirty="0"/>
           </a:p>
@@ -25584,8 +26303,8 @@
         </p:nvSpPr>
         <p:spPr>
           <a:xfrm>
-            <a:off x="5803392" y="2258568"/>
-            <a:ext cx="1828800" cy="292608"/>
+            <a:off x="3659429" y="2258568"/>
+            <a:ext cx="1581912" cy="292608"/>
           </a:xfrm>
           <a:prstGeom prst="rect">
             <a:avLst>
@@ -25618,8 +26337,8 @@
         </p:nvSpPr>
         <p:spPr>
           <a:xfrm>
-            <a:off x="5803392" y="2258568"/>
-            <a:ext cx="1828800" cy="292608"/>
+            <a:off x="3659429" y="2258568"/>
+            <a:ext cx="1581912" cy="292608"/>
           </a:xfrm>
           <a:prstGeom prst="rect">
             <a:avLst/>
@@ -25657,8 +26376,8 @@
         </p:nvSpPr>
         <p:spPr>
           <a:xfrm>
-            <a:off x="5803392" y="2569464"/>
-            <a:ext cx="1828800" cy="201168"/>
+            <a:off x="3659429" y="2569464"/>
+            <a:ext cx="1581912" cy="201168"/>
           </a:xfrm>
           <a:prstGeom prst="rect">
             <a:avLst/>
@@ -25682,7 +26401,7 @@
                 <a:ea typeface="Calibri" pitchFamily="34" charset="-122"/>
                 <a:cs typeface="Calibri" pitchFamily="34" charset="-120"/>
               </a:rPr>
-              <a:t>brightness, joy</a:t>
+              <a:t>brightness; not heavy</a:t>
             </a:r>
             <a:endParaRPr lang="en-US" sz="850" dirty="0"/>
           </a:p>
@@ -25691,6 +26410,230 @@
       <p:sp>
         <p:nvSpPr>
           <p:cNvPr id="22" name="Shape 20"/>
+          <p:cNvSpPr/>
+          <p:nvPr/>
+        </p:nvSpPr>
+        <p:spPr>
+          <a:xfrm>
+            <a:off x="5329123" y="2258568"/>
+            <a:ext cx="1581912" cy="292608"/>
+          </a:xfrm>
+          <a:prstGeom prst="rect">
+            <a:avLst>
+              <a:gd name="adj" fmla="val 25000"/>
+            </a:avLst>
+          </a:prstGeom>
+          <a:solidFill>
+            <a:srgbClr val="FCE7F3"/>
+          </a:solidFill>
+          <a:ln w="19050">
+            <a:solidFill>
+              <a:srgbClr val="DB2777"/>
+            </a:solidFill>
+            <a:prstDash val="solid"/>
+          </a:ln>
+          <a:effectLst>
+            <a:outerShdw sx="100000" sy="100000" kx="0" ky="0" algn="bl" rotWithShape="0" blurRad="101600" dist="38100" dir="8100000">
+              <a:srgbClr val="000000">
+                <a:alpha val="12000"/>
+              </a:srgbClr>
+            </a:outerShdw>
+          </a:effectLst>
+        </p:spPr>
+      </p:sp>
+      <p:sp>
+        <p:nvSpPr>
+          <p:cNvPr id="23" name="Text 21"/>
+          <p:cNvSpPr/>
+          <p:nvPr/>
+        </p:nvSpPr>
+        <p:spPr>
+          <a:xfrm>
+            <a:off x="5329123" y="2258568"/>
+            <a:ext cx="1581912" cy="292608"/>
+          </a:xfrm>
+          <a:prstGeom prst="rect">
+            <a:avLst/>
+          </a:prstGeom>
+          <a:noFill/>
+          <a:ln/>
+        </p:spPr>
+        <p:txBody>
+          <a:bodyPr wrap="square" lIns="0" tIns="0" rIns="0" bIns="0" rtlCol="0" anchor="ctr"/>
+          <a:lstStyle/>
+          <a:p>
+            <a:pPr algn="ctr" indent="0" marL="0">
+              <a:buNone/>
+            </a:pPr>
+            <a:r>
+              <a:rPr lang="en-US" sz="1300" b="1" dirty="0">
+                <a:solidFill>
+                  <a:srgbClr val="9D174D"/>
+                </a:solidFill>
+                <a:latin typeface="Trebuchet MS" pitchFamily="34" charset="0"/>
+                <a:ea typeface="Trebuchet MS" pitchFamily="34" charset="-122"/>
+                <a:cs typeface="Trebuchet MS" pitchFamily="34" charset="-120"/>
+              </a:rPr>
+              <a:t>en</a:t>
+            </a:r>
+            <a:endParaRPr lang="en-US" sz="1300" dirty="0"/>
+          </a:p>
+        </p:txBody>
+      </p:sp>
+      <p:sp>
+        <p:nvSpPr>
+          <p:cNvPr id="24" name="Text 22"/>
+          <p:cNvSpPr/>
+          <p:nvPr/>
+        </p:nvSpPr>
+        <p:spPr>
+          <a:xfrm>
+            <a:off x="5329123" y="2569464"/>
+            <a:ext cx="1581912" cy="201168"/>
+          </a:xfrm>
+          <a:prstGeom prst="rect">
+            <a:avLst/>
+          </a:prstGeom>
+          <a:noFill/>
+          <a:ln/>
+        </p:spPr>
+        <p:txBody>
+          <a:bodyPr wrap="square" lIns="0" tIns="0" rIns="0" bIns="0" rtlCol="0" anchor="t"/>
+          <a:lstStyle/>
+          <a:p>
+            <a:pPr algn="ctr" indent="0" marL="0">
+              <a:buNone/>
+            </a:pPr>
+            <a:r>
+              <a:rPr lang="en-US" sz="850" dirty="0">
+                <a:solidFill>
+                  <a:srgbClr val="475569"/>
+                </a:solidFill>
+                <a:latin typeface="Calibri" pitchFamily="34" charset="0"/>
+                <a:ea typeface="Calibri" pitchFamily="34" charset="-122"/>
+                <a:cs typeface="Calibri" pitchFamily="34" charset="-120"/>
+              </a:rPr>
+              <a:t>made of; to make</a:t>
+            </a:r>
+            <a:endParaRPr lang="en-US" sz="850" dirty="0"/>
+          </a:p>
+        </p:txBody>
+      </p:sp>
+      <p:sp>
+        <p:nvSpPr>
+          <p:cNvPr id="25" name="Shape 23"/>
+          <p:cNvSpPr/>
+          <p:nvPr/>
+        </p:nvSpPr>
+        <p:spPr>
+          <a:xfrm>
+            <a:off x="6998818" y="2258568"/>
+            <a:ext cx="1581912" cy="292608"/>
+          </a:xfrm>
+          <a:prstGeom prst="rect">
+            <a:avLst>
+              <a:gd name="adj" fmla="val 25000"/>
+            </a:avLst>
+          </a:prstGeom>
+          <a:solidFill>
+            <a:srgbClr val="FCE7F3"/>
+          </a:solidFill>
+          <a:ln w="19050">
+            <a:solidFill>
+              <a:srgbClr val="DB2777"/>
+            </a:solidFill>
+            <a:prstDash val="solid"/>
+          </a:ln>
+          <a:effectLst>
+            <a:outerShdw sx="100000" sy="100000" kx="0" ky="0" algn="bl" rotWithShape="0" blurRad="101600" dist="38100" dir="8100000">
+              <a:srgbClr val="000000">
+                <a:alpha val="12000"/>
+              </a:srgbClr>
+            </a:outerShdw>
+          </a:effectLst>
+        </p:spPr>
+      </p:sp>
+      <p:sp>
+        <p:nvSpPr>
+          <p:cNvPr id="26" name="Text 24"/>
+          <p:cNvSpPr/>
+          <p:nvPr/>
+        </p:nvSpPr>
+        <p:spPr>
+          <a:xfrm>
+            <a:off x="6998818" y="2258568"/>
+            <a:ext cx="1581912" cy="292608"/>
+          </a:xfrm>
+          <a:prstGeom prst="rect">
+            <a:avLst/>
+          </a:prstGeom>
+          <a:noFill/>
+          <a:ln/>
+        </p:spPr>
+        <p:txBody>
+          <a:bodyPr wrap="square" lIns="0" tIns="0" rIns="0" bIns="0" rtlCol="0" anchor="ctr"/>
+          <a:lstStyle/>
+          <a:p>
+            <a:pPr algn="ctr" indent="0" marL="0">
+              <a:buNone/>
+            </a:pPr>
+            <a:r>
+              <a:rPr lang="en-US" sz="1300" b="1" dirty="0">
+                <a:solidFill>
+                  <a:srgbClr val="9D174D"/>
+                </a:solidFill>
+                <a:latin typeface="Trebuchet MS" pitchFamily="34" charset="0"/>
+                <a:ea typeface="Trebuchet MS" pitchFamily="34" charset="-122"/>
+                <a:cs typeface="Trebuchet MS" pitchFamily="34" charset="-120"/>
+              </a:rPr>
+              <a:t>ment</a:t>
+            </a:r>
+            <a:endParaRPr lang="en-US" sz="1300" dirty="0"/>
+          </a:p>
+        </p:txBody>
+      </p:sp>
+      <p:sp>
+        <p:nvSpPr>
+          <p:cNvPr id="27" name="Text 25"/>
+          <p:cNvSpPr/>
+          <p:nvPr/>
+        </p:nvSpPr>
+        <p:spPr>
+          <a:xfrm>
+            <a:off x="6998818" y="2569464"/>
+            <a:ext cx="1581912" cy="201168"/>
+          </a:xfrm>
+          <a:prstGeom prst="rect">
+            <a:avLst/>
+          </a:prstGeom>
+          <a:noFill/>
+          <a:ln/>
+        </p:spPr>
+        <p:txBody>
+          <a:bodyPr wrap="square" lIns="0" tIns="0" rIns="0" bIns="0" rtlCol="0" anchor="t"/>
+          <a:lstStyle/>
+          <a:p>
+            <a:pPr algn="ctr" indent="0" marL="0">
+              <a:buNone/>
+            </a:pPr>
+            <a:r>
+              <a:rPr lang="en-US" sz="850" dirty="0">
+                <a:solidFill>
+                  <a:srgbClr val="475569"/>
+                </a:solidFill>
+                <a:latin typeface="Calibri" pitchFamily="34" charset="0"/>
+                <a:ea typeface="Calibri" pitchFamily="34" charset="-122"/>
+                <a:cs typeface="Calibri" pitchFamily="34" charset="-120"/>
+              </a:rPr>
+              <a:t>result of action</a:t>
+            </a:r>
+            <a:endParaRPr lang="en-US" sz="850" dirty="0"/>
+          </a:p>
+        </p:txBody>
+      </p:sp>
+      <p:sp>
+        <p:nvSpPr>
+          <p:cNvPr id="28" name="Shape 26"/>
           <p:cNvSpPr/>
           <p:nvPr/>
         </p:nvSpPr>
@@ -25717,7 +26660,7 @@
       </p:sp>
       <p:sp>
         <p:nvSpPr>
-          <p:cNvPr id="23" name="Text 21"/>
+          <p:cNvPr id="29" name="Text 27"/>
           <p:cNvSpPr/>
           <p:nvPr/>
         </p:nvSpPr>
@@ -25756,7 +26699,7 @@
       </p:sp>
       <p:sp>
         <p:nvSpPr>
-          <p:cNvPr id="24" name="Shape 22"/>
+          <p:cNvPr id="30" name="Shape 28"/>
           <p:cNvSpPr/>
           <p:nvPr/>
         </p:nvSpPr>
@@ -25783,14 +26726,14 @@
       </p:sp>
       <p:sp>
         <p:nvSpPr>
-          <p:cNvPr id="25" name="Shape 23"/>
-          <p:cNvSpPr/>
-          <p:nvPr/>
-        </p:nvSpPr>
-        <p:spPr>
-          <a:xfrm>
-            <a:off x="2999232" y="3364992"/>
-            <a:ext cx="1645920" cy="475488"/>
+          <p:cNvPr id="31" name="Shape 29"/>
+          <p:cNvSpPr/>
+          <p:nvPr/>
+        </p:nvSpPr>
+        <p:spPr>
+          <a:xfrm>
+            <a:off x="1975104" y="3364992"/>
+            <a:ext cx="1554480" cy="475488"/>
           </a:xfrm>
           <a:prstGeom prst="rect">
             <a:avLst>
@@ -25810,14 +26753,14 @@
       </p:sp>
       <p:sp>
         <p:nvSpPr>
-          <p:cNvPr id="26" name="Text 24"/>
-          <p:cNvSpPr/>
-          <p:nvPr/>
-        </p:nvSpPr>
-        <p:spPr>
-          <a:xfrm>
-            <a:off x="2999232" y="3364992"/>
-            <a:ext cx="1645920" cy="475488"/>
+          <p:cNvPr id="32" name="Text 30"/>
+          <p:cNvSpPr/>
+          <p:nvPr/>
+        </p:nvSpPr>
+        <p:spPr>
+          <a:xfrm>
+            <a:off x="1975104" y="3364992"/>
+            <a:ext cx="1554480" cy="475488"/>
           </a:xfrm>
           <a:prstGeom prst="rect">
             <a:avLst/>
@@ -25841,7 +26784,7 @@
                 <a:ea typeface="Trebuchet MS" pitchFamily="34" charset="-122"/>
                 <a:cs typeface="Trebuchet MS" pitchFamily="34" charset="-120"/>
               </a:rPr>
-              <a:t>de</a:t>
+              <a:t>en</a:t>
             </a:r>
             <a:endParaRPr lang="en-US" sz="1400" dirty="0"/>
           </a:p>
@@ -25849,14 +26792,14 @@
       </p:sp>
       <p:sp>
         <p:nvSpPr>
-          <p:cNvPr id="27" name="Text 25"/>
-          <p:cNvSpPr/>
-          <p:nvPr/>
-        </p:nvSpPr>
-        <p:spPr>
-          <a:xfrm>
-            <a:off x="4645152" y="3364992"/>
-            <a:ext cx="1097280" cy="475488"/>
+          <p:cNvPr id="33" name="Text 31"/>
+          <p:cNvSpPr/>
+          <p:nvPr/>
+        </p:nvSpPr>
+        <p:spPr>
+          <a:xfrm>
+            <a:off x="3529584" y="3364992"/>
+            <a:ext cx="73152" cy="475488"/>
           </a:xfrm>
           <a:prstGeom prst="rect">
             <a:avLst/>
@@ -25888,14 +26831,14 @@
       </p:sp>
       <p:sp>
         <p:nvSpPr>
-          <p:cNvPr id="28" name="Shape 26"/>
-          <p:cNvSpPr/>
-          <p:nvPr/>
-        </p:nvSpPr>
-        <p:spPr>
-          <a:xfrm>
-            <a:off x="5742432" y="3364992"/>
-            <a:ext cx="1645920" cy="475488"/>
+          <p:cNvPr id="34" name="Shape 32"/>
+          <p:cNvSpPr/>
+          <p:nvPr/>
+        </p:nvSpPr>
+        <p:spPr>
+          <a:xfrm>
+            <a:off x="3602736" y="3364992"/>
+            <a:ext cx="1554480" cy="475488"/>
           </a:xfrm>
           <a:prstGeom prst="rect">
             <a:avLst>
@@ -25915,14 +26858,14 @@
       </p:sp>
       <p:sp>
         <p:nvSpPr>
-          <p:cNvPr id="29" name="Text 27"/>
-          <p:cNvSpPr/>
-          <p:nvPr/>
-        </p:nvSpPr>
-        <p:spPr>
-          <a:xfrm>
-            <a:off x="5742432" y="3364992"/>
-            <a:ext cx="1645920" cy="475488"/>
+          <p:cNvPr id="35" name="Text 33"/>
+          <p:cNvSpPr/>
+          <p:nvPr/>
+        </p:nvSpPr>
+        <p:spPr>
+          <a:xfrm>
+            <a:off x="3602736" y="3364992"/>
+            <a:ext cx="1554480" cy="475488"/>
           </a:xfrm>
           <a:prstGeom prst="rect">
             <a:avLst/>
@@ -25954,7 +26897,217 @@
       </p:sp>
       <p:sp>
         <p:nvSpPr>
-          <p:cNvPr id="30" name="Shape 28"/>
+          <p:cNvPr id="36" name="Text 34"/>
+          <p:cNvSpPr/>
+          <p:nvPr/>
+        </p:nvSpPr>
+        <p:spPr>
+          <a:xfrm>
+            <a:off x="5157216" y="3364992"/>
+            <a:ext cx="73152" cy="475488"/>
+          </a:xfrm>
+          <a:prstGeom prst="rect">
+            <a:avLst/>
+          </a:prstGeom>
+          <a:noFill/>
+          <a:ln/>
+        </p:spPr>
+        <p:txBody>
+          <a:bodyPr wrap="square" lIns="0" tIns="0" rIns="0" bIns="0" rtlCol="0" anchor="ctr"/>
+          <a:lstStyle/>
+          <a:p>
+            <a:pPr algn="ctr" indent="0" marL="0">
+              <a:buNone/>
+            </a:pPr>
+            <a:r>
+              <a:rPr lang="en-US" sz="1600" b="1" dirty="0">
+                <a:solidFill>
+                  <a:srgbClr val="0D9488"/>
+                </a:solidFill>
+                <a:latin typeface="Trebuchet MS" pitchFamily="34" charset="0"/>
+                <a:ea typeface="Trebuchet MS" pitchFamily="34" charset="-122"/>
+                <a:cs typeface="Trebuchet MS" pitchFamily="34" charset="-120"/>
+              </a:rPr>
+              <a:t>·</a:t>
+            </a:r>
+            <a:endParaRPr lang="en-US" sz="1600" dirty="0"/>
+          </a:p>
+        </p:txBody>
+      </p:sp>
+      <p:sp>
+        <p:nvSpPr>
+          <p:cNvPr id="37" name="Shape 35"/>
+          <p:cNvSpPr/>
+          <p:nvPr/>
+        </p:nvSpPr>
+        <p:spPr>
+          <a:xfrm>
+            <a:off x="5230368" y="3364992"/>
+            <a:ext cx="1554480" cy="475488"/>
+          </a:xfrm>
+          <a:prstGeom prst="rect">
+            <a:avLst>
+              <a:gd name="adj" fmla="val 9615"/>
+            </a:avLst>
+          </a:prstGeom>
+          <a:solidFill>
+            <a:srgbClr val="FFFFFF"/>
+          </a:solidFill>
+          <a:ln w="12700">
+            <a:solidFill>
+              <a:srgbClr val="0D9488"/>
+            </a:solidFill>
+            <a:prstDash val="solid"/>
+          </a:ln>
+        </p:spPr>
+      </p:sp>
+      <p:sp>
+        <p:nvSpPr>
+          <p:cNvPr id="38" name="Text 36"/>
+          <p:cNvSpPr/>
+          <p:nvPr/>
+        </p:nvSpPr>
+        <p:spPr>
+          <a:xfrm>
+            <a:off x="5230368" y="3364992"/>
+            <a:ext cx="1554480" cy="475488"/>
+          </a:xfrm>
+          <a:prstGeom prst="rect">
+            <a:avLst/>
+          </a:prstGeom>
+          <a:noFill/>
+          <a:ln/>
+        </p:spPr>
+        <p:txBody>
+          <a:bodyPr wrap="square" lIns="0" tIns="0" rIns="0" bIns="0" rtlCol="0" anchor="ctr"/>
+          <a:lstStyle/>
+          <a:p>
+            <a:pPr algn="ctr" indent="0" marL="0">
+              <a:buNone/>
+            </a:pPr>
+            <a:r>
+              <a:rPr lang="en-US" sz="1400" b="1" dirty="0">
+                <a:solidFill>
+                  <a:srgbClr val="0D9488"/>
+                </a:solidFill>
+                <a:latin typeface="Trebuchet MS" pitchFamily="34" charset="0"/>
+                <a:ea typeface="Trebuchet MS" pitchFamily="34" charset="-122"/>
+                <a:cs typeface="Trebuchet MS" pitchFamily="34" charset="-120"/>
+              </a:rPr>
+              <a:t>en</a:t>
+            </a:r>
+            <a:endParaRPr lang="en-US" sz="1400" dirty="0"/>
+          </a:p>
+        </p:txBody>
+      </p:sp>
+      <p:sp>
+        <p:nvSpPr>
+          <p:cNvPr id="39" name="Text 37"/>
+          <p:cNvSpPr/>
+          <p:nvPr/>
+        </p:nvSpPr>
+        <p:spPr>
+          <a:xfrm>
+            <a:off x="6784848" y="3364992"/>
+            <a:ext cx="73152" cy="475488"/>
+          </a:xfrm>
+          <a:prstGeom prst="rect">
+            <a:avLst/>
+          </a:prstGeom>
+          <a:noFill/>
+          <a:ln/>
+        </p:spPr>
+        <p:txBody>
+          <a:bodyPr wrap="square" lIns="0" tIns="0" rIns="0" bIns="0" rtlCol="0" anchor="ctr"/>
+          <a:lstStyle/>
+          <a:p>
+            <a:pPr algn="ctr" indent="0" marL="0">
+              <a:buNone/>
+            </a:pPr>
+            <a:r>
+              <a:rPr lang="en-US" sz="1600" b="1" dirty="0">
+                <a:solidFill>
+                  <a:srgbClr val="0D9488"/>
+                </a:solidFill>
+                <a:latin typeface="Trebuchet MS" pitchFamily="34" charset="0"/>
+                <a:ea typeface="Trebuchet MS" pitchFamily="34" charset="-122"/>
+                <a:cs typeface="Trebuchet MS" pitchFamily="34" charset="-120"/>
+              </a:rPr>
+              <a:t>·</a:t>
+            </a:r>
+            <a:endParaRPr lang="en-US" sz="1600" dirty="0"/>
+          </a:p>
+        </p:txBody>
+      </p:sp>
+      <p:sp>
+        <p:nvSpPr>
+          <p:cNvPr id="40" name="Shape 38"/>
+          <p:cNvSpPr/>
+          <p:nvPr/>
+        </p:nvSpPr>
+        <p:spPr>
+          <a:xfrm>
+            <a:off x="6858000" y="3364992"/>
+            <a:ext cx="1554480" cy="475488"/>
+          </a:xfrm>
+          <a:prstGeom prst="rect">
+            <a:avLst>
+              <a:gd name="adj" fmla="val 9615"/>
+            </a:avLst>
+          </a:prstGeom>
+          <a:solidFill>
+            <a:srgbClr val="FFFFFF"/>
+          </a:solidFill>
+          <a:ln w="12700">
+            <a:solidFill>
+              <a:srgbClr val="0D9488"/>
+            </a:solidFill>
+            <a:prstDash val="solid"/>
+          </a:ln>
+        </p:spPr>
+      </p:sp>
+      <p:sp>
+        <p:nvSpPr>
+          <p:cNvPr id="41" name="Text 39"/>
+          <p:cNvSpPr/>
+          <p:nvPr/>
+        </p:nvSpPr>
+        <p:spPr>
+          <a:xfrm>
+            <a:off x="6858000" y="3364992"/>
+            <a:ext cx="1554480" cy="475488"/>
+          </a:xfrm>
+          <a:prstGeom prst="rect">
+            <a:avLst/>
+          </a:prstGeom>
+          <a:noFill/>
+          <a:ln/>
+        </p:spPr>
+        <p:txBody>
+          <a:bodyPr wrap="square" lIns="0" tIns="0" rIns="0" bIns="0" rtlCol="0" anchor="ctr"/>
+          <a:lstStyle/>
+          <a:p>
+            <a:pPr algn="ctr" indent="0" marL="0">
+              <a:buNone/>
+            </a:pPr>
+            <a:r>
+              <a:rPr lang="en-US" sz="1400" b="1" dirty="0">
+                <a:solidFill>
+                  <a:srgbClr val="0D9488"/>
+                </a:solidFill>
+                <a:latin typeface="Trebuchet MS" pitchFamily="34" charset="0"/>
+                <a:ea typeface="Trebuchet MS" pitchFamily="34" charset="-122"/>
+                <a:cs typeface="Trebuchet MS" pitchFamily="34" charset="-120"/>
+              </a:rPr>
+              <a:t>ment</a:t>
+            </a:r>
+            <a:endParaRPr lang="en-US" sz="1400" dirty="0"/>
+          </a:p>
+        </p:txBody>
+      </p:sp>
+      <p:sp>
+        <p:nvSpPr>
+          <p:cNvPr id="42" name="Shape 40"/>
           <p:cNvSpPr/>
           <p:nvPr/>
         </p:nvSpPr>
@@ -25981,7 +27134,7 @@
       </p:sp>
       <p:sp>
         <p:nvSpPr>
-          <p:cNvPr id="31" name="Text 29"/>
+          <p:cNvPr id="43" name="Text 41"/>
           <p:cNvSpPr/>
           <p:nvPr/>
         </p:nvSpPr>
@@ -26020,7 +27173,7 @@
       </p:sp>
       <p:sp>
         <p:nvSpPr>
-          <p:cNvPr id="32" name="Shape 30"/>
+          <p:cNvPr id="44" name="Shape 42"/>
           <p:cNvSpPr/>
           <p:nvPr/>
         </p:nvSpPr>
@@ -26047,7 +27200,7 @@
       </p:sp>
       <p:sp>
         <p:nvSpPr>
-          <p:cNvPr id="33" name="Text 31"/>
+          <p:cNvPr id="45" name="Text 43"/>
           <p:cNvSpPr/>
           <p:nvPr/>
         </p:nvSpPr>
@@ -26370,7 +27523,7 @@
                 <a:ea typeface="Calibri" pitchFamily="34" charset="-122"/>
                 <a:cs typeface="Calibri" pitchFamily="34" charset="-120"/>
               </a:rPr>
-              <a:t>Word Labs  •  wordlabs.app  •  Root: 'light' = brightness, illumination, not heavy</a:t>
+              <a:t>Word Labs  •  wordlabs.app  •  Root: 'light' = brightness; not heavy</a:t>
             </a:r>
             <a:endParaRPr lang="en-US" sz="800" dirty="0"/>
           </a:p>
@@ -26509,7 +27662,7 @@
                 <a:ea typeface="Trebuchet MS" pitchFamily="34" charset="-122"/>
                 <a:cs typeface="Trebuchet MS" pitchFamily="34" charset="-120"/>
               </a:rPr>
-              <a:t>delight</a:t>
+              <a:t>enlightenment</a:t>
             </a:r>
             <a:endParaRPr lang="en-US" sz="2800" dirty="0"/>
           </a:p>
@@ -26589,8 +27742,8 @@
         </p:nvSpPr>
         <p:spPr>
           <a:xfrm>
-            <a:off x="2938272" y="2258568"/>
-            <a:ext cx="1828800" cy="292608"/>
+            <a:off x="1989734" y="2258568"/>
+            <a:ext cx="1581912" cy="292608"/>
           </a:xfrm>
           <a:prstGeom prst="rect">
             <a:avLst>
@@ -26623,8 +27776,8 @@
         </p:nvSpPr>
         <p:spPr>
           <a:xfrm>
-            <a:off x="2938272" y="2258568"/>
-            <a:ext cx="1828800" cy="292608"/>
+            <a:off x="1989734" y="2258568"/>
+            <a:ext cx="1581912" cy="292608"/>
           </a:xfrm>
           <a:prstGeom prst="rect">
             <a:avLst/>
@@ -26648,7 +27801,7 @@
                 <a:ea typeface="Trebuchet MS" pitchFamily="34" charset="-122"/>
                 <a:cs typeface="Trebuchet MS" pitchFamily="34" charset="-120"/>
               </a:rPr>
-              <a:t>de</a:t>
+              <a:t>en</a:t>
             </a:r>
             <a:endParaRPr lang="en-US" sz="1300" dirty="0"/>
           </a:p>
@@ -26662,8 +27815,8 @@
         </p:nvSpPr>
         <p:spPr>
           <a:xfrm>
-            <a:off x="2938272" y="2569464"/>
-            <a:ext cx="1828800" cy="201168"/>
+            <a:off x="1989734" y="2569464"/>
+            <a:ext cx="1581912" cy="201168"/>
           </a:xfrm>
           <a:prstGeom prst="rect">
             <a:avLst/>
@@ -26687,7 +27840,7 @@
                 <a:ea typeface="Calibri" pitchFamily="34" charset="-122"/>
                 <a:cs typeface="Calibri" pitchFamily="34" charset="-120"/>
               </a:rPr>
-              <a:t>from, away, or intensifying</a:t>
+              <a:t>made of; to make</a:t>
             </a:r>
             <a:endParaRPr lang="en-US" sz="850" dirty="0"/>
           </a:p>
@@ -26701,8 +27854,8 @@
         </p:nvSpPr>
         <p:spPr>
           <a:xfrm>
-            <a:off x="5803392" y="2258568"/>
-            <a:ext cx="1828800" cy="292608"/>
+            <a:off x="3659429" y="2258568"/>
+            <a:ext cx="1581912" cy="292608"/>
           </a:xfrm>
           <a:prstGeom prst="rect">
             <a:avLst>
@@ -26735,8 +27888,8 @@
         </p:nvSpPr>
         <p:spPr>
           <a:xfrm>
-            <a:off x="5803392" y="2258568"/>
-            <a:ext cx="1828800" cy="292608"/>
+            <a:off x="3659429" y="2258568"/>
+            <a:ext cx="1581912" cy="292608"/>
           </a:xfrm>
           <a:prstGeom prst="rect">
             <a:avLst/>
@@ -26774,8 +27927,8 @@
         </p:nvSpPr>
         <p:spPr>
           <a:xfrm>
-            <a:off x="5803392" y="2569464"/>
-            <a:ext cx="1828800" cy="201168"/>
+            <a:off x="3659429" y="2569464"/>
+            <a:ext cx="1581912" cy="201168"/>
           </a:xfrm>
           <a:prstGeom prst="rect">
             <a:avLst/>
@@ -26799,7 +27952,7 @@
                 <a:ea typeface="Calibri" pitchFamily="34" charset="-122"/>
                 <a:cs typeface="Calibri" pitchFamily="34" charset="-120"/>
               </a:rPr>
-              <a:t>brightness, joy</a:t>
+              <a:t>brightness; not heavy</a:t>
             </a:r>
             <a:endParaRPr lang="en-US" sz="850" dirty="0"/>
           </a:p>
@@ -26808,6 +27961,230 @@
       <p:sp>
         <p:nvSpPr>
           <p:cNvPr id="22" name="Shape 20"/>
+          <p:cNvSpPr/>
+          <p:nvPr/>
+        </p:nvSpPr>
+        <p:spPr>
+          <a:xfrm>
+            <a:off x="5329123" y="2258568"/>
+            <a:ext cx="1581912" cy="292608"/>
+          </a:xfrm>
+          <a:prstGeom prst="rect">
+            <a:avLst>
+              <a:gd name="adj" fmla="val 25000"/>
+            </a:avLst>
+          </a:prstGeom>
+          <a:solidFill>
+            <a:srgbClr val="FCE7F3"/>
+          </a:solidFill>
+          <a:ln w="19050">
+            <a:solidFill>
+              <a:srgbClr val="DB2777"/>
+            </a:solidFill>
+            <a:prstDash val="solid"/>
+          </a:ln>
+          <a:effectLst>
+            <a:outerShdw sx="100000" sy="100000" kx="0" ky="0" algn="bl" rotWithShape="0" blurRad="101600" dist="38100" dir="8100000">
+              <a:srgbClr val="000000">
+                <a:alpha val="12000"/>
+              </a:srgbClr>
+            </a:outerShdw>
+          </a:effectLst>
+        </p:spPr>
+      </p:sp>
+      <p:sp>
+        <p:nvSpPr>
+          <p:cNvPr id="23" name="Text 21"/>
+          <p:cNvSpPr/>
+          <p:nvPr/>
+        </p:nvSpPr>
+        <p:spPr>
+          <a:xfrm>
+            <a:off x="5329123" y="2258568"/>
+            <a:ext cx="1581912" cy="292608"/>
+          </a:xfrm>
+          <a:prstGeom prst="rect">
+            <a:avLst/>
+          </a:prstGeom>
+          <a:noFill/>
+          <a:ln/>
+        </p:spPr>
+        <p:txBody>
+          <a:bodyPr wrap="square" lIns="0" tIns="0" rIns="0" bIns="0" rtlCol="0" anchor="ctr"/>
+          <a:lstStyle/>
+          <a:p>
+            <a:pPr algn="ctr" indent="0" marL="0">
+              <a:buNone/>
+            </a:pPr>
+            <a:r>
+              <a:rPr lang="en-US" sz="1300" b="1" dirty="0">
+                <a:solidFill>
+                  <a:srgbClr val="9D174D"/>
+                </a:solidFill>
+                <a:latin typeface="Trebuchet MS" pitchFamily="34" charset="0"/>
+                <a:ea typeface="Trebuchet MS" pitchFamily="34" charset="-122"/>
+                <a:cs typeface="Trebuchet MS" pitchFamily="34" charset="-120"/>
+              </a:rPr>
+              <a:t>en</a:t>
+            </a:r>
+            <a:endParaRPr lang="en-US" sz="1300" dirty="0"/>
+          </a:p>
+        </p:txBody>
+      </p:sp>
+      <p:sp>
+        <p:nvSpPr>
+          <p:cNvPr id="24" name="Text 22"/>
+          <p:cNvSpPr/>
+          <p:nvPr/>
+        </p:nvSpPr>
+        <p:spPr>
+          <a:xfrm>
+            <a:off x="5329123" y="2569464"/>
+            <a:ext cx="1581912" cy="201168"/>
+          </a:xfrm>
+          <a:prstGeom prst="rect">
+            <a:avLst/>
+          </a:prstGeom>
+          <a:noFill/>
+          <a:ln/>
+        </p:spPr>
+        <p:txBody>
+          <a:bodyPr wrap="square" lIns="0" tIns="0" rIns="0" bIns="0" rtlCol="0" anchor="t"/>
+          <a:lstStyle/>
+          <a:p>
+            <a:pPr algn="ctr" indent="0" marL="0">
+              <a:buNone/>
+            </a:pPr>
+            <a:r>
+              <a:rPr lang="en-US" sz="850" dirty="0">
+                <a:solidFill>
+                  <a:srgbClr val="475569"/>
+                </a:solidFill>
+                <a:latin typeface="Calibri" pitchFamily="34" charset="0"/>
+                <a:ea typeface="Calibri" pitchFamily="34" charset="-122"/>
+                <a:cs typeface="Calibri" pitchFamily="34" charset="-120"/>
+              </a:rPr>
+              <a:t>made of; to make</a:t>
+            </a:r>
+            <a:endParaRPr lang="en-US" sz="850" dirty="0"/>
+          </a:p>
+        </p:txBody>
+      </p:sp>
+      <p:sp>
+        <p:nvSpPr>
+          <p:cNvPr id="25" name="Shape 23"/>
+          <p:cNvSpPr/>
+          <p:nvPr/>
+        </p:nvSpPr>
+        <p:spPr>
+          <a:xfrm>
+            <a:off x="6998818" y="2258568"/>
+            <a:ext cx="1581912" cy="292608"/>
+          </a:xfrm>
+          <a:prstGeom prst="rect">
+            <a:avLst>
+              <a:gd name="adj" fmla="val 25000"/>
+            </a:avLst>
+          </a:prstGeom>
+          <a:solidFill>
+            <a:srgbClr val="FCE7F3"/>
+          </a:solidFill>
+          <a:ln w="19050">
+            <a:solidFill>
+              <a:srgbClr val="DB2777"/>
+            </a:solidFill>
+            <a:prstDash val="solid"/>
+          </a:ln>
+          <a:effectLst>
+            <a:outerShdw sx="100000" sy="100000" kx="0" ky="0" algn="bl" rotWithShape="0" blurRad="101600" dist="38100" dir="8100000">
+              <a:srgbClr val="000000">
+                <a:alpha val="12000"/>
+              </a:srgbClr>
+            </a:outerShdw>
+          </a:effectLst>
+        </p:spPr>
+      </p:sp>
+      <p:sp>
+        <p:nvSpPr>
+          <p:cNvPr id="26" name="Text 24"/>
+          <p:cNvSpPr/>
+          <p:nvPr/>
+        </p:nvSpPr>
+        <p:spPr>
+          <a:xfrm>
+            <a:off x="6998818" y="2258568"/>
+            <a:ext cx="1581912" cy="292608"/>
+          </a:xfrm>
+          <a:prstGeom prst="rect">
+            <a:avLst/>
+          </a:prstGeom>
+          <a:noFill/>
+          <a:ln/>
+        </p:spPr>
+        <p:txBody>
+          <a:bodyPr wrap="square" lIns="0" tIns="0" rIns="0" bIns="0" rtlCol="0" anchor="ctr"/>
+          <a:lstStyle/>
+          <a:p>
+            <a:pPr algn="ctr" indent="0" marL="0">
+              <a:buNone/>
+            </a:pPr>
+            <a:r>
+              <a:rPr lang="en-US" sz="1300" b="1" dirty="0">
+                <a:solidFill>
+                  <a:srgbClr val="9D174D"/>
+                </a:solidFill>
+                <a:latin typeface="Trebuchet MS" pitchFamily="34" charset="0"/>
+                <a:ea typeface="Trebuchet MS" pitchFamily="34" charset="-122"/>
+                <a:cs typeface="Trebuchet MS" pitchFamily="34" charset="-120"/>
+              </a:rPr>
+              <a:t>ment</a:t>
+            </a:r>
+            <a:endParaRPr lang="en-US" sz="1300" dirty="0"/>
+          </a:p>
+        </p:txBody>
+      </p:sp>
+      <p:sp>
+        <p:nvSpPr>
+          <p:cNvPr id="27" name="Text 25"/>
+          <p:cNvSpPr/>
+          <p:nvPr/>
+        </p:nvSpPr>
+        <p:spPr>
+          <a:xfrm>
+            <a:off x="6998818" y="2569464"/>
+            <a:ext cx="1581912" cy="201168"/>
+          </a:xfrm>
+          <a:prstGeom prst="rect">
+            <a:avLst/>
+          </a:prstGeom>
+          <a:noFill/>
+          <a:ln/>
+        </p:spPr>
+        <p:txBody>
+          <a:bodyPr wrap="square" lIns="0" tIns="0" rIns="0" bIns="0" rtlCol="0" anchor="t"/>
+          <a:lstStyle/>
+          <a:p>
+            <a:pPr algn="ctr" indent="0" marL="0">
+              <a:buNone/>
+            </a:pPr>
+            <a:r>
+              <a:rPr lang="en-US" sz="850" dirty="0">
+                <a:solidFill>
+                  <a:srgbClr val="475569"/>
+                </a:solidFill>
+                <a:latin typeface="Calibri" pitchFamily="34" charset="0"/>
+                <a:ea typeface="Calibri" pitchFamily="34" charset="-122"/>
+                <a:cs typeface="Calibri" pitchFamily="34" charset="-120"/>
+              </a:rPr>
+              <a:t>result of action</a:t>
+            </a:r>
+            <a:endParaRPr lang="en-US" sz="850" dirty="0"/>
+          </a:p>
+        </p:txBody>
+      </p:sp>
+      <p:sp>
+        <p:nvSpPr>
+          <p:cNvPr id="28" name="Shape 26"/>
           <p:cNvSpPr/>
           <p:nvPr/>
         </p:nvSpPr>
@@ -26834,7 +28211,7 @@
       </p:sp>
       <p:sp>
         <p:nvSpPr>
-          <p:cNvPr id="23" name="Text 21"/>
+          <p:cNvPr id="29" name="Text 27"/>
           <p:cNvSpPr/>
           <p:nvPr/>
         </p:nvSpPr>
@@ -26873,7 +28250,7 @@
       </p:sp>
       <p:sp>
         <p:nvSpPr>
-          <p:cNvPr id="24" name="Shape 22"/>
+          <p:cNvPr id="30" name="Shape 28"/>
           <p:cNvSpPr/>
           <p:nvPr/>
         </p:nvSpPr>
@@ -26900,14 +28277,14 @@
       </p:sp>
       <p:sp>
         <p:nvSpPr>
-          <p:cNvPr id="25" name="Shape 23"/>
-          <p:cNvSpPr/>
-          <p:nvPr/>
-        </p:nvSpPr>
-        <p:spPr>
-          <a:xfrm>
-            <a:off x="2999232" y="3364992"/>
-            <a:ext cx="1645920" cy="475488"/>
+          <p:cNvPr id="31" name="Shape 29"/>
+          <p:cNvSpPr/>
+          <p:nvPr/>
+        </p:nvSpPr>
+        <p:spPr>
+          <a:xfrm>
+            <a:off x="1975104" y="3364992"/>
+            <a:ext cx="1554480" cy="475488"/>
           </a:xfrm>
           <a:prstGeom prst="rect">
             <a:avLst>
@@ -26927,14 +28304,14 @@
       </p:sp>
       <p:sp>
         <p:nvSpPr>
-          <p:cNvPr id="26" name="Text 24"/>
-          <p:cNvSpPr/>
-          <p:nvPr/>
-        </p:nvSpPr>
-        <p:spPr>
-          <a:xfrm>
-            <a:off x="2999232" y="3364992"/>
-            <a:ext cx="1645920" cy="475488"/>
+          <p:cNvPr id="32" name="Text 30"/>
+          <p:cNvSpPr/>
+          <p:nvPr/>
+        </p:nvSpPr>
+        <p:spPr>
+          <a:xfrm>
+            <a:off x="1975104" y="3364992"/>
+            <a:ext cx="1554480" cy="475488"/>
           </a:xfrm>
           <a:prstGeom prst="rect">
             <a:avLst/>
@@ -26958,7 +28335,7 @@
                 <a:ea typeface="Trebuchet MS" pitchFamily="34" charset="-122"/>
                 <a:cs typeface="Trebuchet MS" pitchFamily="34" charset="-120"/>
               </a:rPr>
-              <a:t>de</a:t>
+              <a:t>en</a:t>
             </a:r>
             <a:endParaRPr lang="en-US" sz="1400" dirty="0"/>
           </a:p>
@@ -26966,14 +28343,14 @@
       </p:sp>
       <p:sp>
         <p:nvSpPr>
-          <p:cNvPr id="27" name="Text 25"/>
-          <p:cNvSpPr/>
-          <p:nvPr/>
-        </p:nvSpPr>
-        <p:spPr>
-          <a:xfrm>
-            <a:off x="4645152" y="3364992"/>
-            <a:ext cx="1097280" cy="475488"/>
+          <p:cNvPr id="33" name="Text 31"/>
+          <p:cNvSpPr/>
+          <p:nvPr/>
+        </p:nvSpPr>
+        <p:spPr>
+          <a:xfrm>
+            <a:off x="3529584" y="3364992"/>
+            <a:ext cx="73152" cy="475488"/>
           </a:xfrm>
           <a:prstGeom prst="rect">
             <a:avLst/>
@@ -27005,14 +28382,14 @@
       </p:sp>
       <p:sp>
         <p:nvSpPr>
-          <p:cNvPr id="28" name="Shape 26"/>
-          <p:cNvSpPr/>
-          <p:nvPr/>
-        </p:nvSpPr>
-        <p:spPr>
-          <a:xfrm>
-            <a:off x="5742432" y="3364992"/>
-            <a:ext cx="1645920" cy="475488"/>
+          <p:cNvPr id="34" name="Shape 32"/>
+          <p:cNvSpPr/>
+          <p:nvPr/>
+        </p:nvSpPr>
+        <p:spPr>
+          <a:xfrm>
+            <a:off x="3602736" y="3364992"/>
+            <a:ext cx="1554480" cy="475488"/>
           </a:xfrm>
           <a:prstGeom prst="rect">
             <a:avLst>
@@ -27032,14 +28409,14 @@
       </p:sp>
       <p:sp>
         <p:nvSpPr>
-          <p:cNvPr id="29" name="Text 27"/>
-          <p:cNvSpPr/>
-          <p:nvPr/>
-        </p:nvSpPr>
-        <p:spPr>
-          <a:xfrm>
-            <a:off x="5742432" y="3364992"/>
-            <a:ext cx="1645920" cy="475488"/>
+          <p:cNvPr id="35" name="Text 33"/>
+          <p:cNvSpPr/>
+          <p:nvPr/>
+        </p:nvSpPr>
+        <p:spPr>
+          <a:xfrm>
+            <a:off x="3602736" y="3364992"/>
+            <a:ext cx="1554480" cy="475488"/>
           </a:xfrm>
           <a:prstGeom prst="rect">
             <a:avLst/>
@@ -27071,7 +28448,217 @@
       </p:sp>
       <p:sp>
         <p:nvSpPr>
-          <p:cNvPr id="30" name="Shape 28"/>
+          <p:cNvPr id="36" name="Text 34"/>
+          <p:cNvSpPr/>
+          <p:nvPr/>
+        </p:nvSpPr>
+        <p:spPr>
+          <a:xfrm>
+            <a:off x="5157216" y="3364992"/>
+            <a:ext cx="73152" cy="475488"/>
+          </a:xfrm>
+          <a:prstGeom prst="rect">
+            <a:avLst/>
+          </a:prstGeom>
+          <a:noFill/>
+          <a:ln/>
+        </p:spPr>
+        <p:txBody>
+          <a:bodyPr wrap="square" lIns="0" tIns="0" rIns="0" bIns="0" rtlCol="0" anchor="ctr"/>
+          <a:lstStyle/>
+          <a:p>
+            <a:pPr algn="ctr" indent="0" marL="0">
+              <a:buNone/>
+            </a:pPr>
+            <a:r>
+              <a:rPr lang="en-US" sz="1600" b="1" dirty="0">
+                <a:solidFill>
+                  <a:srgbClr val="0D9488"/>
+                </a:solidFill>
+                <a:latin typeface="Trebuchet MS" pitchFamily="34" charset="0"/>
+                <a:ea typeface="Trebuchet MS" pitchFamily="34" charset="-122"/>
+                <a:cs typeface="Trebuchet MS" pitchFamily="34" charset="-120"/>
+              </a:rPr>
+              <a:t>·</a:t>
+            </a:r>
+            <a:endParaRPr lang="en-US" sz="1600" dirty="0"/>
+          </a:p>
+        </p:txBody>
+      </p:sp>
+      <p:sp>
+        <p:nvSpPr>
+          <p:cNvPr id="37" name="Shape 35"/>
+          <p:cNvSpPr/>
+          <p:nvPr/>
+        </p:nvSpPr>
+        <p:spPr>
+          <a:xfrm>
+            <a:off x="5230368" y="3364992"/>
+            <a:ext cx="1554480" cy="475488"/>
+          </a:xfrm>
+          <a:prstGeom prst="rect">
+            <a:avLst>
+              <a:gd name="adj" fmla="val 9615"/>
+            </a:avLst>
+          </a:prstGeom>
+          <a:solidFill>
+            <a:srgbClr val="FFFFFF"/>
+          </a:solidFill>
+          <a:ln w="12700">
+            <a:solidFill>
+              <a:srgbClr val="0D9488"/>
+            </a:solidFill>
+            <a:prstDash val="solid"/>
+          </a:ln>
+        </p:spPr>
+      </p:sp>
+      <p:sp>
+        <p:nvSpPr>
+          <p:cNvPr id="38" name="Text 36"/>
+          <p:cNvSpPr/>
+          <p:nvPr/>
+        </p:nvSpPr>
+        <p:spPr>
+          <a:xfrm>
+            <a:off x="5230368" y="3364992"/>
+            <a:ext cx="1554480" cy="475488"/>
+          </a:xfrm>
+          <a:prstGeom prst="rect">
+            <a:avLst/>
+          </a:prstGeom>
+          <a:noFill/>
+          <a:ln/>
+        </p:spPr>
+        <p:txBody>
+          <a:bodyPr wrap="square" lIns="0" tIns="0" rIns="0" bIns="0" rtlCol="0" anchor="ctr"/>
+          <a:lstStyle/>
+          <a:p>
+            <a:pPr algn="ctr" indent="0" marL="0">
+              <a:buNone/>
+            </a:pPr>
+            <a:r>
+              <a:rPr lang="en-US" sz="1400" b="1" dirty="0">
+                <a:solidFill>
+                  <a:srgbClr val="0D9488"/>
+                </a:solidFill>
+                <a:latin typeface="Trebuchet MS" pitchFamily="34" charset="0"/>
+                <a:ea typeface="Trebuchet MS" pitchFamily="34" charset="-122"/>
+                <a:cs typeface="Trebuchet MS" pitchFamily="34" charset="-120"/>
+              </a:rPr>
+              <a:t>en</a:t>
+            </a:r>
+            <a:endParaRPr lang="en-US" sz="1400" dirty="0"/>
+          </a:p>
+        </p:txBody>
+      </p:sp>
+      <p:sp>
+        <p:nvSpPr>
+          <p:cNvPr id="39" name="Text 37"/>
+          <p:cNvSpPr/>
+          <p:nvPr/>
+        </p:nvSpPr>
+        <p:spPr>
+          <a:xfrm>
+            <a:off x="6784848" y="3364992"/>
+            <a:ext cx="73152" cy="475488"/>
+          </a:xfrm>
+          <a:prstGeom prst="rect">
+            <a:avLst/>
+          </a:prstGeom>
+          <a:noFill/>
+          <a:ln/>
+        </p:spPr>
+        <p:txBody>
+          <a:bodyPr wrap="square" lIns="0" tIns="0" rIns="0" bIns="0" rtlCol="0" anchor="ctr"/>
+          <a:lstStyle/>
+          <a:p>
+            <a:pPr algn="ctr" indent="0" marL="0">
+              <a:buNone/>
+            </a:pPr>
+            <a:r>
+              <a:rPr lang="en-US" sz="1600" b="1" dirty="0">
+                <a:solidFill>
+                  <a:srgbClr val="0D9488"/>
+                </a:solidFill>
+                <a:latin typeface="Trebuchet MS" pitchFamily="34" charset="0"/>
+                <a:ea typeface="Trebuchet MS" pitchFamily="34" charset="-122"/>
+                <a:cs typeface="Trebuchet MS" pitchFamily="34" charset="-120"/>
+              </a:rPr>
+              <a:t>·</a:t>
+            </a:r>
+            <a:endParaRPr lang="en-US" sz="1600" dirty="0"/>
+          </a:p>
+        </p:txBody>
+      </p:sp>
+      <p:sp>
+        <p:nvSpPr>
+          <p:cNvPr id="40" name="Shape 38"/>
+          <p:cNvSpPr/>
+          <p:nvPr/>
+        </p:nvSpPr>
+        <p:spPr>
+          <a:xfrm>
+            <a:off x="6858000" y="3364992"/>
+            <a:ext cx="1554480" cy="475488"/>
+          </a:xfrm>
+          <a:prstGeom prst="rect">
+            <a:avLst>
+              <a:gd name="adj" fmla="val 9615"/>
+            </a:avLst>
+          </a:prstGeom>
+          <a:solidFill>
+            <a:srgbClr val="FFFFFF"/>
+          </a:solidFill>
+          <a:ln w="12700">
+            <a:solidFill>
+              <a:srgbClr val="0D9488"/>
+            </a:solidFill>
+            <a:prstDash val="solid"/>
+          </a:ln>
+        </p:spPr>
+      </p:sp>
+      <p:sp>
+        <p:nvSpPr>
+          <p:cNvPr id="41" name="Text 39"/>
+          <p:cNvSpPr/>
+          <p:nvPr/>
+        </p:nvSpPr>
+        <p:spPr>
+          <a:xfrm>
+            <a:off x="6858000" y="3364992"/>
+            <a:ext cx="1554480" cy="475488"/>
+          </a:xfrm>
+          <a:prstGeom prst="rect">
+            <a:avLst/>
+          </a:prstGeom>
+          <a:noFill/>
+          <a:ln/>
+        </p:spPr>
+        <p:txBody>
+          <a:bodyPr wrap="square" lIns="0" tIns="0" rIns="0" bIns="0" rtlCol="0" anchor="ctr"/>
+          <a:lstStyle/>
+          <a:p>
+            <a:pPr algn="ctr" indent="0" marL="0">
+              <a:buNone/>
+            </a:pPr>
+            <a:r>
+              <a:rPr lang="en-US" sz="1400" b="1" dirty="0">
+                <a:solidFill>
+                  <a:srgbClr val="0D9488"/>
+                </a:solidFill>
+                <a:latin typeface="Trebuchet MS" pitchFamily="34" charset="0"/>
+                <a:ea typeface="Trebuchet MS" pitchFamily="34" charset="-122"/>
+                <a:cs typeface="Trebuchet MS" pitchFamily="34" charset="-120"/>
+              </a:rPr>
+              <a:t>ment</a:t>
+            </a:r>
+            <a:endParaRPr lang="en-US" sz="1400" dirty="0"/>
+          </a:p>
+        </p:txBody>
+      </p:sp>
+      <p:sp>
+        <p:nvSpPr>
+          <p:cNvPr id="42" name="Shape 40"/>
           <p:cNvSpPr/>
           <p:nvPr/>
         </p:nvSpPr>
@@ -27098,7 +28685,7 @@
       </p:sp>
       <p:sp>
         <p:nvSpPr>
-          <p:cNvPr id="31" name="Text 29"/>
+          <p:cNvPr id="43" name="Text 41"/>
           <p:cNvSpPr/>
           <p:nvPr/>
         </p:nvSpPr>
@@ -27137,18 +28724,18 @@
       </p:sp>
       <p:sp>
         <p:nvSpPr>
-          <p:cNvPr id="32" name="Shape 30"/>
+          <p:cNvPr id="44" name="Shape 42"/>
           <p:cNvSpPr/>
           <p:nvPr/>
         </p:nvSpPr>
         <p:spPr>
           <a:xfrm>
             <a:off x="1874520" y="4096512"/>
-            <a:ext cx="6903720" cy="804672"/>
+            <a:ext cx="6903720" cy="658368"/>
           </a:xfrm>
           <a:prstGeom prst="rect">
             <a:avLst>
-              <a:gd name="adj" fmla="val 6818"/>
+              <a:gd name="adj" fmla="val 8333"/>
             </a:avLst>
           </a:prstGeom>
           <a:solidFill>
@@ -27164,18 +28751,18 @@
       </p:sp>
       <p:sp>
         <p:nvSpPr>
-          <p:cNvPr id="33" name="Shape 31"/>
-          <p:cNvSpPr/>
-          <p:nvPr/>
-        </p:nvSpPr>
-        <p:spPr>
-          <a:xfrm>
-            <a:off x="2427732" y="4169664"/>
-            <a:ext cx="685800" cy="384048"/>
+          <p:cNvPr id="45" name="Shape 43"/>
+          <p:cNvSpPr/>
+          <p:nvPr/>
+        </p:nvSpPr>
+        <p:spPr>
+          <a:xfrm>
+            <a:off x="1952244" y="4169664"/>
+            <a:ext cx="543652" cy="475488"/>
           </a:xfrm>
           <a:prstGeom prst="rect">
             <a:avLst>
-              <a:gd name="adj" fmla="val 9524"/>
+              <a:gd name="adj" fmla="val 7692"/>
             </a:avLst>
           </a:prstGeom>
           <a:solidFill>
@@ -27191,14 +28778,14 @@
       </p:sp>
       <p:sp>
         <p:nvSpPr>
-          <p:cNvPr id="34" name="Text 32"/>
-          <p:cNvSpPr/>
-          <p:nvPr/>
-        </p:nvSpPr>
-        <p:spPr>
-          <a:xfrm>
-            <a:off x="2427732" y="4169664"/>
-            <a:ext cx="685800" cy="384048"/>
+          <p:cNvPr id="46" name="Text 44"/>
+          <p:cNvSpPr/>
+          <p:nvPr/>
+        </p:nvSpPr>
+        <p:spPr>
+          <a:xfrm>
+            <a:off x="1952244" y="4169664"/>
+            <a:ext cx="543652" cy="475488"/>
           </a:xfrm>
           <a:prstGeom prst="rect">
             <a:avLst/>
@@ -27222,7 +28809,7 @@
                 <a:ea typeface="Trebuchet MS" pitchFamily="34" charset="-122"/>
                 <a:cs typeface="Trebuchet MS" pitchFamily="34" charset="-120"/>
               </a:rPr>
-              <a:t>d</a:t>
+              <a:t>e</a:t>
             </a:r>
             <a:endParaRPr lang="en-US" sz="900" dirty="0"/>
           </a:p>
@@ -27230,18 +28817,18 @@
       </p:sp>
       <p:sp>
         <p:nvSpPr>
-          <p:cNvPr id="35" name="Shape 33"/>
-          <p:cNvSpPr/>
-          <p:nvPr/>
-        </p:nvSpPr>
-        <p:spPr>
-          <a:xfrm>
-            <a:off x="3639312" y="4169664"/>
-            <a:ext cx="685800" cy="384048"/>
+          <p:cNvPr id="47" name="Shape 45"/>
+          <p:cNvSpPr/>
+          <p:nvPr/>
+        </p:nvSpPr>
+        <p:spPr>
+          <a:xfrm>
+            <a:off x="2546188" y="4169664"/>
+            <a:ext cx="543652" cy="475488"/>
           </a:xfrm>
           <a:prstGeom prst="rect">
             <a:avLst>
-              <a:gd name="adj" fmla="val 9524"/>
+              <a:gd name="adj" fmla="val 7692"/>
             </a:avLst>
           </a:prstGeom>
           <a:solidFill>
@@ -27257,14 +28844,14 @@
       </p:sp>
       <p:sp>
         <p:nvSpPr>
-          <p:cNvPr id="36" name="Text 34"/>
-          <p:cNvSpPr/>
-          <p:nvPr/>
-        </p:nvSpPr>
-        <p:spPr>
-          <a:xfrm>
-            <a:off x="3639312" y="4169664"/>
-            <a:ext cx="685800" cy="384048"/>
+          <p:cNvPr id="48" name="Text 46"/>
+          <p:cNvSpPr/>
+          <p:nvPr/>
+        </p:nvSpPr>
+        <p:spPr>
+          <a:xfrm>
+            <a:off x="2546188" y="4169664"/>
+            <a:ext cx="543652" cy="475488"/>
           </a:xfrm>
           <a:prstGeom prst="rect">
             <a:avLst/>
@@ -27288,7 +28875,7 @@
                 <a:ea typeface="Trebuchet MS" pitchFamily="34" charset="-122"/>
                 <a:cs typeface="Trebuchet MS" pitchFamily="34" charset="-120"/>
               </a:rPr>
-              <a:t>e</a:t>
+              <a:t>n</a:t>
             </a:r>
             <a:endParaRPr lang="en-US" sz="900" dirty="0"/>
           </a:p>
@@ -27296,18 +28883,18 @@
       </p:sp>
       <p:sp>
         <p:nvSpPr>
-          <p:cNvPr id="37" name="Shape 35"/>
-          <p:cNvSpPr/>
-          <p:nvPr/>
-        </p:nvSpPr>
-        <p:spPr>
-          <a:xfrm>
-            <a:off x="4850892" y="4169664"/>
-            <a:ext cx="685800" cy="384048"/>
+          <p:cNvPr id="49" name="Shape 47"/>
+          <p:cNvSpPr/>
+          <p:nvPr/>
+        </p:nvSpPr>
+        <p:spPr>
+          <a:xfrm>
+            <a:off x="3140133" y="4169664"/>
+            <a:ext cx="543652" cy="475488"/>
           </a:xfrm>
           <a:prstGeom prst="rect">
             <a:avLst>
-              <a:gd name="adj" fmla="val 9524"/>
+              <a:gd name="adj" fmla="val 7692"/>
             </a:avLst>
           </a:prstGeom>
           <a:solidFill>
@@ -27323,14 +28910,14 @@
       </p:sp>
       <p:sp>
         <p:nvSpPr>
-          <p:cNvPr id="38" name="Text 36"/>
-          <p:cNvSpPr/>
-          <p:nvPr/>
-        </p:nvSpPr>
-        <p:spPr>
-          <a:xfrm>
-            <a:off x="4850892" y="4169664"/>
-            <a:ext cx="685800" cy="384048"/>
+          <p:cNvPr id="50" name="Text 48"/>
+          <p:cNvSpPr/>
+          <p:nvPr/>
+        </p:nvSpPr>
+        <p:spPr>
+          <a:xfrm>
+            <a:off x="3140133" y="4169664"/>
+            <a:ext cx="543652" cy="475488"/>
           </a:xfrm>
           <a:prstGeom prst="rect">
             <a:avLst/>
@@ -27362,18 +28949,18 @@
       </p:sp>
       <p:sp>
         <p:nvSpPr>
-          <p:cNvPr id="39" name="Shape 37"/>
-          <p:cNvSpPr/>
-          <p:nvPr/>
-        </p:nvSpPr>
-        <p:spPr>
-          <a:xfrm>
-            <a:off x="6062472" y="4169664"/>
-            <a:ext cx="685800" cy="384048"/>
+          <p:cNvPr id="51" name="Shape 49"/>
+          <p:cNvSpPr/>
+          <p:nvPr/>
+        </p:nvSpPr>
+        <p:spPr>
+          <a:xfrm>
+            <a:off x="3734077" y="4169664"/>
+            <a:ext cx="543652" cy="475488"/>
           </a:xfrm>
           <a:prstGeom prst="rect">
             <a:avLst>
-              <a:gd name="adj" fmla="val 9524"/>
+              <a:gd name="adj" fmla="val 7692"/>
             </a:avLst>
           </a:prstGeom>
           <a:solidFill>
@@ -27389,14 +28976,14 @@
       </p:sp>
       <p:sp>
         <p:nvSpPr>
-          <p:cNvPr id="40" name="Text 38"/>
-          <p:cNvSpPr/>
-          <p:nvPr/>
-        </p:nvSpPr>
-        <p:spPr>
-          <a:xfrm>
-            <a:off x="6062472" y="4169664"/>
-            <a:ext cx="685800" cy="384048"/>
+          <p:cNvPr id="52" name="Text 50"/>
+          <p:cNvSpPr/>
+          <p:nvPr/>
+        </p:nvSpPr>
+        <p:spPr>
+          <a:xfrm>
+            <a:off x="3734077" y="4169664"/>
+            <a:ext cx="543652" cy="475488"/>
           </a:xfrm>
           <a:prstGeom prst="rect">
             <a:avLst/>
@@ -27428,57 +29015,18 @@
       </p:sp>
       <p:sp>
         <p:nvSpPr>
-          <p:cNvPr id="41" name="Text 39"/>
-          <p:cNvSpPr/>
-          <p:nvPr/>
-        </p:nvSpPr>
-        <p:spPr>
-          <a:xfrm>
-            <a:off x="6062472" y="4572000"/>
-            <a:ext cx="685800" cy="219456"/>
-          </a:xfrm>
-          <a:prstGeom prst="rect">
-            <a:avLst/>
-          </a:prstGeom>
-          <a:noFill/>
-          <a:ln/>
-        </p:spPr>
-        <p:txBody>
-          <a:bodyPr wrap="square" lIns="0" tIns="0" rIns="0" bIns="0" rtlCol="0" anchor="t"/>
-          <a:lstStyle/>
-          <a:p>
-            <a:pPr algn="ctr" indent="0" marL="0">
-              <a:buNone/>
-            </a:pPr>
-            <a:r>
-              <a:rPr lang="en-US" sz="750" i="1" dirty="0">
-                <a:solidFill>
-                  <a:srgbClr val="94A3B8"/>
-                </a:solidFill>
-                <a:latin typeface="Calibri" pitchFamily="34" charset="0"/>
-                <a:ea typeface="Calibri" pitchFamily="34" charset="-122"/>
-                <a:cs typeface="Calibri" pitchFamily="34" charset="-120"/>
-              </a:rPr>
-              <a:t>/igh/</a:t>
-            </a:r>
-            <a:endParaRPr lang="en-US" sz="750" dirty="0"/>
-          </a:p>
-        </p:txBody>
-      </p:sp>
-      <p:sp>
-        <p:nvSpPr>
-          <p:cNvPr id="42" name="Shape 40"/>
-          <p:cNvSpPr/>
-          <p:nvPr/>
-        </p:nvSpPr>
-        <p:spPr>
-          <a:xfrm>
-            <a:off x="7274052" y="4169664"/>
-            <a:ext cx="685800" cy="384048"/>
+          <p:cNvPr id="53" name="Shape 51"/>
+          <p:cNvSpPr/>
+          <p:nvPr/>
+        </p:nvSpPr>
+        <p:spPr>
+          <a:xfrm>
+            <a:off x="4328021" y="4169664"/>
+            <a:ext cx="543652" cy="475488"/>
           </a:xfrm>
           <a:prstGeom prst="rect">
             <a:avLst>
-              <a:gd name="adj" fmla="val 9524"/>
+              <a:gd name="adj" fmla="val 7692"/>
             </a:avLst>
           </a:prstGeom>
           <a:solidFill>
@@ -27494,14 +29042,410 @@
       </p:sp>
       <p:sp>
         <p:nvSpPr>
-          <p:cNvPr id="43" name="Text 41"/>
-          <p:cNvSpPr/>
-          <p:nvPr/>
-        </p:nvSpPr>
-        <p:spPr>
-          <a:xfrm>
-            <a:off x="7274052" y="4169664"/>
-            <a:ext cx="685800" cy="384048"/>
+          <p:cNvPr id="54" name="Text 52"/>
+          <p:cNvSpPr/>
+          <p:nvPr/>
+        </p:nvSpPr>
+        <p:spPr>
+          <a:xfrm>
+            <a:off x="4328021" y="4169664"/>
+            <a:ext cx="543652" cy="475488"/>
+          </a:xfrm>
+          <a:prstGeom prst="rect">
+            <a:avLst/>
+          </a:prstGeom>
+          <a:noFill/>
+          <a:ln/>
+        </p:spPr>
+        <p:txBody>
+          <a:bodyPr wrap="square" lIns="0" tIns="0" rIns="0" bIns="0" rtlCol="0" anchor="ctr"/>
+          <a:lstStyle/>
+          <a:p>
+            <a:pPr algn="ctr" indent="0" marL="0">
+              <a:buNone/>
+            </a:pPr>
+            <a:r>
+              <a:rPr lang="en-US" sz="900" b="1" dirty="0">
+                <a:solidFill>
+                  <a:srgbClr val="9D174D"/>
+                </a:solidFill>
+                <a:latin typeface="Trebuchet MS" pitchFamily="34" charset="0"/>
+                <a:ea typeface="Trebuchet MS" pitchFamily="34" charset="-122"/>
+                <a:cs typeface="Trebuchet MS" pitchFamily="34" charset="-120"/>
+              </a:rPr>
+              <a:t>t</a:t>
+            </a:r>
+            <a:endParaRPr lang="en-US" sz="900" dirty="0"/>
+          </a:p>
+        </p:txBody>
+      </p:sp>
+      <p:sp>
+        <p:nvSpPr>
+          <p:cNvPr id="55" name="Shape 53"/>
+          <p:cNvSpPr/>
+          <p:nvPr/>
+        </p:nvSpPr>
+        <p:spPr>
+          <a:xfrm>
+            <a:off x="4921966" y="4169664"/>
+            <a:ext cx="543652" cy="475488"/>
+          </a:xfrm>
+          <a:prstGeom prst="rect">
+            <a:avLst>
+              <a:gd name="adj" fmla="val 7692"/>
+            </a:avLst>
+          </a:prstGeom>
+          <a:solidFill>
+            <a:srgbClr val="FFFFFF"/>
+          </a:solidFill>
+          <a:ln w="12700">
+            <a:solidFill>
+              <a:srgbClr val="DB2777"/>
+            </a:solidFill>
+            <a:prstDash val="solid"/>
+          </a:ln>
+        </p:spPr>
+      </p:sp>
+      <p:sp>
+        <p:nvSpPr>
+          <p:cNvPr id="56" name="Text 54"/>
+          <p:cNvSpPr/>
+          <p:nvPr/>
+        </p:nvSpPr>
+        <p:spPr>
+          <a:xfrm>
+            <a:off x="4921966" y="4169664"/>
+            <a:ext cx="543652" cy="475488"/>
+          </a:xfrm>
+          <a:prstGeom prst="rect">
+            <a:avLst/>
+          </a:prstGeom>
+          <a:noFill/>
+          <a:ln/>
+        </p:spPr>
+        <p:txBody>
+          <a:bodyPr wrap="square" lIns="0" tIns="0" rIns="0" bIns="0" rtlCol="0" anchor="ctr"/>
+          <a:lstStyle/>
+          <a:p>
+            <a:pPr algn="ctr" indent="0" marL="0">
+              <a:buNone/>
+            </a:pPr>
+            <a:r>
+              <a:rPr lang="en-US" sz="900" b="1" dirty="0">
+                <a:solidFill>
+                  <a:srgbClr val="9D174D"/>
+                </a:solidFill>
+                <a:latin typeface="Trebuchet MS" pitchFamily="34" charset="0"/>
+                <a:ea typeface="Trebuchet MS" pitchFamily="34" charset="-122"/>
+                <a:cs typeface="Trebuchet MS" pitchFamily="34" charset="-120"/>
+              </a:rPr>
+              <a:t>e</a:t>
+            </a:r>
+            <a:endParaRPr lang="en-US" sz="900" dirty="0"/>
+          </a:p>
+        </p:txBody>
+      </p:sp>
+      <p:sp>
+        <p:nvSpPr>
+          <p:cNvPr id="57" name="Shape 55"/>
+          <p:cNvSpPr/>
+          <p:nvPr/>
+        </p:nvSpPr>
+        <p:spPr>
+          <a:xfrm>
+            <a:off x="5515910" y="4169664"/>
+            <a:ext cx="543652" cy="475488"/>
+          </a:xfrm>
+          <a:prstGeom prst="rect">
+            <a:avLst>
+              <a:gd name="adj" fmla="val 7692"/>
+            </a:avLst>
+          </a:prstGeom>
+          <a:solidFill>
+            <a:srgbClr val="FFFFFF"/>
+          </a:solidFill>
+          <a:ln w="12700">
+            <a:solidFill>
+              <a:srgbClr val="DB2777"/>
+            </a:solidFill>
+            <a:prstDash val="solid"/>
+          </a:ln>
+        </p:spPr>
+      </p:sp>
+      <p:sp>
+        <p:nvSpPr>
+          <p:cNvPr id="58" name="Text 56"/>
+          <p:cNvSpPr/>
+          <p:nvPr/>
+        </p:nvSpPr>
+        <p:spPr>
+          <a:xfrm>
+            <a:off x="5515910" y="4169664"/>
+            <a:ext cx="543652" cy="475488"/>
+          </a:xfrm>
+          <a:prstGeom prst="rect">
+            <a:avLst/>
+          </a:prstGeom>
+          <a:noFill/>
+          <a:ln/>
+        </p:spPr>
+        <p:txBody>
+          <a:bodyPr wrap="square" lIns="0" tIns="0" rIns="0" bIns="0" rtlCol="0" anchor="ctr"/>
+          <a:lstStyle/>
+          <a:p>
+            <a:pPr algn="ctr" indent="0" marL="0">
+              <a:buNone/>
+            </a:pPr>
+            <a:r>
+              <a:rPr lang="en-US" sz="900" b="1" dirty="0">
+                <a:solidFill>
+                  <a:srgbClr val="9D174D"/>
+                </a:solidFill>
+                <a:latin typeface="Trebuchet MS" pitchFamily="34" charset="0"/>
+                <a:ea typeface="Trebuchet MS" pitchFamily="34" charset="-122"/>
+                <a:cs typeface="Trebuchet MS" pitchFamily="34" charset="-120"/>
+              </a:rPr>
+              <a:t>n</a:t>
+            </a:r>
+            <a:endParaRPr lang="en-US" sz="900" dirty="0"/>
+          </a:p>
+        </p:txBody>
+      </p:sp>
+      <p:sp>
+        <p:nvSpPr>
+          <p:cNvPr id="59" name="Shape 57"/>
+          <p:cNvSpPr/>
+          <p:nvPr/>
+        </p:nvSpPr>
+        <p:spPr>
+          <a:xfrm>
+            <a:off x="6109855" y="4169664"/>
+            <a:ext cx="543652" cy="475488"/>
+          </a:xfrm>
+          <a:prstGeom prst="rect">
+            <a:avLst>
+              <a:gd name="adj" fmla="val 7692"/>
+            </a:avLst>
+          </a:prstGeom>
+          <a:solidFill>
+            <a:srgbClr val="FFFFFF"/>
+          </a:solidFill>
+          <a:ln w="12700">
+            <a:solidFill>
+              <a:srgbClr val="DB2777"/>
+            </a:solidFill>
+            <a:prstDash val="solid"/>
+          </a:ln>
+        </p:spPr>
+      </p:sp>
+      <p:sp>
+        <p:nvSpPr>
+          <p:cNvPr id="60" name="Text 58"/>
+          <p:cNvSpPr/>
+          <p:nvPr/>
+        </p:nvSpPr>
+        <p:spPr>
+          <a:xfrm>
+            <a:off x="6109855" y="4169664"/>
+            <a:ext cx="543652" cy="475488"/>
+          </a:xfrm>
+          <a:prstGeom prst="rect">
+            <a:avLst/>
+          </a:prstGeom>
+          <a:noFill/>
+          <a:ln/>
+        </p:spPr>
+        <p:txBody>
+          <a:bodyPr wrap="square" lIns="0" tIns="0" rIns="0" bIns="0" rtlCol="0" anchor="ctr"/>
+          <a:lstStyle/>
+          <a:p>
+            <a:pPr algn="ctr" indent="0" marL="0">
+              <a:buNone/>
+            </a:pPr>
+            <a:r>
+              <a:rPr lang="en-US" sz="900" b="1" dirty="0">
+                <a:solidFill>
+                  <a:srgbClr val="9D174D"/>
+                </a:solidFill>
+                <a:latin typeface="Trebuchet MS" pitchFamily="34" charset="0"/>
+                <a:ea typeface="Trebuchet MS" pitchFamily="34" charset="-122"/>
+                <a:cs typeface="Trebuchet MS" pitchFamily="34" charset="-120"/>
+              </a:rPr>
+              <a:t>m</a:t>
+            </a:r>
+            <a:endParaRPr lang="en-US" sz="900" dirty="0"/>
+          </a:p>
+        </p:txBody>
+      </p:sp>
+      <p:sp>
+        <p:nvSpPr>
+          <p:cNvPr id="61" name="Shape 59"/>
+          <p:cNvSpPr/>
+          <p:nvPr/>
+        </p:nvSpPr>
+        <p:spPr>
+          <a:xfrm>
+            <a:off x="6703799" y="4169664"/>
+            <a:ext cx="543652" cy="475488"/>
+          </a:xfrm>
+          <a:prstGeom prst="rect">
+            <a:avLst>
+              <a:gd name="adj" fmla="val 7692"/>
+            </a:avLst>
+          </a:prstGeom>
+          <a:solidFill>
+            <a:srgbClr val="FFFFFF"/>
+          </a:solidFill>
+          <a:ln w="12700">
+            <a:solidFill>
+              <a:srgbClr val="DB2777"/>
+            </a:solidFill>
+            <a:prstDash val="solid"/>
+          </a:ln>
+        </p:spPr>
+      </p:sp>
+      <p:sp>
+        <p:nvSpPr>
+          <p:cNvPr id="62" name="Text 60"/>
+          <p:cNvSpPr/>
+          <p:nvPr/>
+        </p:nvSpPr>
+        <p:spPr>
+          <a:xfrm>
+            <a:off x="6703799" y="4169664"/>
+            <a:ext cx="543652" cy="475488"/>
+          </a:xfrm>
+          <a:prstGeom prst="rect">
+            <a:avLst/>
+          </a:prstGeom>
+          <a:noFill/>
+          <a:ln/>
+        </p:spPr>
+        <p:txBody>
+          <a:bodyPr wrap="square" lIns="0" tIns="0" rIns="0" bIns="0" rtlCol="0" anchor="ctr"/>
+          <a:lstStyle/>
+          <a:p>
+            <a:pPr algn="ctr" indent="0" marL="0">
+              <a:buNone/>
+            </a:pPr>
+            <a:r>
+              <a:rPr lang="en-US" sz="900" b="1" dirty="0">
+                <a:solidFill>
+                  <a:srgbClr val="9D174D"/>
+                </a:solidFill>
+                <a:latin typeface="Trebuchet MS" pitchFamily="34" charset="0"/>
+                <a:ea typeface="Trebuchet MS" pitchFamily="34" charset="-122"/>
+                <a:cs typeface="Trebuchet MS" pitchFamily="34" charset="-120"/>
+              </a:rPr>
+              <a:t>e</a:t>
+            </a:r>
+            <a:endParaRPr lang="en-US" sz="900" dirty="0"/>
+          </a:p>
+        </p:txBody>
+      </p:sp>
+      <p:sp>
+        <p:nvSpPr>
+          <p:cNvPr id="63" name="Shape 61"/>
+          <p:cNvSpPr/>
+          <p:nvPr/>
+        </p:nvSpPr>
+        <p:spPr>
+          <a:xfrm>
+            <a:off x="7297743" y="4169664"/>
+            <a:ext cx="543652" cy="475488"/>
+          </a:xfrm>
+          <a:prstGeom prst="rect">
+            <a:avLst>
+              <a:gd name="adj" fmla="val 7692"/>
+            </a:avLst>
+          </a:prstGeom>
+          <a:solidFill>
+            <a:srgbClr val="FFFFFF"/>
+          </a:solidFill>
+          <a:ln w="12700">
+            <a:solidFill>
+              <a:srgbClr val="DB2777"/>
+            </a:solidFill>
+            <a:prstDash val="solid"/>
+          </a:ln>
+        </p:spPr>
+      </p:sp>
+      <p:sp>
+        <p:nvSpPr>
+          <p:cNvPr id="64" name="Text 62"/>
+          <p:cNvSpPr/>
+          <p:nvPr/>
+        </p:nvSpPr>
+        <p:spPr>
+          <a:xfrm>
+            <a:off x="7297743" y="4169664"/>
+            <a:ext cx="543652" cy="475488"/>
+          </a:xfrm>
+          <a:prstGeom prst="rect">
+            <a:avLst/>
+          </a:prstGeom>
+          <a:noFill/>
+          <a:ln/>
+        </p:spPr>
+        <p:txBody>
+          <a:bodyPr wrap="square" lIns="0" tIns="0" rIns="0" bIns="0" rtlCol="0" anchor="ctr"/>
+          <a:lstStyle/>
+          <a:p>
+            <a:pPr algn="ctr" indent="0" marL="0">
+              <a:buNone/>
+            </a:pPr>
+            <a:r>
+              <a:rPr lang="en-US" sz="900" b="1" dirty="0">
+                <a:solidFill>
+                  <a:srgbClr val="9D174D"/>
+                </a:solidFill>
+                <a:latin typeface="Trebuchet MS" pitchFamily="34" charset="0"/>
+                <a:ea typeface="Trebuchet MS" pitchFamily="34" charset="-122"/>
+                <a:cs typeface="Trebuchet MS" pitchFamily="34" charset="-120"/>
+              </a:rPr>
+              <a:t>n</a:t>
+            </a:r>
+            <a:endParaRPr lang="en-US" sz="900" dirty="0"/>
+          </a:p>
+        </p:txBody>
+      </p:sp>
+      <p:sp>
+        <p:nvSpPr>
+          <p:cNvPr id="65" name="Shape 63"/>
+          <p:cNvSpPr/>
+          <p:nvPr/>
+        </p:nvSpPr>
+        <p:spPr>
+          <a:xfrm>
+            <a:off x="7891688" y="4169664"/>
+            <a:ext cx="543652" cy="475488"/>
+          </a:xfrm>
+          <a:prstGeom prst="rect">
+            <a:avLst>
+              <a:gd name="adj" fmla="val 7692"/>
+            </a:avLst>
+          </a:prstGeom>
+          <a:solidFill>
+            <a:srgbClr val="FFFFFF"/>
+          </a:solidFill>
+          <a:ln w="12700">
+            <a:solidFill>
+              <a:srgbClr val="DB2777"/>
+            </a:solidFill>
+            <a:prstDash val="solid"/>
+          </a:ln>
+        </p:spPr>
+      </p:sp>
+      <p:sp>
+        <p:nvSpPr>
+          <p:cNvPr id="66" name="Text 64"/>
+          <p:cNvSpPr/>
+          <p:nvPr/>
+        </p:nvSpPr>
+        <p:spPr>
+          <a:xfrm>
+            <a:off x="7891688" y="4169664"/>
+            <a:ext cx="543652" cy="475488"/>
           </a:xfrm>
           <a:prstGeom prst="rect">
             <a:avLst/>
@@ -27817,7 +29761,7 @@
                 <a:ea typeface="Calibri" pitchFamily="34" charset="-122"/>
                 <a:cs typeface="Calibri" pitchFamily="34" charset="-120"/>
               </a:rPr>
-              <a:t>Word Labs  •  wordlabs.app  •  Root: 'light' = brightness, illumination, not heavy</a:t>
+              <a:t>Word Labs  •  wordlabs.app  •  Root: 'light' = brightness; not heavy</a:t>
             </a:r>
             <a:endParaRPr lang="en-US" sz="800" dirty="0"/>
           </a:p>
@@ -27956,7 +29900,7 @@
                 <a:ea typeface="Trebuchet MS" pitchFamily="34" charset="-122"/>
                 <a:cs typeface="Trebuchet MS" pitchFamily="34" charset="-120"/>
               </a:rPr>
-              <a:t>spotlight</a:t>
+              <a:t>ultralight</a:t>
             </a:r>
             <a:endParaRPr lang="en-US" sz="2800" dirty="0"/>
           </a:p>
@@ -28644,7 +30588,7 @@
                 <a:ea typeface="Calibri" pitchFamily="34" charset="-122"/>
                 <a:cs typeface="Calibri" pitchFamily="34" charset="-120"/>
               </a:rPr>
-              <a:t>Word Labs  •  wordlabs.app  •  Root: 'light' = brightness, illumination, not heavy</a:t>
+              <a:t>Word Labs  •  wordlabs.app  •  Root: 'light' = brightness; not heavy</a:t>
             </a:r>
             <a:endParaRPr lang="en-US" sz="800" dirty="0"/>
           </a:p>
@@ -28783,7 +30727,7 @@
                 <a:ea typeface="Trebuchet MS" pitchFamily="34" charset="-122"/>
                 <a:cs typeface="Trebuchet MS" pitchFamily="34" charset="-120"/>
               </a:rPr>
-              <a:t>spotlight</a:t>
+              <a:t>ultralight</a:t>
             </a:r>
             <a:endParaRPr lang="en-US" sz="2800" dirty="0"/>
           </a:p>
@@ -28922,7 +30866,7 @@
                 <a:ea typeface="Trebuchet MS" pitchFamily="34" charset="-122"/>
                 <a:cs typeface="Trebuchet MS" pitchFamily="34" charset="-120"/>
               </a:rPr>
-              <a:t>spot</a:t>
+              <a:t>ultra</a:t>
             </a:r>
             <a:endParaRPr lang="en-US" sz="1300" dirty="0"/>
           </a:p>
@@ -28961,7 +30905,7 @@
                 <a:ea typeface="Calibri" pitchFamily="34" charset="-122"/>
                 <a:cs typeface="Calibri" pitchFamily="34" charset="-120"/>
               </a:rPr>
-              <a:t>a particular place or point</a:t>
+              <a:t>beyond; extreme</a:t>
             </a:r>
             <a:endParaRPr lang="en-US" sz="850" dirty="0"/>
           </a:p>
@@ -29073,7 +31017,7 @@
                 <a:ea typeface="Calibri" pitchFamily="34" charset="-122"/>
                 <a:cs typeface="Calibri" pitchFamily="34" charset="-120"/>
               </a:rPr>
-              <a:t>brightness, illumination</a:t>
+              <a:t>brightness; not heavy</a:t>
             </a:r>
             <a:endParaRPr lang="en-US" sz="850" dirty="0"/>
           </a:p>
@@ -29629,7 +31573,7 @@
                 <a:ea typeface="Calibri" pitchFamily="34" charset="-122"/>
                 <a:cs typeface="Calibri" pitchFamily="34" charset="-120"/>
               </a:rPr>
-              <a:t>Word Labs  •  wordlabs.app  •  Root: 'light' = brightness, illumination, not heavy</a:t>
+              <a:t>Word Labs  •  wordlabs.app  •  Root: 'light' = brightness; not heavy</a:t>
             </a:r>
             <a:endParaRPr lang="en-US" sz="800" dirty="0"/>
           </a:p>
@@ -29768,7 +31712,7 @@
                 <a:ea typeface="Trebuchet MS" pitchFamily="34" charset="-122"/>
                 <a:cs typeface="Trebuchet MS" pitchFamily="34" charset="-120"/>
               </a:rPr>
-              <a:t>spotlight</a:t>
+              <a:t>ultralight</a:t>
             </a:r>
             <a:endParaRPr lang="en-US" sz="2800" dirty="0"/>
           </a:p>
@@ -29907,7 +31851,7 @@
                 <a:ea typeface="Trebuchet MS" pitchFamily="34" charset="-122"/>
                 <a:cs typeface="Trebuchet MS" pitchFamily="34" charset="-120"/>
               </a:rPr>
-              <a:t>spot</a:t>
+              <a:t>ultra</a:t>
             </a:r>
             <a:endParaRPr lang="en-US" sz="1300" dirty="0"/>
           </a:p>
@@ -29946,7 +31890,7 @@
                 <a:ea typeface="Calibri" pitchFamily="34" charset="-122"/>
                 <a:cs typeface="Calibri" pitchFamily="34" charset="-120"/>
               </a:rPr>
-              <a:t>a particular place or point</a:t>
+              <a:t>beyond; extreme</a:t>
             </a:r>
             <a:endParaRPr lang="en-US" sz="850" dirty="0"/>
           </a:p>
@@ -30058,7 +32002,7 @@
                 <a:ea typeface="Calibri" pitchFamily="34" charset="-122"/>
                 <a:cs typeface="Calibri" pitchFamily="34" charset="-120"/>
               </a:rPr>
-              <a:t>brightness, illumination</a:t>
+              <a:t>brightness; not heavy</a:t>
             </a:r>
             <a:endParaRPr lang="en-US" sz="850" dirty="0"/>
           </a:p>
@@ -30165,7 +32109,7 @@
         </p:nvSpPr>
         <p:spPr>
           <a:xfrm>
-            <a:off x="2999232" y="3364992"/>
+            <a:off x="2313432" y="3364992"/>
             <a:ext cx="1645920" cy="475488"/>
           </a:xfrm>
           <a:prstGeom prst="rect">
@@ -30192,7 +32136,7 @@
         </p:nvSpPr>
         <p:spPr>
           <a:xfrm>
-            <a:off x="2999232" y="3364992"/>
+            <a:off x="2313432" y="3364992"/>
             <a:ext cx="1645920" cy="475488"/>
           </a:xfrm>
           <a:prstGeom prst="rect">
@@ -30217,7 +32161,7 @@
                 <a:ea typeface="Trebuchet MS" pitchFamily="34" charset="-122"/>
                 <a:cs typeface="Trebuchet MS" pitchFamily="34" charset="-120"/>
               </a:rPr>
-              <a:t>spot</a:t>
+              <a:t>ul</a:t>
             </a:r>
             <a:endParaRPr lang="en-US" sz="1400" dirty="0"/>
           </a:p>
@@ -30231,8 +32175,8 @@
         </p:nvSpPr>
         <p:spPr>
           <a:xfrm>
-            <a:off x="4645152" y="3364992"/>
-            <a:ext cx="1097280" cy="475488"/>
+            <a:off x="3959352" y="3364992"/>
+            <a:ext cx="411480" cy="475488"/>
           </a:xfrm>
           <a:prstGeom prst="rect">
             <a:avLst/>
@@ -30270,7 +32214,7 @@
         </p:nvSpPr>
         <p:spPr>
           <a:xfrm>
-            <a:off x="5742432" y="3364992"/>
+            <a:off x="4370832" y="3364992"/>
             <a:ext cx="1645920" cy="475488"/>
           </a:xfrm>
           <a:prstGeom prst="rect">
@@ -30297,7 +32241,7 @@
         </p:nvSpPr>
         <p:spPr>
           <a:xfrm>
-            <a:off x="5742432" y="3364992"/>
+            <a:off x="4370832" y="3364992"/>
             <a:ext cx="1645920" cy="475488"/>
           </a:xfrm>
           <a:prstGeom prst="rect">
@@ -30322,6 +32266,111 @@
                 <a:ea typeface="Trebuchet MS" pitchFamily="34" charset="-122"/>
                 <a:cs typeface="Trebuchet MS" pitchFamily="34" charset="-120"/>
               </a:rPr>
+              <a:t>tra</a:t>
+            </a:r>
+            <a:endParaRPr lang="en-US" sz="1400" dirty="0"/>
+          </a:p>
+        </p:txBody>
+      </p:sp>
+      <p:sp>
+        <p:nvSpPr>
+          <p:cNvPr id="30" name="Text 28"/>
+          <p:cNvSpPr/>
+          <p:nvPr/>
+        </p:nvSpPr>
+        <p:spPr>
+          <a:xfrm>
+            <a:off x="6016752" y="3364992"/>
+            <a:ext cx="411480" cy="475488"/>
+          </a:xfrm>
+          <a:prstGeom prst="rect">
+            <a:avLst/>
+          </a:prstGeom>
+          <a:noFill/>
+          <a:ln/>
+        </p:spPr>
+        <p:txBody>
+          <a:bodyPr wrap="square" lIns="0" tIns="0" rIns="0" bIns="0" rtlCol="0" anchor="ctr"/>
+          <a:lstStyle/>
+          <a:p>
+            <a:pPr algn="ctr" indent="0" marL="0">
+              <a:buNone/>
+            </a:pPr>
+            <a:r>
+              <a:rPr lang="en-US" sz="1600" b="1" dirty="0">
+                <a:solidFill>
+                  <a:srgbClr val="0D9488"/>
+                </a:solidFill>
+                <a:latin typeface="Trebuchet MS" pitchFamily="34" charset="0"/>
+                <a:ea typeface="Trebuchet MS" pitchFamily="34" charset="-122"/>
+                <a:cs typeface="Trebuchet MS" pitchFamily="34" charset="-120"/>
+              </a:rPr>
+              <a:t>·</a:t>
+            </a:r>
+            <a:endParaRPr lang="en-US" sz="1600" dirty="0"/>
+          </a:p>
+        </p:txBody>
+      </p:sp>
+      <p:sp>
+        <p:nvSpPr>
+          <p:cNvPr id="31" name="Shape 29"/>
+          <p:cNvSpPr/>
+          <p:nvPr/>
+        </p:nvSpPr>
+        <p:spPr>
+          <a:xfrm>
+            <a:off x="6428232" y="3364992"/>
+            <a:ext cx="1645920" cy="475488"/>
+          </a:xfrm>
+          <a:prstGeom prst="rect">
+            <a:avLst>
+              <a:gd name="adj" fmla="val 9615"/>
+            </a:avLst>
+          </a:prstGeom>
+          <a:solidFill>
+            <a:srgbClr val="FFFFFF"/>
+          </a:solidFill>
+          <a:ln w="12700">
+            <a:solidFill>
+              <a:srgbClr val="0D9488"/>
+            </a:solidFill>
+            <a:prstDash val="solid"/>
+          </a:ln>
+        </p:spPr>
+      </p:sp>
+      <p:sp>
+        <p:nvSpPr>
+          <p:cNvPr id="32" name="Text 30"/>
+          <p:cNvSpPr/>
+          <p:nvPr/>
+        </p:nvSpPr>
+        <p:spPr>
+          <a:xfrm>
+            <a:off x="6428232" y="3364992"/>
+            <a:ext cx="1645920" cy="475488"/>
+          </a:xfrm>
+          <a:prstGeom prst="rect">
+            <a:avLst/>
+          </a:prstGeom>
+          <a:noFill/>
+          <a:ln/>
+        </p:spPr>
+        <p:txBody>
+          <a:bodyPr wrap="square" lIns="0" tIns="0" rIns="0" bIns="0" rtlCol="0" anchor="ctr"/>
+          <a:lstStyle/>
+          <a:p>
+            <a:pPr algn="ctr" indent="0" marL="0">
+              <a:buNone/>
+            </a:pPr>
+            <a:r>
+              <a:rPr lang="en-US" sz="1400" b="1" dirty="0">
+                <a:solidFill>
+                  <a:srgbClr val="0D9488"/>
+                </a:solidFill>
+                <a:latin typeface="Trebuchet MS" pitchFamily="34" charset="0"/>
+                <a:ea typeface="Trebuchet MS" pitchFamily="34" charset="-122"/>
+                <a:cs typeface="Trebuchet MS" pitchFamily="34" charset="-120"/>
+              </a:rPr>
               <a:t>light</a:t>
             </a:r>
             <a:endParaRPr lang="en-US" sz="1400" dirty="0"/>
@@ -30330,7 +32379,7 @@
       </p:sp>
       <p:sp>
         <p:nvSpPr>
-          <p:cNvPr id="30" name="Shape 28"/>
+          <p:cNvPr id="33" name="Shape 31"/>
           <p:cNvSpPr/>
           <p:nvPr/>
         </p:nvSpPr>
@@ -30357,7 +32406,7 @@
       </p:sp>
       <p:sp>
         <p:nvSpPr>
-          <p:cNvPr id="31" name="Text 29"/>
+          <p:cNvPr id="34" name="Text 32"/>
           <p:cNvSpPr/>
           <p:nvPr/>
         </p:nvSpPr>
@@ -30396,7 +32445,7 @@
       </p:sp>
       <p:sp>
         <p:nvSpPr>
-          <p:cNvPr id="32" name="Shape 30"/>
+          <p:cNvPr id="35" name="Shape 33"/>
           <p:cNvSpPr/>
           <p:nvPr/>
         </p:nvSpPr>
@@ -30423,7 +32472,7 @@
       </p:sp>
       <p:sp>
         <p:nvSpPr>
-          <p:cNvPr id="33" name="Text 31"/>
+          <p:cNvPr id="36" name="Text 34"/>
           <p:cNvSpPr/>
           <p:nvPr/>
         </p:nvSpPr>
@@ -30746,7 +32795,7 @@
                 <a:ea typeface="Calibri" pitchFamily="34" charset="-122"/>
                 <a:cs typeface="Calibri" pitchFamily="34" charset="-120"/>
               </a:rPr>
-              <a:t>Word Labs  •  wordlabs.app  •  Root: 'light' = brightness, illumination, not heavy</a:t>
+              <a:t>Word Labs  •  wordlabs.app  •  Root: 'light' = brightness; not heavy</a:t>
             </a:r>
             <a:endParaRPr lang="en-US" sz="800" dirty="0"/>
           </a:p>
@@ -30885,7 +32934,7 @@
                 <a:ea typeface="Trebuchet MS" pitchFamily="34" charset="-122"/>
                 <a:cs typeface="Trebuchet MS" pitchFamily="34" charset="-120"/>
               </a:rPr>
-              <a:t>spotlight</a:t>
+              <a:t>ultralight</a:t>
             </a:r>
             <a:endParaRPr lang="en-US" sz="2800" dirty="0"/>
           </a:p>
@@ -31024,7 +33073,7 @@
                 <a:ea typeface="Trebuchet MS" pitchFamily="34" charset="-122"/>
                 <a:cs typeface="Trebuchet MS" pitchFamily="34" charset="-120"/>
               </a:rPr>
-              <a:t>spot</a:t>
+              <a:t>ultra</a:t>
             </a:r>
             <a:endParaRPr lang="en-US" sz="1300" dirty="0"/>
           </a:p>
@@ -31063,7 +33112,7 @@
                 <a:ea typeface="Calibri" pitchFamily="34" charset="-122"/>
                 <a:cs typeface="Calibri" pitchFamily="34" charset="-120"/>
               </a:rPr>
-              <a:t>a particular place or point</a:t>
+              <a:t>beyond; extreme</a:t>
             </a:r>
             <a:endParaRPr lang="en-US" sz="850" dirty="0"/>
           </a:p>
@@ -31175,7 +33224,7 @@
                 <a:ea typeface="Calibri" pitchFamily="34" charset="-122"/>
                 <a:cs typeface="Calibri" pitchFamily="34" charset="-120"/>
               </a:rPr>
-              <a:t>brightness, illumination</a:t>
+              <a:t>brightness; not heavy</a:t>
             </a:r>
             <a:endParaRPr lang="en-US" sz="850" dirty="0"/>
           </a:p>
@@ -31282,7 +33331,7 @@
         </p:nvSpPr>
         <p:spPr>
           <a:xfrm>
-            <a:off x="2999232" y="3364992"/>
+            <a:off x="2313432" y="3364992"/>
             <a:ext cx="1645920" cy="475488"/>
           </a:xfrm>
           <a:prstGeom prst="rect">
@@ -31309,7 +33358,7 @@
         </p:nvSpPr>
         <p:spPr>
           <a:xfrm>
-            <a:off x="2999232" y="3364992"/>
+            <a:off x="2313432" y="3364992"/>
             <a:ext cx="1645920" cy="475488"/>
           </a:xfrm>
           <a:prstGeom prst="rect">
@@ -31334,7 +33383,7 @@
                 <a:ea typeface="Trebuchet MS" pitchFamily="34" charset="-122"/>
                 <a:cs typeface="Trebuchet MS" pitchFamily="34" charset="-120"/>
               </a:rPr>
-              <a:t>spot</a:t>
+              <a:t>ul</a:t>
             </a:r>
             <a:endParaRPr lang="en-US" sz="1400" dirty="0"/>
           </a:p>
@@ -31348,8 +33397,8 @@
         </p:nvSpPr>
         <p:spPr>
           <a:xfrm>
-            <a:off x="4645152" y="3364992"/>
-            <a:ext cx="1097280" cy="475488"/>
+            <a:off x="3959352" y="3364992"/>
+            <a:ext cx="411480" cy="475488"/>
           </a:xfrm>
           <a:prstGeom prst="rect">
             <a:avLst/>
@@ -31387,7 +33436,7 @@
         </p:nvSpPr>
         <p:spPr>
           <a:xfrm>
-            <a:off x="5742432" y="3364992"/>
+            <a:off x="4370832" y="3364992"/>
             <a:ext cx="1645920" cy="475488"/>
           </a:xfrm>
           <a:prstGeom prst="rect">
@@ -31414,7 +33463,7 @@
         </p:nvSpPr>
         <p:spPr>
           <a:xfrm>
-            <a:off x="5742432" y="3364992"/>
+            <a:off x="4370832" y="3364992"/>
             <a:ext cx="1645920" cy="475488"/>
           </a:xfrm>
           <a:prstGeom prst="rect">
@@ -31439,6 +33488,111 @@
                 <a:ea typeface="Trebuchet MS" pitchFamily="34" charset="-122"/>
                 <a:cs typeface="Trebuchet MS" pitchFamily="34" charset="-120"/>
               </a:rPr>
+              <a:t>tra</a:t>
+            </a:r>
+            <a:endParaRPr lang="en-US" sz="1400" dirty="0"/>
+          </a:p>
+        </p:txBody>
+      </p:sp>
+      <p:sp>
+        <p:nvSpPr>
+          <p:cNvPr id="30" name="Text 28"/>
+          <p:cNvSpPr/>
+          <p:nvPr/>
+        </p:nvSpPr>
+        <p:spPr>
+          <a:xfrm>
+            <a:off x="6016752" y="3364992"/>
+            <a:ext cx="411480" cy="475488"/>
+          </a:xfrm>
+          <a:prstGeom prst="rect">
+            <a:avLst/>
+          </a:prstGeom>
+          <a:noFill/>
+          <a:ln/>
+        </p:spPr>
+        <p:txBody>
+          <a:bodyPr wrap="square" lIns="0" tIns="0" rIns="0" bIns="0" rtlCol="0" anchor="ctr"/>
+          <a:lstStyle/>
+          <a:p>
+            <a:pPr algn="ctr" indent="0" marL="0">
+              <a:buNone/>
+            </a:pPr>
+            <a:r>
+              <a:rPr lang="en-US" sz="1600" b="1" dirty="0">
+                <a:solidFill>
+                  <a:srgbClr val="0D9488"/>
+                </a:solidFill>
+                <a:latin typeface="Trebuchet MS" pitchFamily="34" charset="0"/>
+                <a:ea typeface="Trebuchet MS" pitchFamily="34" charset="-122"/>
+                <a:cs typeface="Trebuchet MS" pitchFamily="34" charset="-120"/>
+              </a:rPr>
+              <a:t>·</a:t>
+            </a:r>
+            <a:endParaRPr lang="en-US" sz="1600" dirty="0"/>
+          </a:p>
+        </p:txBody>
+      </p:sp>
+      <p:sp>
+        <p:nvSpPr>
+          <p:cNvPr id="31" name="Shape 29"/>
+          <p:cNvSpPr/>
+          <p:nvPr/>
+        </p:nvSpPr>
+        <p:spPr>
+          <a:xfrm>
+            <a:off x="6428232" y="3364992"/>
+            <a:ext cx="1645920" cy="475488"/>
+          </a:xfrm>
+          <a:prstGeom prst="rect">
+            <a:avLst>
+              <a:gd name="adj" fmla="val 9615"/>
+            </a:avLst>
+          </a:prstGeom>
+          <a:solidFill>
+            <a:srgbClr val="FFFFFF"/>
+          </a:solidFill>
+          <a:ln w="12700">
+            <a:solidFill>
+              <a:srgbClr val="0D9488"/>
+            </a:solidFill>
+            <a:prstDash val="solid"/>
+          </a:ln>
+        </p:spPr>
+      </p:sp>
+      <p:sp>
+        <p:nvSpPr>
+          <p:cNvPr id="32" name="Text 30"/>
+          <p:cNvSpPr/>
+          <p:nvPr/>
+        </p:nvSpPr>
+        <p:spPr>
+          <a:xfrm>
+            <a:off x="6428232" y="3364992"/>
+            <a:ext cx="1645920" cy="475488"/>
+          </a:xfrm>
+          <a:prstGeom prst="rect">
+            <a:avLst/>
+          </a:prstGeom>
+          <a:noFill/>
+          <a:ln/>
+        </p:spPr>
+        <p:txBody>
+          <a:bodyPr wrap="square" lIns="0" tIns="0" rIns="0" bIns="0" rtlCol="0" anchor="ctr"/>
+          <a:lstStyle/>
+          <a:p>
+            <a:pPr algn="ctr" indent="0" marL="0">
+              <a:buNone/>
+            </a:pPr>
+            <a:r>
+              <a:rPr lang="en-US" sz="1400" b="1" dirty="0">
+                <a:solidFill>
+                  <a:srgbClr val="0D9488"/>
+                </a:solidFill>
+                <a:latin typeface="Trebuchet MS" pitchFamily="34" charset="0"/>
+                <a:ea typeface="Trebuchet MS" pitchFamily="34" charset="-122"/>
+                <a:cs typeface="Trebuchet MS" pitchFamily="34" charset="-120"/>
+              </a:rPr>
               <a:t>light</a:t>
             </a:r>
             <a:endParaRPr lang="en-US" sz="1400" dirty="0"/>
@@ -31447,7 +33601,7 @@
       </p:sp>
       <p:sp>
         <p:nvSpPr>
-          <p:cNvPr id="30" name="Shape 28"/>
+          <p:cNvPr id="33" name="Shape 31"/>
           <p:cNvSpPr/>
           <p:nvPr/>
         </p:nvSpPr>
@@ -31474,7 +33628,7 @@
       </p:sp>
       <p:sp>
         <p:nvSpPr>
-          <p:cNvPr id="31" name="Text 29"/>
+          <p:cNvPr id="34" name="Text 32"/>
           <p:cNvSpPr/>
           <p:nvPr/>
         </p:nvSpPr>
@@ -31513,18 +33667,18 @@
       </p:sp>
       <p:sp>
         <p:nvSpPr>
-          <p:cNvPr id="32" name="Shape 30"/>
+          <p:cNvPr id="35" name="Shape 33"/>
           <p:cNvSpPr/>
           <p:nvPr/>
         </p:nvSpPr>
         <p:spPr>
           <a:xfrm>
             <a:off x="1874520" y="4096512"/>
-            <a:ext cx="6903720" cy="804672"/>
+            <a:ext cx="6903720" cy="658368"/>
           </a:xfrm>
           <a:prstGeom prst="rect">
             <a:avLst>
-              <a:gd name="adj" fmla="val 6818"/>
+              <a:gd name="adj" fmla="val 8333"/>
             </a:avLst>
           </a:prstGeom>
           <a:solidFill>
@@ -31540,18 +33694,18 @@
       </p:sp>
       <p:sp>
         <p:nvSpPr>
-          <p:cNvPr id="33" name="Shape 31"/>
-          <p:cNvSpPr/>
-          <p:nvPr/>
-        </p:nvSpPr>
-        <p:spPr>
-          <a:xfrm>
-            <a:off x="2124837" y="4169664"/>
-            <a:ext cx="685800" cy="384048"/>
+          <p:cNvPr id="36" name="Shape 34"/>
+          <p:cNvSpPr/>
+          <p:nvPr/>
+        </p:nvSpPr>
+        <p:spPr>
+          <a:xfrm>
+            <a:off x="2023872" y="4169664"/>
+            <a:ext cx="685800" cy="475488"/>
           </a:xfrm>
           <a:prstGeom prst="rect">
             <a:avLst>
-              <a:gd name="adj" fmla="val 9524"/>
+              <a:gd name="adj" fmla="val 7692"/>
             </a:avLst>
           </a:prstGeom>
           <a:solidFill>
@@ -31567,14 +33721,14 @@
       </p:sp>
       <p:sp>
         <p:nvSpPr>
-          <p:cNvPr id="34" name="Text 32"/>
-          <p:cNvSpPr/>
-          <p:nvPr/>
-        </p:nvSpPr>
-        <p:spPr>
-          <a:xfrm>
-            <a:off x="2124837" y="4169664"/>
-            <a:ext cx="685800" cy="384048"/>
+          <p:cNvPr id="37" name="Text 35"/>
+          <p:cNvSpPr/>
+          <p:nvPr/>
+        </p:nvSpPr>
+        <p:spPr>
+          <a:xfrm>
+            <a:off x="2023872" y="4169664"/>
+            <a:ext cx="685800" cy="475488"/>
           </a:xfrm>
           <a:prstGeom prst="rect">
             <a:avLst/>
@@ -31598,7 +33752,7 @@
                 <a:ea typeface="Trebuchet MS" pitchFamily="34" charset="-122"/>
                 <a:cs typeface="Trebuchet MS" pitchFamily="34" charset="-120"/>
               </a:rPr>
-              <a:t>s</a:t>
+              <a:t>u</a:t>
             </a:r>
             <a:endParaRPr lang="en-US" sz="900" dirty="0"/>
           </a:p>
@@ -31606,18 +33760,18 @@
       </p:sp>
       <p:sp>
         <p:nvSpPr>
-          <p:cNvPr id="35" name="Shape 33"/>
-          <p:cNvSpPr/>
-          <p:nvPr/>
-        </p:nvSpPr>
-        <p:spPr>
-          <a:xfrm>
-            <a:off x="3033522" y="4169664"/>
-            <a:ext cx="685800" cy="384048"/>
+          <p:cNvPr id="38" name="Shape 36"/>
+          <p:cNvSpPr/>
+          <p:nvPr/>
+        </p:nvSpPr>
+        <p:spPr>
+          <a:xfrm>
+            <a:off x="2831592" y="4169664"/>
+            <a:ext cx="685800" cy="475488"/>
           </a:xfrm>
           <a:prstGeom prst="rect">
             <a:avLst>
-              <a:gd name="adj" fmla="val 9524"/>
+              <a:gd name="adj" fmla="val 7692"/>
             </a:avLst>
           </a:prstGeom>
           <a:solidFill>
@@ -31633,14 +33787,14 @@
       </p:sp>
       <p:sp>
         <p:nvSpPr>
-          <p:cNvPr id="36" name="Text 34"/>
-          <p:cNvSpPr/>
-          <p:nvPr/>
-        </p:nvSpPr>
-        <p:spPr>
-          <a:xfrm>
-            <a:off x="3033522" y="4169664"/>
-            <a:ext cx="685800" cy="384048"/>
+          <p:cNvPr id="39" name="Text 37"/>
+          <p:cNvSpPr/>
+          <p:nvPr/>
+        </p:nvSpPr>
+        <p:spPr>
+          <a:xfrm>
+            <a:off x="2831592" y="4169664"/>
+            <a:ext cx="685800" cy="475488"/>
           </a:xfrm>
           <a:prstGeom prst="rect">
             <a:avLst/>
@@ -31664,7 +33818,7 @@
                 <a:ea typeface="Trebuchet MS" pitchFamily="34" charset="-122"/>
                 <a:cs typeface="Trebuchet MS" pitchFamily="34" charset="-120"/>
               </a:rPr>
-              <a:t>p</a:t>
+              <a:t>l</a:t>
             </a:r>
             <a:endParaRPr lang="en-US" sz="900" dirty="0"/>
           </a:p>
@@ -31672,18 +33826,18 @@
       </p:sp>
       <p:sp>
         <p:nvSpPr>
-          <p:cNvPr id="37" name="Shape 35"/>
-          <p:cNvSpPr/>
-          <p:nvPr/>
-        </p:nvSpPr>
-        <p:spPr>
-          <a:xfrm>
-            <a:off x="3942207" y="4169664"/>
-            <a:ext cx="685800" cy="384048"/>
+          <p:cNvPr id="40" name="Shape 38"/>
+          <p:cNvSpPr/>
+          <p:nvPr/>
+        </p:nvSpPr>
+        <p:spPr>
+          <a:xfrm>
+            <a:off x="3639312" y="4169664"/>
+            <a:ext cx="685800" cy="475488"/>
           </a:xfrm>
           <a:prstGeom prst="rect">
             <a:avLst>
-              <a:gd name="adj" fmla="val 9524"/>
+              <a:gd name="adj" fmla="val 7692"/>
             </a:avLst>
           </a:prstGeom>
           <a:solidFill>
@@ -31699,14 +33853,14 @@
       </p:sp>
       <p:sp>
         <p:nvSpPr>
-          <p:cNvPr id="38" name="Text 36"/>
-          <p:cNvSpPr/>
-          <p:nvPr/>
-        </p:nvSpPr>
-        <p:spPr>
-          <a:xfrm>
-            <a:off x="3942207" y="4169664"/>
-            <a:ext cx="685800" cy="384048"/>
+          <p:cNvPr id="41" name="Text 39"/>
+          <p:cNvSpPr/>
+          <p:nvPr/>
+        </p:nvSpPr>
+        <p:spPr>
+          <a:xfrm>
+            <a:off x="3639312" y="4169664"/>
+            <a:ext cx="685800" cy="475488"/>
           </a:xfrm>
           <a:prstGeom prst="rect">
             <a:avLst/>
@@ -31730,7 +33884,7 @@
                 <a:ea typeface="Trebuchet MS" pitchFamily="34" charset="-122"/>
                 <a:cs typeface="Trebuchet MS" pitchFamily="34" charset="-120"/>
               </a:rPr>
-              <a:t>o</a:t>
+              <a:t>t</a:t>
             </a:r>
             <a:endParaRPr lang="en-US" sz="900" dirty="0"/>
           </a:p>
@@ -31738,18 +33892,18 @@
       </p:sp>
       <p:sp>
         <p:nvSpPr>
-          <p:cNvPr id="39" name="Shape 37"/>
-          <p:cNvSpPr/>
-          <p:nvPr/>
-        </p:nvSpPr>
-        <p:spPr>
-          <a:xfrm>
-            <a:off x="4850892" y="4169664"/>
-            <a:ext cx="685800" cy="384048"/>
+          <p:cNvPr id="42" name="Shape 40"/>
+          <p:cNvSpPr/>
+          <p:nvPr/>
+        </p:nvSpPr>
+        <p:spPr>
+          <a:xfrm>
+            <a:off x="4447032" y="4169664"/>
+            <a:ext cx="685800" cy="475488"/>
           </a:xfrm>
           <a:prstGeom prst="rect">
             <a:avLst>
-              <a:gd name="adj" fmla="val 9524"/>
+              <a:gd name="adj" fmla="val 7692"/>
             </a:avLst>
           </a:prstGeom>
           <a:solidFill>
@@ -31765,14 +33919,14 @@
       </p:sp>
       <p:sp>
         <p:nvSpPr>
-          <p:cNvPr id="40" name="Text 38"/>
-          <p:cNvSpPr/>
-          <p:nvPr/>
-        </p:nvSpPr>
-        <p:spPr>
-          <a:xfrm>
-            <a:off x="4850892" y="4169664"/>
-            <a:ext cx="685800" cy="384048"/>
+          <p:cNvPr id="43" name="Text 41"/>
+          <p:cNvSpPr/>
+          <p:nvPr/>
+        </p:nvSpPr>
+        <p:spPr>
+          <a:xfrm>
+            <a:off x="4447032" y="4169664"/>
+            <a:ext cx="685800" cy="475488"/>
           </a:xfrm>
           <a:prstGeom prst="rect">
             <a:avLst/>
@@ -31796,7 +33950,7 @@
                 <a:ea typeface="Trebuchet MS" pitchFamily="34" charset="-122"/>
                 <a:cs typeface="Trebuchet MS" pitchFamily="34" charset="-120"/>
               </a:rPr>
-              <a:t>t</a:t>
+              <a:t>r</a:t>
             </a:r>
             <a:endParaRPr lang="en-US" sz="900" dirty="0"/>
           </a:p>
@@ -31804,18 +33958,18 @@
       </p:sp>
       <p:sp>
         <p:nvSpPr>
-          <p:cNvPr id="41" name="Shape 39"/>
-          <p:cNvSpPr/>
-          <p:nvPr/>
-        </p:nvSpPr>
-        <p:spPr>
-          <a:xfrm>
-            <a:off x="5759577" y="4169664"/>
-            <a:ext cx="685800" cy="384048"/>
+          <p:cNvPr id="44" name="Shape 42"/>
+          <p:cNvSpPr/>
+          <p:nvPr/>
+        </p:nvSpPr>
+        <p:spPr>
+          <a:xfrm>
+            <a:off x="5254752" y="4169664"/>
+            <a:ext cx="685800" cy="475488"/>
           </a:xfrm>
           <a:prstGeom prst="rect">
             <a:avLst>
-              <a:gd name="adj" fmla="val 9524"/>
+              <a:gd name="adj" fmla="val 7692"/>
             </a:avLst>
           </a:prstGeom>
           <a:solidFill>
@@ -31831,14 +33985,14 @@
       </p:sp>
       <p:sp>
         <p:nvSpPr>
-          <p:cNvPr id="42" name="Text 40"/>
-          <p:cNvSpPr/>
-          <p:nvPr/>
-        </p:nvSpPr>
-        <p:spPr>
-          <a:xfrm>
-            <a:off x="5759577" y="4169664"/>
-            <a:ext cx="685800" cy="384048"/>
+          <p:cNvPr id="45" name="Text 43"/>
+          <p:cNvSpPr/>
+          <p:nvPr/>
+        </p:nvSpPr>
+        <p:spPr>
+          <a:xfrm>
+            <a:off x="5254752" y="4169664"/>
+            <a:ext cx="685800" cy="475488"/>
           </a:xfrm>
           <a:prstGeom prst="rect">
             <a:avLst/>
@@ -31862,7 +34016,7 @@
                 <a:ea typeface="Trebuchet MS" pitchFamily="34" charset="-122"/>
                 <a:cs typeface="Trebuchet MS" pitchFamily="34" charset="-120"/>
               </a:rPr>
-              <a:t>l</a:t>
+              <a:t>a</a:t>
             </a:r>
             <a:endParaRPr lang="en-US" sz="900" dirty="0"/>
           </a:p>
@@ -31870,18 +34024,18 @@
       </p:sp>
       <p:sp>
         <p:nvSpPr>
-          <p:cNvPr id="43" name="Shape 41"/>
-          <p:cNvSpPr/>
-          <p:nvPr/>
-        </p:nvSpPr>
-        <p:spPr>
-          <a:xfrm>
-            <a:off x="6668262" y="4169664"/>
-            <a:ext cx="685800" cy="384048"/>
+          <p:cNvPr id="46" name="Shape 44"/>
+          <p:cNvSpPr/>
+          <p:nvPr/>
+        </p:nvSpPr>
+        <p:spPr>
+          <a:xfrm>
+            <a:off x="6062472" y="4169664"/>
+            <a:ext cx="685800" cy="475488"/>
           </a:xfrm>
           <a:prstGeom prst="rect">
             <a:avLst>
-              <a:gd name="adj" fmla="val 9524"/>
+              <a:gd name="adj" fmla="val 7692"/>
             </a:avLst>
           </a:prstGeom>
           <a:solidFill>
@@ -31897,14 +34051,14 @@
       </p:sp>
       <p:sp>
         <p:nvSpPr>
-          <p:cNvPr id="44" name="Text 42"/>
-          <p:cNvSpPr/>
-          <p:nvPr/>
-        </p:nvSpPr>
-        <p:spPr>
-          <a:xfrm>
-            <a:off x="6668262" y="4169664"/>
-            <a:ext cx="685800" cy="384048"/>
+          <p:cNvPr id="47" name="Text 45"/>
+          <p:cNvSpPr/>
+          <p:nvPr/>
+        </p:nvSpPr>
+        <p:spPr>
+          <a:xfrm>
+            <a:off x="6062472" y="4169664"/>
+            <a:ext cx="685800" cy="475488"/>
           </a:xfrm>
           <a:prstGeom prst="rect">
             <a:avLst/>
@@ -31928,6 +34082,72 @@
                 <a:ea typeface="Trebuchet MS" pitchFamily="34" charset="-122"/>
                 <a:cs typeface="Trebuchet MS" pitchFamily="34" charset="-120"/>
               </a:rPr>
+              <a:t>l</a:t>
+            </a:r>
+            <a:endParaRPr lang="en-US" sz="900" dirty="0"/>
+          </a:p>
+        </p:txBody>
+      </p:sp>
+      <p:sp>
+        <p:nvSpPr>
+          <p:cNvPr id="48" name="Shape 46"/>
+          <p:cNvSpPr/>
+          <p:nvPr/>
+        </p:nvSpPr>
+        <p:spPr>
+          <a:xfrm>
+            <a:off x="6870192" y="4169664"/>
+            <a:ext cx="685800" cy="475488"/>
+          </a:xfrm>
+          <a:prstGeom prst="rect">
+            <a:avLst>
+              <a:gd name="adj" fmla="val 7692"/>
+            </a:avLst>
+          </a:prstGeom>
+          <a:solidFill>
+            <a:srgbClr val="FFFFFF"/>
+          </a:solidFill>
+          <a:ln w="12700">
+            <a:solidFill>
+              <a:srgbClr val="DB2777"/>
+            </a:solidFill>
+            <a:prstDash val="solid"/>
+          </a:ln>
+        </p:spPr>
+      </p:sp>
+      <p:sp>
+        <p:nvSpPr>
+          <p:cNvPr id="49" name="Text 47"/>
+          <p:cNvSpPr/>
+          <p:nvPr/>
+        </p:nvSpPr>
+        <p:spPr>
+          <a:xfrm>
+            <a:off x="6870192" y="4169664"/>
+            <a:ext cx="685800" cy="475488"/>
+          </a:xfrm>
+          <a:prstGeom prst="rect">
+            <a:avLst/>
+          </a:prstGeom>
+          <a:noFill/>
+          <a:ln/>
+        </p:spPr>
+        <p:txBody>
+          <a:bodyPr wrap="square" lIns="0" tIns="0" rIns="0" bIns="0" rtlCol="0" anchor="ctr"/>
+          <a:lstStyle/>
+          <a:p>
+            <a:pPr algn="ctr" indent="0" marL="0">
+              <a:buNone/>
+            </a:pPr>
+            <a:r>
+              <a:rPr lang="en-US" sz="900" b="1" dirty="0">
+                <a:solidFill>
+                  <a:srgbClr val="9D174D"/>
+                </a:solidFill>
+                <a:latin typeface="Trebuchet MS" pitchFamily="34" charset="0"/>
+                <a:ea typeface="Trebuchet MS" pitchFamily="34" charset="-122"/>
+                <a:cs typeface="Trebuchet MS" pitchFamily="34" charset="-120"/>
+              </a:rPr>
               <a:t>igh</a:t>
             </a:r>
             <a:endParaRPr lang="en-US" sz="900" dirty="0"/>
@@ -31936,57 +34156,18 @@
       </p:sp>
       <p:sp>
         <p:nvSpPr>
-          <p:cNvPr id="45" name="Text 43"/>
-          <p:cNvSpPr/>
-          <p:nvPr/>
-        </p:nvSpPr>
-        <p:spPr>
-          <a:xfrm>
-            <a:off x="6668262" y="4572000"/>
-            <a:ext cx="685800" cy="219456"/>
-          </a:xfrm>
-          <a:prstGeom prst="rect">
-            <a:avLst/>
-          </a:prstGeom>
-          <a:noFill/>
-          <a:ln/>
-        </p:spPr>
-        <p:txBody>
-          <a:bodyPr wrap="square" lIns="0" tIns="0" rIns="0" bIns="0" rtlCol="0" anchor="t"/>
-          <a:lstStyle/>
-          <a:p>
-            <a:pPr algn="ctr" indent="0" marL="0">
-              <a:buNone/>
-            </a:pPr>
-            <a:r>
-              <a:rPr lang="en-US" sz="750" i="1" dirty="0">
-                <a:solidFill>
-                  <a:srgbClr val="94A3B8"/>
-                </a:solidFill>
-                <a:latin typeface="Calibri" pitchFamily="34" charset="0"/>
-                <a:ea typeface="Calibri" pitchFamily="34" charset="-122"/>
-                <a:cs typeface="Calibri" pitchFamily="34" charset="-120"/>
-              </a:rPr>
-              <a:t>/igh/</a:t>
-            </a:r>
-            <a:endParaRPr lang="en-US" sz="750" dirty="0"/>
-          </a:p>
-        </p:txBody>
-      </p:sp>
-      <p:sp>
-        <p:nvSpPr>
-          <p:cNvPr id="46" name="Shape 44"/>
-          <p:cNvSpPr/>
-          <p:nvPr/>
-        </p:nvSpPr>
-        <p:spPr>
-          <a:xfrm>
-            <a:off x="7576947" y="4169664"/>
-            <a:ext cx="685800" cy="384048"/>
+          <p:cNvPr id="50" name="Shape 48"/>
+          <p:cNvSpPr/>
+          <p:nvPr/>
+        </p:nvSpPr>
+        <p:spPr>
+          <a:xfrm>
+            <a:off x="7677912" y="4169664"/>
+            <a:ext cx="685800" cy="475488"/>
           </a:xfrm>
           <a:prstGeom prst="rect">
             <a:avLst>
-              <a:gd name="adj" fmla="val 9524"/>
+              <a:gd name="adj" fmla="val 7692"/>
             </a:avLst>
           </a:prstGeom>
           <a:solidFill>
@@ -32002,14 +34183,14 @@
       </p:sp>
       <p:sp>
         <p:nvSpPr>
-          <p:cNvPr id="47" name="Text 45"/>
-          <p:cNvSpPr/>
-          <p:nvPr/>
-        </p:nvSpPr>
-        <p:spPr>
-          <a:xfrm>
-            <a:off x="7576947" y="4169664"/>
-            <a:ext cx="685800" cy="384048"/>
+          <p:cNvPr id="51" name="Text 49"/>
+          <p:cNvSpPr/>
+          <p:nvPr/>
+        </p:nvSpPr>
+        <p:spPr>
+          <a:xfrm>
+            <a:off x="7677912" y="4169664"/>
+            <a:ext cx="685800" cy="475488"/>
           </a:xfrm>
           <a:prstGeom prst="rect">
             <a:avLst/>
@@ -32325,7 +34506,7 @@
                 <a:ea typeface="Calibri" pitchFamily="34" charset="-122"/>
                 <a:cs typeface="Calibri" pitchFamily="34" charset="-120"/>
               </a:rPr>
-              <a:t>Word Labs  •  wordlabs.app  •  Root: 'light' = brightness, illumination, not heavy</a:t>
+              <a:t>Word Labs  •  wordlabs.app  •  Root: 'light' = brightness; not heavy</a:t>
             </a:r>
             <a:endParaRPr lang="en-US" sz="800" dirty="0"/>
           </a:p>
@@ -33494,7 +35675,7 @@
                 <a:ea typeface="Calibri" pitchFamily="34" charset="-122"/>
                 <a:cs typeface="Calibri" pitchFamily="34" charset="-120"/>
               </a:rPr>
-              <a:t>Word Labs  •  wordlabs.app  •  Root: 'light' = brightness, illumination, not heavy</a:t>
+              <a:t>Word Labs  •  wordlabs.app  •  Root: 'light' = brightness; not heavy</a:t>
             </a:r>
             <a:endParaRPr lang="en-US" sz="800" dirty="0"/>
           </a:p>
@@ -34076,7 +36257,7 @@
                 <a:ea typeface="Trebuchet MS" pitchFamily="34" charset="-122"/>
                 <a:cs typeface="Trebuchet MS" pitchFamily="34" charset="-120"/>
               </a:rPr>
-              <a:t>-en</a:t>
+              <a:t>-ful</a:t>
             </a:r>
             <a:endParaRPr lang="en-US" sz="1300" dirty="0"/>
           </a:p>
@@ -34140,7 +36321,7 @@
                 <a:ea typeface="Trebuchet MS" pitchFamily="34" charset="-122"/>
                 <a:cs typeface="Trebuchet MS" pitchFamily="34" charset="-120"/>
               </a:rPr>
-              <a:t>flash-</a:t>
+              <a:t>ultra-</a:t>
             </a:r>
             <a:endParaRPr lang="en-US" sz="1300" dirty="0"/>
           </a:p>
@@ -34229,7 +36410,7 @@
                 <a:ea typeface="Trebuchet MS" pitchFamily="34" charset="-122"/>
                 <a:cs typeface="Trebuchet MS" pitchFamily="34" charset="-120"/>
               </a:rPr>
-              <a:t>-er</a:t>
+              <a:t>-s</a:t>
             </a:r>
             <a:endParaRPr lang="en-US" sz="1300" dirty="0"/>
           </a:p>
@@ -34250,7 +36431,7 @@
             <a:avLst/>
           </a:prstGeom>
           <a:solidFill>
-            <a:srgbClr val="DDD6FE"/>
+            <a:srgbClr val="F1F5F9"/>
           </a:solidFill>
           <a:ln w="12700">
             <a:solidFill>
@@ -34262,14 +36443,64 @@
       </p:sp>
       <p:sp>
         <p:nvSpPr>
-          <p:cNvPr id="34" name="Text 32"/>
-          <p:cNvSpPr/>
-          <p:nvPr/>
-        </p:nvSpPr>
-        <p:spPr>
-          <a:xfrm>
-            <a:off x="365760" y="2825496"/>
-            <a:ext cx="2468880" cy="402336"/>
+          <p:cNvPr id="34" name="Shape 32"/>
+          <p:cNvSpPr/>
+          <p:nvPr/>
+        </p:nvSpPr>
+        <p:spPr>
+          <a:xfrm>
+            <a:off x="2971800" y="2825496"/>
+            <a:ext cx="2834640" cy="402336"/>
+          </a:xfrm>
+          <a:prstGeom prst="rect">
+            <a:avLst/>
+          </a:prstGeom>
+          <a:solidFill>
+            <a:srgbClr val="F1F5F9"/>
+          </a:solidFill>
+          <a:ln w="12700">
+            <a:solidFill>
+              <a:srgbClr val="E2E8F0"/>
+            </a:solidFill>
+            <a:prstDash val="solid"/>
+          </a:ln>
+        </p:spPr>
+      </p:sp>
+      <p:sp>
+        <p:nvSpPr>
+          <p:cNvPr id="35" name="Shape 33"/>
+          <p:cNvSpPr/>
+          <p:nvPr/>
+        </p:nvSpPr>
+        <p:spPr>
+          <a:xfrm>
+            <a:off x="5943600" y="2825496"/>
+            <a:ext cx="2834640" cy="402336"/>
+          </a:xfrm>
+          <a:prstGeom prst="rect">
+            <a:avLst/>
+          </a:prstGeom>
+          <a:solidFill>
+            <a:srgbClr val="FCE7F3"/>
+          </a:solidFill>
+          <a:ln w="12700">
+            <a:solidFill>
+              <a:srgbClr val="E2E8F0"/>
+            </a:solidFill>
+            <a:prstDash val="solid"/>
+          </a:ln>
+        </p:spPr>
+      </p:sp>
+      <p:sp>
+        <p:nvSpPr>
+          <p:cNvPr id="36" name="Text 34"/>
+          <p:cNvSpPr/>
+          <p:nvPr/>
+        </p:nvSpPr>
+        <p:spPr>
+          <a:xfrm>
+            <a:off x="5943600" y="2825496"/>
+            <a:ext cx="2834640" cy="402336"/>
           </a:xfrm>
           <a:prstGeom prst="rect">
             <a:avLst/>
@@ -34287,13 +36518,13 @@
             <a:r>
               <a:rPr lang="en-US" sz="1300" b="1" dirty="0">
                 <a:solidFill>
-                  <a:srgbClr val="4C1D95"/>
+                  <a:srgbClr val="9D174D"/>
                 </a:solidFill>
                 <a:latin typeface="Trebuchet MS" pitchFamily="34" charset="0"/>
                 <a:ea typeface="Trebuchet MS" pitchFamily="34" charset="-122"/>
                 <a:cs typeface="Trebuchet MS" pitchFamily="34" charset="-120"/>
               </a:rPr>
-              <a:t>moon-</a:t>
+              <a:t>-en</a:t>
             </a:r>
             <a:endParaRPr lang="en-US" sz="1300" dirty="0"/>
           </a:p>
@@ -34301,20 +36532,45 @@
       </p:sp>
       <p:sp>
         <p:nvSpPr>
-          <p:cNvPr id="35" name="Shape 33"/>
-          <p:cNvSpPr/>
-          <p:nvPr/>
-        </p:nvSpPr>
-        <p:spPr>
-          <a:xfrm>
-            <a:off x="2971800" y="2825496"/>
+          <p:cNvPr id="37" name="Shape 35"/>
+          <p:cNvSpPr/>
+          <p:nvPr/>
+        </p:nvSpPr>
+        <p:spPr>
+          <a:xfrm>
+            <a:off x="365760" y="3246120"/>
+            <a:ext cx="2468880" cy="402336"/>
+          </a:xfrm>
+          <a:prstGeom prst="rect">
+            <a:avLst/>
+          </a:prstGeom>
+          <a:solidFill>
+            <a:srgbClr val="F8FAFC"/>
+          </a:solidFill>
+          <a:ln w="12700">
+            <a:solidFill>
+              <a:srgbClr val="E2E8F0"/>
+            </a:solidFill>
+            <a:prstDash val="solid"/>
+          </a:ln>
+        </p:spPr>
+      </p:sp>
+      <p:sp>
+        <p:nvSpPr>
+          <p:cNvPr id="38" name="Shape 36"/>
+          <p:cNvSpPr/>
+          <p:nvPr/>
+        </p:nvSpPr>
+        <p:spPr>
+          <a:xfrm>
+            <a:off x="2971800" y="3246120"/>
             <a:ext cx="2834640" cy="402336"/>
           </a:xfrm>
           <a:prstGeom prst="rect">
             <a:avLst/>
           </a:prstGeom>
           <a:solidFill>
-            <a:srgbClr val="F1F5F9"/>
+            <a:srgbClr val="F8FAFC"/>
           </a:solidFill>
           <a:ln w="12700">
             <a:solidFill>
@@ -34326,13 +36582,13 @@
       </p:sp>
       <p:sp>
         <p:nvSpPr>
-          <p:cNvPr id="36" name="Shape 34"/>
-          <p:cNvSpPr/>
-          <p:nvPr/>
-        </p:nvSpPr>
-        <p:spPr>
-          <a:xfrm>
-            <a:off x="5943600" y="2825496"/>
+          <p:cNvPr id="39" name="Shape 37"/>
+          <p:cNvSpPr/>
+          <p:nvPr/>
+        </p:nvSpPr>
+        <p:spPr>
+          <a:xfrm>
+            <a:off x="5943600" y="3246120"/>
             <a:ext cx="2834640" cy="402336"/>
           </a:xfrm>
           <a:prstGeom prst="rect">
@@ -34351,13 +36607,13 @@
       </p:sp>
       <p:sp>
         <p:nvSpPr>
-          <p:cNvPr id="37" name="Text 35"/>
-          <p:cNvSpPr/>
-          <p:nvPr/>
-        </p:nvSpPr>
-        <p:spPr>
-          <a:xfrm>
-            <a:off x="5943600" y="2825496"/>
+          <p:cNvPr id="40" name="Text 38"/>
+          <p:cNvSpPr/>
+          <p:nvPr/>
+        </p:nvSpPr>
+        <p:spPr>
+          <a:xfrm>
+            <a:off x="5943600" y="3246120"/>
             <a:ext cx="2834640" cy="402336"/>
           </a:xfrm>
           <a:prstGeom prst="rect">
@@ -34382,7 +36638,7 @@
                 <a:ea typeface="Trebuchet MS" pitchFamily="34" charset="-122"/>
                 <a:cs typeface="Trebuchet MS" pitchFamily="34" charset="-120"/>
               </a:rPr>
-              <a:t>-ly</a:t>
+              <a:t>-er</a:t>
             </a:r>
             <a:endParaRPr lang="en-US" sz="1300" dirty="0"/>
           </a:p>
@@ -34390,20 +36646,20 @@
       </p:sp>
       <p:sp>
         <p:nvSpPr>
-          <p:cNvPr id="38" name="Shape 36"/>
-          <p:cNvSpPr/>
-          <p:nvPr/>
-        </p:nvSpPr>
-        <p:spPr>
-          <a:xfrm>
-            <a:off x="365760" y="3246120"/>
+          <p:cNvPr id="41" name="Shape 39"/>
+          <p:cNvSpPr/>
+          <p:nvPr/>
+        </p:nvSpPr>
+        <p:spPr>
+          <a:xfrm>
+            <a:off x="365760" y="3666744"/>
             <a:ext cx="2468880" cy="402336"/>
           </a:xfrm>
           <a:prstGeom prst="rect">
             <a:avLst/>
           </a:prstGeom>
           <a:solidFill>
-            <a:srgbClr val="DDD6FE"/>
+            <a:srgbClr val="F1F5F9"/>
           </a:solidFill>
           <a:ln w="12700">
             <a:solidFill>
@@ -34415,14 +36671,64 @@
       </p:sp>
       <p:sp>
         <p:nvSpPr>
-          <p:cNvPr id="39" name="Text 37"/>
-          <p:cNvSpPr/>
-          <p:nvPr/>
-        </p:nvSpPr>
-        <p:spPr>
-          <a:xfrm>
-            <a:off x="365760" y="3246120"/>
-            <a:ext cx="2468880" cy="402336"/>
+          <p:cNvPr id="42" name="Shape 40"/>
+          <p:cNvSpPr/>
+          <p:nvPr/>
+        </p:nvSpPr>
+        <p:spPr>
+          <a:xfrm>
+            <a:off x="2971800" y="3666744"/>
+            <a:ext cx="2834640" cy="402336"/>
+          </a:xfrm>
+          <a:prstGeom prst="rect">
+            <a:avLst/>
+          </a:prstGeom>
+          <a:solidFill>
+            <a:srgbClr val="F1F5F9"/>
+          </a:solidFill>
+          <a:ln w="12700">
+            <a:solidFill>
+              <a:srgbClr val="E2E8F0"/>
+            </a:solidFill>
+            <a:prstDash val="solid"/>
+          </a:ln>
+        </p:spPr>
+      </p:sp>
+      <p:sp>
+        <p:nvSpPr>
+          <p:cNvPr id="43" name="Shape 41"/>
+          <p:cNvSpPr/>
+          <p:nvPr/>
+        </p:nvSpPr>
+        <p:spPr>
+          <a:xfrm>
+            <a:off x="5943600" y="3666744"/>
+            <a:ext cx="2834640" cy="402336"/>
+          </a:xfrm>
+          <a:prstGeom prst="rect">
+            <a:avLst/>
+          </a:prstGeom>
+          <a:solidFill>
+            <a:srgbClr val="FCE7F3"/>
+          </a:solidFill>
+          <a:ln w="12700">
+            <a:solidFill>
+              <a:srgbClr val="E2E8F0"/>
+            </a:solidFill>
+            <a:prstDash val="solid"/>
+          </a:ln>
+        </p:spPr>
+      </p:sp>
+      <p:sp>
+        <p:nvSpPr>
+          <p:cNvPr id="44" name="Text 42"/>
+          <p:cNvSpPr/>
+          <p:nvPr/>
+        </p:nvSpPr>
+        <p:spPr>
+          <a:xfrm>
+            <a:off x="5943600" y="3666744"/>
+            <a:ext cx="2834640" cy="402336"/>
           </a:xfrm>
           <a:prstGeom prst="rect">
             <a:avLst/>
@@ -34440,13 +36746,13 @@
             <a:r>
               <a:rPr lang="en-US" sz="1300" b="1" dirty="0">
                 <a:solidFill>
-                  <a:srgbClr val="4C1D95"/>
+                  <a:srgbClr val="9D174D"/>
                 </a:solidFill>
                 <a:latin typeface="Trebuchet MS" pitchFamily="34" charset="0"/>
                 <a:ea typeface="Trebuchet MS" pitchFamily="34" charset="-122"/>
                 <a:cs typeface="Trebuchet MS" pitchFamily="34" charset="-120"/>
               </a:rPr>
-              <a:t>sun-</a:t>
+              <a:t>-ing</a:t>
             </a:r>
             <a:endParaRPr lang="en-US" sz="1300" dirty="0"/>
           </a:p>
@@ -34454,127 +36760,104 @@
       </p:sp>
       <p:sp>
         <p:nvSpPr>
-          <p:cNvPr id="40" name="Shape 38"/>
-          <p:cNvSpPr/>
-          <p:nvPr/>
-        </p:nvSpPr>
-        <p:spPr>
-          <a:xfrm>
-            <a:off x="2971800" y="3246120"/>
-            <a:ext cx="2834640" cy="402336"/>
-          </a:xfrm>
-          <a:prstGeom prst="rect">
-            <a:avLst/>
-          </a:prstGeom>
-          <a:solidFill>
-            <a:srgbClr val="F8FAFC"/>
-          </a:solidFill>
-          <a:ln w="12700">
-            <a:solidFill>
-              <a:srgbClr val="E2E8F0"/>
-            </a:solidFill>
-            <a:prstDash val="solid"/>
-          </a:ln>
-        </p:spPr>
-      </p:sp>
-      <p:sp>
-        <p:nvSpPr>
-          <p:cNvPr id="41" name="Shape 39"/>
-          <p:cNvSpPr/>
-          <p:nvPr/>
-        </p:nvSpPr>
-        <p:spPr>
-          <a:xfrm>
-            <a:off x="5943600" y="3246120"/>
-            <a:ext cx="2834640" cy="402336"/>
-          </a:xfrm>
-          <a:prstGeom prst="rect">
-            <a:avLst/>
-          </a:prstGeom>
-          <a:solidFill>
-            <a:srgbClr val="FCE7F3"/>
-          </a:solidFill>
-          <a:ln w="12700">
-            <a:solidFill>
-              <a:srgbClr val="E2E8F0"/>
-            </a:solidFill>
-            <a:prstDash val="solid"/>
-          </a:ln>
-        </p:spPr>
-      </p:sp>
-      <p:sp>
-        <p:nvSpPr>
-          <p:cNvPr id="42" name="Text 40"/>
-          <p:cNvSpPr/>
-          <p:nvPr/>
-        </p:nvSpPr>
-        <p:spPr>
-          <a:xfrm>
-            <a:off x="5943600" y="3246120"/>
-            <a:ext cx="2834640" cy="402336"/>
-          </a:xfrm>
-          <a:prstGeom prst="rect">
-            <a:avLst/>
-          </a:prstGeom>
-          <a:noFill/>
-          <a:ln/>
-        </p:spPr>
-        <p:txBody>
-          <a:bodyPr wrap="square" lIns="0" tIns="0" rIns="0" bIns="0" rtlCol="0" anchor="ctr"/>
-          <a:lstStyle/>
-          <a:p>
-            <a:pPr algn="ctr" indent="0" marL="0">
-              <a:buNone/>
-            </a:pPr>
-            <a:r>
-              <a:rPr lang="en-US" sz="1300" b="1" dirty="0">
-                <a:solidFill>
-                  <a:srgbClr val="9D174D"/>
+          <p:cNvPr id="45" name="Text 43"/>
+          <p:cNvSpPr/>
+          <p:nvPr/>
+        </p:nvSpPr>
+        <p:spPr>
+          <a:xfrm>
+            <a:off x="365760" y="3611880"/>
+            <a:ext cx="1828800" cy="347472"/>
+          </a:xfrm>
+          <a:prstGeom prst="rect">
+            <a:avLst/>
+          </a:prstGeom>
+          <a:noFill/>
+          <a:ln/>
+        </p:spPr>
+        <p:txBody>
+          <a:bodyPr wrap="square" lIns="0" tIns="0" rIns="0" bIns="0" rtlCol="0" anchor="ctr"/>
+          <a:lstStyle/>
+          <a:p>
+            <a:pPr algn="l" indent="0" marL="0">
+              <a:buNone/>
+            </a:pPr>
+            <a:r>
+              <a:rPr lang="en-US" sz="1200" b="1" dirty="0">
+                <a:solidFill>
+                  <a:srgbClr val="0F172A"/>
                 </a:solidFill>
                 <a:latin typeface="Trebuchet MS" pitchFamily="34" charset="0"/>
                 <a:ea typeface="Trebuchet MS" pitchFamily="34" charset="-122"/>
                 <a:cs typeface="Trebuchet MS" pitchFamily="34" charset="-120"/>
               </a:rPr>
-              <a:t>-ness</a:t>
-            </a:r>
-            <a:endParaRPr lang="en-US" sz="1300" dirty="0"/>
-          </a:p>
-        </p:txBody>
-      </p:sp>
-      <p:sp>
-        <p:nvSpPr>
-          <p:cNvPr id="43" name="Text 41"/>
-          <p:cNvSpPr/>
-          <p:nvPr/>
-        </p:nvSpPr>
-        <p:spPr>
-          <a:xfrm>
-            <a:off x="365760" y="3611880"/>
-            <a:ext cx="1828800" cy="347472"/>
-          </a:xfrm>
-          <a:prstGeom prst="rect">
-            <a:avLst/>
-          </a:prstGeom>
-          <a:noFill/>
-          <a:ln/>
-        </p:spPr>
-        <p:txBody>
-          <a:bodyPr wrap="square" lIns="0" tIns="0" rIns="0" bIns="0" rtlCol="0" anchor="ctr"/>
-          <a:lstStyle/>
-          <a:p>
-            <a:pPr algn="l" indent="0" marL="0">
+              <a:t>Sample words:</a:t>
+            </a:r>
+            <a:endParaRPr lang="en-US" sz="1200" dirty="0"/>
+          </a:p>
+        </p:txBody>
+      </p:sp>
+      <p:sp>
+        <p:nvSpPr>
+          <p:cNvPr id="46" name="Shape 44"/>
+          <p:cNvSpPr/>
+          <p:nvPr/>
+        </p:nvSpPr>
+        <p:spPr>
+          <a:xfrm>
+            <a:off x="365760" y="4023360"/>
+            <a:ext cx="2011680" cy="402336"/>
+          </a:xfrm>
+          <a:prstGeom prst="rect">
+            <a:avLst>
+              <a:gd name="adj" fmla="val 13636"/>
+            </a:avLst>
+          </a:prstGeom>
+          <a:solidFill>
+            <a:srgbClr val="EEF2FF"/>
+          </a:solidFill>
+          <a:ln w="12700">
+            <a:solidFill>
+              <a:srgbClr val="6366F1"/>
+            </a:solidFill>
+            <a:prstDash val="solid"/>
+          </a:ln>
+        </p:spPr>
+      </p:sp>
+      <p:sp>
+        <p:nvSpPr>
+          <p:cNvPr id="47" name="Text 45"/>
+          <p:cNvSpPr/>
+          <p:nvPr/>
+        </p:nvSpPr>
+        <p:spPr>
+          <a:xfrm>
+            <a:off x="365760" y="4023360"/>
+            <a:ext cx="2011680" cy="402336"/>
+          </a:xfrm>
+          <a:prstGeom prst="rect">
+            <a:avLst/>
+          </a:prstGeom>
+          <a:noFill/>
+          <a:ln/>
+        </p:spPr>
+        <p:txBody>
+          <a:bodyPr wrap="square" lIns="0" tIns="0" rIns="0" bIns="0" rtlCol="0" anchor="ctr"/>
+          <a:lstStyle/>
+          <a:p>
+            <a:pPr algn="ctr" indent="0" marL="0">
               <a:buNone/>
             </a:pPr>
             <a:r>
               <a:rPr lang="en-US" sz="1200" b="1" dirty="0">
                 <a:solidFill>
-                  <a:srgbClr val="0F172A"/>
+                  <a:srgbClr val="4338CA"/>
                 </a:solidFill>
                 <a:latin typeface="Trebuchet MS" pitchFamily="34" charset="0"/>
                 <a:ea typeface="Trebuchet MS" pitchFamily="34" charset="-122"/>
                 <a:cs typeface="Trebuchet MS" pitchFamily="34" charset="-120"/>
               </a:rPr>
-              <a:t>Sample words:</a:t>
+              <a:t>light</a:t>
             </a:r>
             <a:endParaRPr lang="en-US" sz="1200" dirty="0"/>
           </a:p>
@@ -34582,13 +36865,13 @@
       </p:sp>
       <p:sp>
         <p:nvSpPr>
-          <p:cNvPr id="44" name="Shape 42"/>
-          <p:cNvSpPr/>
-          <p:nvPr/>
-        </p:nvSpPr>
-        <p:spPr>
-          <a:xfrm>
-            <a:off x="365760" y="4023360"/>
+          <p:cNvPr id="48" name="Shape 46"/>
+          <p:cNvSpPr/>
+          <p:nvPr/>
+        </p:nvSpPr>
+        <p:spPr>
+          <a:xfrm>
+            <a:off x="2542032" y="4023360"/>
             <a:ext cx="2011680" cy="402336"/>
           </a:xfrm>
           <a:prstGeom prst="rect">
@@ -34609,13 +36892,13 @@
       </p:sp>
       <p:sp>
         <p:nvSpPr>
-          <p:cNvPr id="45" name="Text 43"/>
-          <p:cNvSpPr/>
-          <p:nvPr/>
-        </p:nvSpPr>
-        <p:spPr>
-          <a:xfrm>
-            <a:off x="365760" y="4023360"/>
+          <p:cNvPr id="49" name="Text 47"/>
+          <p:cNvSpPr/>
+          <p:nvPr/>
+        </p:nvSpPr>
+        <p:spPr>
+          <a:xfrm>
+            <a:off x="2542032" y="4023360"/>
             <a:ext cx="2011680" cy="402336"/>
           </a:xfrm>
           <a:prstGeom prst="rect">
@@ -34640,7 +36923,7 @@
                 <a:ea typeface="Trebuchet MS" pitchFamily="34" charset="-122"/>
                 <a:cs typeface="Trebuchet MS" pitchFamily="34" charset="-120"/>
               </a:rPr>
-              <a:t>daylight</a:t>
+              <a:t>lights</a:t>
             </a:r>
             <a:endParaRPr lang="en-US" sz="1200" dirty="0"/>
           </a:p>
@@ -34648,13 +36931,13 @@
       </p:sp>
       <p:sp>
         <p:nvSpPr>
-          <p:cNvPr id="46" name="Shape 44"/>
-          <p:cNvSpPr/>
-          <p:nvPr/>
-        </p:nvSpPr>
-        <p:spPr>
-          <a:xfrm>
-            <a:off x="2542032" y="4023360"/>
+          <p:cNvPr id="50" name="Shape 48"/>
+          <p:cNvSpPr/>
+          <p:nvPr/>
+        </p:nvSpPr>
+        <p:spPr>
+          <a:xfrm>
+            <a:off x="4718304" y="4023360"/>
             <a:ext cx="2011680" cy="402336"/>
           </a:xfrm>
           <a:prstGeom prst="rect">
@@ -34675,13 +36958,13 @@
       </p:sp>
       <p:sp>
         <p:nvSpPr>
-          <p:cNvPr id="47" name="Text 45"/>
-          <p:cNvSpPr/>
-          <p:nvPr/>
-        </p:nvSpPr>
-        <p:spPr>
-          <a:xfrm>
-            <a:off x="2542032" y="4023360"/>
+          <p:cNvPr id="51" name="Text 49"/>
+          <p:cNvSpPr/>
+          <p:nvPr/>
+        </p:nvSpPr>
+        <p:spPr>
+          <a:xfrm>
+            <a:off x="4718304" y="4023360"/>
             <a:ext cx="2011680" cy="402336"/>
           </a:xfrm>
           <a:prstGeom prst="rect">
@@ -34714,13 +36997,13 @@
       </p:sp>
       <p:sp>
         <p:nvSpPr>
-          <p:cNvPr id="48" name="Shape 46"/>
-          <p:cNvSpPr/>
-          <p:nvPr/>
-        </p:nvSpPr>
-        <p:spPr>
-          <a:xfrm>
-            <a:off x="4718304" y="4023360"/>
+          <p:cNvPr id="52" name="Shape 50"/>
+          <p:cNvSpPr/>
+          <p:nvPr/>
+        </p:nvSpPr>
+        <p:spPr>
+          <a:xfrm>
+            <a:off x="6894576" y="4023360"/>
             <a:ext cx="2011680" cy="402336"/>
           </a:xfrm>
           <a:prstGeom prst="rect">
@@ -34741,13 +37024,13 @@
       </p:sp>
       <p:sp>
         <p:nvSpPr>
-          <p:cNvPr id="49" name="Text 47"/>
-          <p:cNvSpPr/>
-          <p:nvPr/>
-        </p:nvSpPr>
-        <p:spPr>
-          <a:xfrm>
-            <a:off x="4718304" y="4023360"/>
+          <p:cNvPr id="53" name="Text 51"/>
+          <p:cNvSpPr/>
+          <p:nvPr/>
+        </p:nvSpPr>
+        <p:spPr>
+          <a:xfrm>
+            <a:off x="6894576" y="4023360"/>
             <a:ext cx="2011680" cy="402336"/>
           </a:xfrm>
           <a:prstGeom prst="rect">
@@ -34772,7 +37055,7 @@
                 <a:ea typeface="Trebuchet MS" pitchFamily="34" charset="-122"/>
                 <a:cs typeface="Trebuchet MS" pitchFamily="34" charset="-120"/>
               </a:rPr>
-              <a:t>enlighten</a:t>
+              <a:t>lighted</a:t>
             </a:r>
             <a:endParaRPr lang="en-US" sz="1200" dirty="0"/>
           </a:p>
@@ -34780,13 +37063,13 @@
       </p:sp>
       <p:sp>
         <p:nvSpPr>
-          <p:cNvPr id="50" name="Shape 48"/>
-          <p:cNvSpPr/>
-          <p:nvPr/>
-        </p:nvSpPr>
-        <p:spPr>
-          <a:xfrm>
-            <a:off x="6894576" y="4023360"/>
+          <p:cNvPr id="54" name="Shape 52"/>
+          <p:cNvSpPr/>
+          <p:nvPr/>
+        </p:nvSpPr>
+        <p:spPr>
+          <a:xfrm>
+            <a:off x="365760" y="4498848"/>
             <a:ext cx="2011680" cy="402336"/>
           </a:xfrm>
           <a:prstGeom prst="rect">
@@ -34807,13 +37090,13 @@
       </p:sp>
       <p:sp>
         <p:nvSpPr>
-          <p:cNvPr id="51" name="Text 49"/>
-          <p:cNvSpPr/>
-          <p:nvPr/>
-        </p:nvSpPr>
-        <p:spPr>
-          <a:xfrm>
-            <a:off x="6894576" y="4023360"/>
+          <p:cNvPr id="55" name="Text 53"/>
+          <p:cNvSpPr/>
+          <p:nvPr/>
+        </p:nvSpPr>
+        <p:spPr>
+          <a:xfrm>
+            <a:off x="365760" y="4498848"/>
             <a:ext cx="2011680" cy="402336"/>
           </a:xfrm>
           <a:prstGeom prst="rect">
@@ -34838,7 +37121,7 @@
                 <a:ea typeface="Trebuchet MS" pitchFamily="34" charset="-122"/>
                 <a:cs typeface="Trebuchet MS" pitchFamily="34" charset="-120"/>
               </a:rPr>
-              <a:t>flashlight</a:t>
+              <a:t>lighter</a:t>
             </a:r>
             <a:endParaRPr lang="en-US" sz="1200" dirty="0"/>
           </a:p>
@@ -34846,13 +37129,13 @@
       </p:sp>
       <p:sp>
         <p:nvSpPr>
-          <p:cNvPr id="52" name="Shape 50"/>
-          <p:cNvSpPr/>
-          <p:nvPr/>
-        </p:nvSpPr>
-        <p:spPr>
-          <a:xfrm>
-            <a:off x="365760" y="4498848"/>
+          <p:cNvPr id="56" name="Shape 54"/>
+          <p:cNvSpPr/>
+          <p:nvPr/>
+        </p:nvSpPr>
+        <p:spPr>
+          <a:xfrm>
+            <a:off x="2542032" y="4498848"/>
             <a:ext cx="2011680" cy="402336"/>
           </a:xfrm>
           <a:prstGeom prst="rect">
@@ -34873,13 +37156,13 @@
       </p:sp>
       <p:sp>
         <p:nvSpPr>
-          <p:cNvPr id="53" name="Text 51"/>
-          <p:cNvSpPr/>
-          <p:nvPr/>
-        </p:nvSpPr>
-        <p:spPr>
-          <a:xfrm>
-            <a:off x="365760" y="4498848"/>
+          <p:cNvPr id="57" name="Text 55"/>
+          <p:cNvSpPr/>
+          <p:nvPr/>
+        </p:nvSpPr>
+        <p:spPr>
+          <a:xfrm>
+            <a:off x="2542032" y="4498848"/>
             <a:ext cx="2011680" cy="402336"/>
           </a:xfrm>
           <a:prstGeom prst="rect">
@@ -34904,7 +37187,7 @@
                 <a:ea typeface="Trebuchet MS" pitchFamily="34" charset="-122"/>
                 <a:cs typeface="Trebuchet MS" pitchFamily="34" charset="-120"/>
               </a:rPr>
-              <a:t>highlight</a:t>
+              <a:t>lightly</a:t>
             </a:r>
             <a:endParaRPr lang="en-US" sz="1200" dirty="0"/>
           </a:p>
@@ -34912,13 +37195,13 @@
       </p:sp>
       <p:sp>
         <p:nvSpPr>
-          <p:cNvPr id="54" name="Shape 52"/>
-          <p:cNvSpPr/>
-          <p:nvPr/>
-        </p:nvSpPr>
-        <p:spPr>
-          <a:xfrm>
-            <a:off x="2542032" y="4498848"/>
+          <p:cNvPr id="58" name="Shape 56"/>
+          <p:cNvSpPr/>
+          <p:nvPr/>
+        </p:nvSpPr>
+        <p:spPr>
+          <a:xfrm>
+            <a:off x="4718304" y="4498848"/>
             <a:ext cx="2011680" cy="402336"/>
           </a:xfrm>
           <a:prstGeom prst="rect">
@@ -34939,13 +37222,13 @@
       </p:sp>
       <p:sp>
         <p:nvSpPr>
-          <p:cNvPr id="55" name="Text 53"/>
-          <p:cNvSpPr/>
-          <p:nvPr/>
-        </p:nvSpPr>
-        <p:spPr>
-          <a:xfrm>
-            <a:off x="2542032" y="4498848"/>
+          <p:cNvPr id="59" name="Text 57"/>
+          <p:cNvSpPr/>
+          <p:nvPr/>
+        </p:nvSpPr>
+        <p:spPr>
+          <a:xfrm>
+            <a:off x="4718304" y="4498848"/>
             <a:ext cx="2011680" cy="402336"/>
           </a:xfrm>
           <a:prstGeom prst="rect">
@@ -34970,139 +37253,7 @@
                 <a:ea typeface="Trebuchet MS" pitchFamily="34" charset="-122"/>
                 <a:cs typeface="Trebuchet MS" pitchFamily="34" charset="-120"/>
               </a:rPr>
-              <a:t>lighten</a:t>
-            </a:r>
-            <a:endParaRPr lang="en-US" sz="1200" dirty="0"/>
-          </a:p>
-        </p:txBody>
-      </p:sp>
-      <p:sp>
-        <p:nvSpPr>
-          <p:cNvPr id="56" name="Shape 54"/>
-          <p:cNvSpPr/>
-          <p:nvPr/>
-        </p:nvSpPr>
-        <p:spPr>
-          <a:xfrm>
-            <a:off x="4718304" y="4498848"/>
-            <a:ext cx="2011680" cy="402336"/>
-          </a:xfrm>
-          <a:prstGeom prst="rect">
-            <a:avLst>
-              <a:gd name="adj" fmla="val 13636"/>
-            </a:avLst>
-          </a:prstGeom>
-          <a:solidFill>
-            <a:srgbClr val="EEF2FF"/>
-          </a:solidFill>
-          <a:ln w="12700">
-            <a:solidFill>
-              <a:srgbClr val="6366F1"/>
-            </a:solidFill>
-            <a:prstDash val="solid"/>
-          </a:ln>
-        </p:spPr>
-      </p:sp>
-      <p:sp>
-        <p:nvSpPr>
-          <p:cNvPr id="57" name="Text 55"/>
-          <p:cNvSpPr/>
-          <p:nvPr/>
-        </p:nvSpPr>
-        <p:spPr>
-          <a:xfrm>
-            <a:off x="4718304" y="4498848"/>
-            <a:ext cx="2011680" cy="402336"/>
-          </a:xfrm>
-          <a:prstGeom prst="rect">
-            <a:avLst/>
-          </a:prstGeom>
-          <a:noFill/>
-          <a:ln/>
-        </p:spPr>
-        <p:txBody>
-          <a:bodyPr wrap="square" lIns="0" tIns="0" rIns="0" bIns="0" rtlCol="0" anchor="ctr"/>
-          <a:lstStyle/>
-          <a:p>
-            <a:pPr algn="ctr" indent="0" marL="0">
-              <a:buNone/>
-            </a:pPr>
-            <a:r>
-              <a:rPr lang="en-US" sz="1200" b="1" dirty="0">
-                <a:solidFill>
-                  <a:srgbClr val="4338CA"/>
-                </a:solidFill>
-                <a:latin typeface="Trebuchet MS" pitchFamily="34" charset="0"/>
-                <a:ea typeface="Trebuchet MS" pitchFamily="34" charset="-122"/>
-                <a:cs typeface="Trebuchet MS" pitchFamily="34" charset="-120"/>
-              </a:rPr>
-              <a:t>lightly</a:t>
-            </a:r>
-            <a:endParaRPr lang="en-US" sz="1200" dirty="0"/>
-          </a:p>
-        </p:txBody>
-      </p:sp>
-      <p:sp>
-        <p:nvSpPr>
-          <p:cNvPr id="58" name="Shape 56"/>
-          <p:cNvSpPr/>
-          <p:nvPr/>
-        </p:nvSpPr>
-        <p:spPr>
-          <a:xfrm>
-            <a:off x="6894576" y="4498848"/>
-            <a:ext cx="2011680" cy="402336"/>
-          </a:xfrm>
-          <a:prstGeom prst="rect">
-            <a:avLst>
-              <a:gd name="adj" fmla="val 13636"/>
-            </a:avLst>
-          </a:prstGeom>
-          <a:solidFill>
-            <a:srgbClr val="EEF2FF"/>
-          </a:solidFill>
-          <a:ln w="12700">
-            <a:solidFill>
-              <a:srgbClr val="6366F1"/>
-            </a:solidFill>
-            <a:prstDash val="solid"/>
-          </a:ln>
-        </p:spPr>
-      </p:sp>
-      <p:sp>
-        <p:nvSpPr>
-          <p:cNvPr id="59" name="Text 57"/>
-          <p:cNvSpPr/>
-          <p:nvPr/>
-        </p:nvSpPr>
-        <p:spPr>
-          <a:xfrm>
-            <a:off x="6894576" y="4498848"/>
-            <a:ext cx="2011680" cy="402336"/>
-          </a:xfrm>
-          <a:prstGeom prst="rect">
-            <a:avLst/>
-          </a:prstGeom>
-          <a:noFill/>
-          <a:ln/>
-        </p:spPr>
-        <p:txBody>
-          <a:bodyPr wrap="square" lIns="0" tIns="0" rIns="0" bIns="0" rtlCol="0" anchor="ctr"/>
-          <a:lstStyle/>
-          <a:p>
-            <a:pPr algn="ctr" indent="0" marL="0">
-              <a:buNone/>
-            </a:pPr>
-            <a:r>
-              <a:rPr lang="en-US" sz="1200" b="1" dirty="0">
-                <a:solidFill>
-                  <a:srgbClr val="4338CA"/>
-                </a:solidFill>
-                <a:latin typeface="Trebuchet MS" pitchFamily="34" charset="0"/>
-                <a:ea typeface="Trebuchet MS" pitchFamily="34" charset="-122"/>
-                <a:cs typeface="Trebuchet MS" pitchFamily="34" charset="-120"/>
-              </a:rPr>
-              <a:t>moonlight</a:t>
+              <a:t>delights</a:t>
             </a:r>
             <a:endParaRPr lang="en-US" sz="1200" dirty="0"/>
           </a:p>
@@ -35394,7 +37545,7 @@
                 <a:ea typeface="Calibri" pitchFamily="34" charset="-122"/>
                 <a:cs typeface="Calibri" pitchFamily="34" charset="-120"/>
               </a:rPr>
-              <a:t>Word Labs  •  wordlabs.app  •  Root: 'light' = brightness, illumination, not heavy</a:t>
+              <a:t>Word Labs  •  wordlabs.app  •  Root: 'light' = brightness; not heavy</a:t>
             </a:r>
             <a:endParaRPr lang="en-US" sz="800" dirty="0"/>
           </a:p>
@@ -35558,7 +37709,7 @@
                 <a:ea typeface="Calibri" pitchFamily="34" charset="-122"/>
                 <a:cs typeface="Calibri" pitchFamily="34" charset="-120"/>
               </a:rPr>
-              <a:t>The core part of a word carrying its basic meaning. For example, 'light' means 'brightness, illumination, not heavy'.</a:t>
+              <a:t>The core part of a word carrying its basic meaning. For example, 'light' means 'brightness; not heavy'.</a:t>
             </a:r>
             <a:endParaRPr lang="en-US" sz="1350" dirty="0"/>
           </a:p>
@@ -36178,7 +38329,7 @@
                 <a:ea typeface="Calibri" pitchFamily="34" charset="-122"/>
                 <a:cs typeface="Calibri" pitchFamily="34" charset="-120"/>
               </a:rPr>
-              <a:t>Word Labs  •  wordlabs.app  •  Root: 'light' = brightness, illumination, not heavy</a:t>
+              <a:t>Word Labs  •  wordlabs.app  •  Root: 'light' = brightness; not heavy</a:t>
             </a:r>
             <a:endParaRPr lang="en-US" sz="800" dirty="0"/>
           </a:p>
@@ -36290,7 +38441,7 @@
                 <a:ea typeface="Calibri" pitchFamily="34" charset="-122"/>
                 <a:cs typeface="Calibri" pitchFamily="34" charset="-120"/>
               </a:rPr>
-              <a:t>1.  The root 'light' comes from the ancient Greek word for fire.</a:t>
+              <a:t>1.  'lights' means 'sources of loud sound, such as speakers'.</a:t>
             </a:r>
             <a:endParaRPr lang="en-US" sz="1300" dirty="0"/>
           </a:p>
@@ -36429,7 +38580,7 @@
                 <a:ea typeface="Calibri" pitchFamily="34" charset="-122"/>
                 <a:cs typeface="Calibri" pitchFamily="34" charset="-120"/>
               </a:rPr>
-              <a:t>2.  The word 'lightly' contains the root 'light' plus the suffix '-ly'.</a:t>
+              <a:t>2.  'light' means 'brightness; not heavy'.</a:t>
             </a:r>
             <a:endParaRPr lang="en-US" sz="1300" dirty="0"/>
           </a:p>
@@ -36568,7 +38719,7 @@
                 <a:ea typeface="Calibri" pitchFamily="34" charset="-122"/>
                 <a:cs typeface="Calibri" pitchFamily="34" charset="-120"/>
               </a:rPr>
-              <a:t>3.  The word 'daylight' is made up of two separate morphemes joined together.</a:t>
+              <a:t>3.  'lights' means 'sources of brightness, such as lamps or bulbs'.</a:t>
             </a:r>
             <a:endParaRPr lang="en-US" sz="1300" dirty="0"/>
           </a:p>
@@ -36707,7 +38858,7 @@
                 <a:ea typeface="Calibri" pitchFamily="34" charset="-122"/>
                 <a:cs typeface="Calibri" pitchFamily="34" charset="-120"/>
               </a:rPr>
-              <a:t>4.  The word 'enlighten' contains a prefix, a root and a suffix.</a:t>
+              <a:t>4.  'light' means 'a heavy weight carried on your back'.</a:t>
             </a:r>
             <a:endParaRPr lang="en-US" sz="1300" dirty="0"/>
           </a:p>
@@ -36730,11 +38881,11 @@
             </a:avLst>
           </a:prstGeom>
           <a:solidFill>
-            <a:srgbClr val="DCFCE7"/>
-          </a:solidFill>
-          <a:ln w="12700">
-            <a:solidFill>
-              <a:srgbClr val="16A34A"/>
+            <a:srgbClr val="FEE2E2"/>
+          </a:solidFill>
+          <a:ln w="12700">
+            <a:solidFill>
+              <a:srgbClr val="DC2626"/>
             </a:solidFill>
             <a:prstDash val="solid"/>
           </a:ln>
@@ -36767,13 +38918,13 @@
             <a:r>
               <a:rPr lang="en-US" sz="1100" b="1" dirty="0">
                 <a:solidFill>
-                  <a:srgbClr val="16A34A"/>
+                  <a:srgbClr val="DC2626"/>
                 </a:solidFill>
                 <a:latin typeface="Trebuchet MS" pitchFamily="34" charset="0"/>
                 <a:ea typeface="Trebuchet MS" pitchFamily="34" charset="-122"/>
                 <a:cs typeface="Trebuchet MS" pitchFamily="34" charset="-120"/>
               </a:rPr>
-              <a:t>TRUE</a:t>
+              <a:t>FALSE</a:t>
             </a:r>
             <a:endParaRPr lang="en-US" sz="1100" dirty="0"/>
           </a:p>
@@ -36846,7 +38997,7 @@
                 <a:ea typeface="Calibri" pitchFamily="34" charset="-122"/>
                 <a:cs typeface="Calibri" pitchFamily="34" charset="-120"/>
               </a:rPr>
-              <a:t>5.  The word 'moonlight' has nothing to do with illumination or brightness.</a:t>
+              <a:t>5.  'light' means 'brightness that lets you see things'.</a:t>
             </a:r>
             <a:endParaRPr lang="en-US" sz="1300" dirty="0"/>
           </a:p>
@@ -36869,11 +39020,11 @@
             </a:avLst>
           </a:prstGeom>
           <a:solidFill>
-            <a:srgbClr val="FEE2E2"/>
-          </a:solidFill>
-          <a:ln w="12700">
-            <a:solidFill>
-              <a:srgbClr val="DC2626"/>
+            <a:srgbClr val="DCFCE7"/>
+          </a:solidFill>
+          <a:ln w="12700">
+            <a:solidFill>
+              <a:srgbClr val="16A34A"/>
             </a:solidFill>
             <a:prstDash val="solid"/>
           </a:ln>
@@ -36906,13 +39057,13 @@
             <a:r>
               <a:rPr lang="en-US" sz="1100" b="1" dirty="0">
                 <a:solidFill>
-                  <a:srgbClr val="DC2626"/>
+                  <a:srgbClr val="16A34A"/>
                 </a:solidFill>
                 <a:latin typeface="Trebuchet MS" pitchFamily="34" charset="0"/>
                 <a:ea typeface="Trebuchet MS" pitchFamily="34" charset="-122"/>
                 <a:cs typeface="Trebuchet MS" pitchFamily="34" charset="-120"/>
               </a:rPr>
-              <a:t>FALSE</a:t>
+              <a:t>TRUE</a:t>
             </a:r>
             <a:endParaRPr lang="en-US" sz="1100" dirty="0"/>
           </a:p>
@@ -37204,7 +39355,7 @@
                 <a:ea typeface="Calibri" pitchFamily="34" charset="-122"/>
                 <a:cs typeface="Calibri" pitchFamily="34" charset="-120"/>
               </a:rPr>
-              <a:t>Word Labs  •  wordlabs.app  •  Root: 'light' = brightness, illumination, not heavy</a:t>
+              <a:t>Word Labs  •  wordlabs.app  •  Root: 'light' = brightness; not heavy</a:t>
             </a:r>
             <a:endParaRPr lang="en-US" sz="800" dirty="0"/>
           </a:p>
@@ -37341,7 +39492,7 @@
                 <a:ea typeface="Trebuchet MS" pitchFamily="34" charset="-122"/>
                 <a:cs typeface="Trebuchet MS" pitchFamily="34" charset="-120"/>
               </a:rPr>
-              <a:t>brightness, illumination, not heavy</a:t>
+              <a:t>brightness; not heavy</a:t>
             </a:r>
             <a:endParaRPr lang="en-US" sz="2000" dirty="0"/>
           </a:p>
@@ -37380,7 +39531,7 @@
                 <a:ea typeface="Calibri" pitchFamily="34" charset="-122"/>
                 <a:cs typeface="Calibri" pitchFamily="34" charset="-120"/>
               </a:rPr>
-              <a:t>Origin: Latin: lux</a:t>
+              <a:t>Origin: Core English root</a:t>
             </a:r>
             <a:endParaRPr lang="en-US" sz="1100" dirty="0"/>
           </a:p>
@@ -37485,7 +39636,7 @@
                 <a:ea typeface="Trebuchet MS" pitchFamily="34" charset="-122"/>
                 <a:cs typeface="Trebuchet MS" pitchFamily="34" charset="-120"/>
               </a:rPr>
-              <a:t>daylight</a:t>
+              <a:t>light</a:t>
             </a:r>
             <a:endParaRPr lang="en-US" sz="1300" dirty="0"/>
           </a:p>
@@ -37551,7 +39702,7 @@
                 <a:ea typeface="Trebuchet MS" pitchFamily="34" charset="-122"/>
                 <a:cs typeface="Trebuchet MS" pitchFamily="34" charset="-120"/>
               </a:rPr>
-              <a:t>delight</a:t>
+              <a:t>lights</a:t>
             </a:r>
             <a:endParaRPr lang="en-US" sz="1300" dirty="0"/>
           </a:p>
@@ -37617,7 +39768,7 @@
                 <a:ea typeface="Trebuchet MS" pitchFamily="34" charset="-122"/>
                 <a:cs typeface="Trebuchet MS" pitchFamily="34" charset="-120"/>
               </a:rPr>
-              <a:t>enlighten</a:t>
+              <a:t>delight</a:t>
             </a:r>
             <a:endParaRPr lang="en-US" sz="1300" dirty="0"/>
           </a:p>
@@ -37683,7 +39834,7 @@
                 <a:ea typeface="Trebuchet MS" pitchFamily="34" charset="-122"/>
                 <a:cs typeface="Trebuchet MS" pitchFamily="34" charset="-120"/>
               </a:rPr>
-              <a:t>flashlight</a:t>
+              <a:t>lighted</a:t>
             </a:r>
             <a:endParaRPr lang="en-US" sz="1300" dirty="0"/>
           </a:p>
@@ -37749,7 +39900,7 @@
                 <a:ea typeface="Trebuchet MS" pitchFamily="34" charset="-122"/>
                 <a:cs typeface="Trebuchet MS" pitchFamily="34" charset="-120"/>
               </a:rPr>
-              <a:t>highlight</a:t>
+              <a:t>lighter</a:t>
             </a:r>
             <a:endParaRPr lang="en-US" sz="1300" dirty="0"/>
           </a:p>
@@ -37815,7 +39966,7 @@
                 <a:ea typeface="Trebuchet MS" pitchFamily="34" charset="-122"/>
                 <a:cs typeface="Trebuchet MS" pitchFamily="34" charset="-120"/>
               </a:rPr>
-              <a:t>lighten</a:t>
+              <a:t>lightly</a:t>
             </a:r>
             <a:endParaRPr lang="en-US" sz="1300" dirty="0"/>
           </a:p>
@@ -37881,7 +40032,7 @@
                 <a:ea typeface="Trebuchet MS" pitchFamily="34" charset="-122"/>
                 <a:cs typeface="Trebuchet MS" pitchFamily="34" charset="-120"/>
               </a:rPr>
-              <a:t>lightly</a:t>
+              <a:t>delights</a:t>
             </a:r>
             <a:endParaRPr lang="en-US" sz="1300" dirty="0"/>
           </a:p>
@@ -38173,7 +40324,7 @@
                 <a:ea typeface="Calibri" pitchFamily="34" charset="-122"/>
                 <a:cs typeface="Calibri" pitchFamily="34" charset="-120"/>
               </a:rPr>
-              <a:t>Word Labs  •  wordlabs.app  •  Root: 'light' = brightness, illumination, not heavy</a:t>
+              <a:t>Word Labs  •  wordlabs.app  •  Root: 'light' = brightness; not heavy</a:t>
             </a:r>
             <a:endParaRPr lang="en-US" sz="800" dirty="0"/>
           </a:p>
@@ -38755,7 +40906,7 @@
                 <a:ea typeface="Trebuchet MS" pitchFamily="34" charset="-122"/>
                 <a:cs typeface="Trebuchet MS" pitchFamily="34" charset="-120"/>
               </a:rPr>
-              <a:t>-en</a:t>
+              <a:t>-ful</a:t>
             </a:r>
             <a:endParaRPr lang="en-US" sz="1300" dirty="0"/>
           </a:p>
@@ -38819,7 +40970,7 @@
                 <a:ea typeface="Trebuchet MS" pitchFamily="34" charset="-122"/>
                 <a:cs typeface="Trebuchet MS" pitchFamily="34" charset="-120"/>
               </a:rPr>
-              <a:t>flash-</a:t>
+              <a:t>ultra-</a:t>
             </a:r>
             <a:endParaRPr lang="en-US" sz="1300" dirty="0"/>
           </a:p>
@@ -38908,7 +41059,7 @@
                 <a:ea typeface="Trebuchet MS" pitchFamily="34" charset="-122"/>
                 <a:cs typeface="Trebuchet MS" pitchFamily="34" charset="-120"/>
               </a:rPr>
-              <a:t>-er</a:t>
+              <a:t>-s</a:t>
             </a:r>
             <a:endParaRPr lang="en-US" sz="1300" dirty="0"/>
           </a:p>
@@ -38929,7 +41080,7 @@
             <a:avLst/>
           </a:prstGeom>
           <a:solidFill>
-            <a:srgbClr val="DDD6FE"/>
+            <a:srgbClr val="F1F5F9"/>
           </a:solidFill>
           <a:ln w="12700">
             <a:solidFill>
@@ -38941,18 +41092,68 @@
       </p:sp>
       <p:sp>
         <p:nvSpPr>
-          <p:cNvPr id="34" name="Text 32"/>
-          <p:cNvSpPr/>
-          <p:nvPr/>
-        </p:nvSpPr>
-        <p:spPr>
-          <a:xfrm>
-            <a:off x="640080" y="3127248"/>
+          <p:cNvPr id="34" name="Shape 32"/>
+          <p:cNvSpPr/>
+          <p:nvPr/>
+        </p:nvSpPr>
+        <p:spPr>
+          <a:xfrm>
+            <a:off x="3291840" y="3127248"/>
+            <a:ext cx="1645920" cy="420624"/>
+          </a:xfrm>
+          <a:prstGeom prst="rect">
+            <a:avLst/>
+          </a:prstGeom>
+          <a:solidFill>
+            <a:srgbClr val="F1F5F9"/>
+          </a:solidFill>
+          <a:ln w="12700">
+            <a:solidFill>
+              <a:srgbClr val="E5E7EB"/>
+            </a:solidFill>
+            <a:prstDash val="solid"/>
+          </a:ln>
+        </p:spPr>
+      </p:sp>
+      <p:sp>
+        <p:nvSpPr>
+          <p:cNvPr id="35" name="Shape 33"/>
+          <p:cNvSpPr/>
+          <p:nvPr/>
+        </p:nvSpPr>
+        <p:spPr>
+          <a:xfrm>
+            <a:off x="5943600" y="3127248"/>
             <a:ext cx="1463040" cy="420624"/>
           </a:xfrm>
           <a:prstGeom prst="rect">
             <a:avLst/>
           </a:prstGeom>
+          <a:solidFill>
+            <a:srgbClr val="FCE7F3"/>
+          </a:solidFill>
+          <a:ln w="12700">
+            <a:solidFill>
+              <a:srgbClr val="E5E7EB"/>
+            </a:solidFill>
+            <a:prstDash val="solid"/>
+          </a:ln>
+        </p:spPr>
+      </p:sp>
+      <p:sp>
+        <p:nvSpPr>
+          <p:cNvPr id="36" name="Text 34"/>
+          <p:cNvSpPr/>
+          <p:nvPr/>
+        </p:nvSpPr>
+        <p:spPr>
+          <a:xfrm>
+            <a:off x="5943600" y="3127248"/>
+            <a:ext cx="1463040" cy="420624"/>
+          </a:xfrm>
+          <a:prstGeom prst="rect">
+            <a:avLst/>
+          </a:prstGeom>
           <a:noFill/>
           <a:ln/>
         </p:spPr>
@@ -38966,13 +41167,13 @@
             <a:r>
               <a:rPr lang="en-US" sz="1300" b="1" dirty="0">
                 <a:solidFill>
-                  <a:srgbClr val="4C1D95"/>
+                  <a:srgbClr val="9D174D"/>
                 </a:solidFill>
                 <a:latin typeface="Trebuchet MS" pitchFamily="34" charset="0"/>
                 <a:ea typeface="Trebuchet MS" pitchFamily="34" charset="-122"/>
                 <a:cs typeface="Trebuchet MS" pitchFamily="34" charset="-120"/>
               </a:rPr>
-              <a:t>moon-</a:t>
+              <a:t>-en</a:t>
             </a:r>
             <a:endParaRPr lang="en-US" sz="1300" dirty="0"/>
           </a:p>
@@ -38980,20 +41181,45 @@
       </p:sp>
       <p:sp>
         <p:nvSpPr>
-          <p:cNvPr id="35" name="Shape 33"/>
-          <p:cNvSpPr/>
-          <p:nvPr/>
-        </p:nvSpPr>
-        <p:spPr>
-          <a:xfrm>
-            <a:off x="3291840" y="3127248"/>
+          <p:cNvPr id="37" name="Shape 35"/>
+          <p:cNvSpPr/>
+          <p:nvPr/>
+        </p:nvSpPr>
+        <p:spPr>
+          <a:xfrm>
+            <a:off x="640080" y="3584448"/>
+            <a:ext cx="1463040" cy="420624"/>
+          </a:xfrm>
+          <a:prstGeom prst="rect">
+            <a:avLst/>
+          </a:prstGeom>
+          <a:solidFill>
+            <a:srgbClr val="F8FAFC"/>
+          </a:solidFill>
+          <a:ln w="12700">
+            <a:solidFill>
+              <a:srgbClr val="E5E7EB"/>
+            </a:solidFill>
+            <a:prstDash val="solid"/>
+          </a:ln>
+        </p:spPr>
+      </p:sp>
+      <p:sp>
+        <p:nvSpPr>
+          <p:cNvPr id="38" name="Shape 36"/>
+          <p:cNvSpPr/>
+          <p:nvPr/>
+        </p:nvSpPr>
+        <p:spPr>
+          <a:xfrm>
+            <a:off x="3291840" y="3584448"/>
             <a:ext cx="1645920" cy="420624"/>
           </a:xfrm>
           <a:prstGeom prst="rect">
             <a:avLst/>
           </a:prstGeom>
           <a:solidFill>
-            <a:srgbClr val="F1F5F9"/>
+            <a:srgbClr val="F8FAFC"/>
           </a:solidFill>
           <a:ln w="12700">
             <a:solidFill>
@@ -39005,13 +41231,13 @@
       </p:sp>
       <p:sp>
         <p:nvSpPr>
-          <p:cNvPr id="36" name="Shape 34"/>
-          <p:cNvSpPr/>
-          <p:nvPr/>
-        </p:nvSpPr>
-        <p:spPr>
-          <a:xfrm>
-            <a:off x="5943600" y="3127248"/>
+          <p:cNvPr id="39" name="Shape 37"/>
+          <p:cNvSpPr/>
+          <p:nvPr/>
+        </p:nvSpPr>
+        <p:spPr>
+          <a:xfrm>
+            <a:off x="5943600" y="3584448"/>
             <a:ext cx="1463040" cy="420624"/>
           </a:xfrm>
           <a:prstGeom prst="rect">
@@ -39030,13 +41256,13 @@
       </p:sp>
       <p:sp>
         <p:nvSpPr>
-          <p:cNvPr id="37" name="Text 35"/>
-          <p:cNvSpPr/>
-          <p:nvPr/>
-        </p:nvSpPr>
-        <p:spPr>
-          <a:xfrm>
-            <a:off x="5943600" y="3127248"/>
+          <p:cNvPr id="40" name="Text 38"/>
+          <p:cNvSpPr/>
+          <p:nvPr/>
+        </p:nvSpPr>
+        <p:spPr>
+          <a:xfrm>
+            <a:off x="5943600" y="3584448"/>
             <a:ext cx="1463040" cy="420624"/>
           </a:xfrm>
           <a:prstGeom prst="rect">
@@ -39061,7 +41287,7 @@
                 <a:ea typeface="Trebuchet MS" pitchFamily="34" charset="-122"/>
                 <a:cs typeface="Trebuchet MS" pitchFamily="34" charset="-120"/>
               </a:rPr>
-              <a:t>-ly</a:t>
+              <a:t>-er</a:t>
             </a:r>
             <a:endParaRPr lang="en-US" sz="1300" dirty="0"/>
           </a:p>
@@ -39069,20 +41295,20 @@
       </p:sp>
       <p:sp>
         <p:nvSpPr>
-          <p:cNvPr id="38" name="Shape 36"/>
-          <p:cNvSpPr/>
-          <p:nvPr/>
-        </p:nvSpPr>
-        <p:spPr>
-          <a:xfrm>
-            <a:off x="640080" y="3584448"/>
+          <p:cNvPr id="41" name="Shape 39"/>
+          <p:cNvSpPr/>
+          <p:nvPr/>
+        </p:nvSpPr>
+        <p:spPr>
+          <a:xfrm>
+            <a:off x="640080" y="4041648"/>
             <a:ext cx="1463040" cy="420624"/>
           </a:xfrm>
           <a:prstGeom prst="rect">
             <a:avLst/>
           </a:prstGeom>
           <a:solidFill>
-            <a:srgbClr val="DDD6FE"/>
+            <a:srgbClr val="F1F5F9"/>
           </a:solidFill>
           <a:ln w="12700">
             <a:solidFill>
@@ -39094,18 +41320,68 @@
       </p:sp>
       <p:sp>
         <p:nvSpPr>
-          <p:cNvPr id="39" name="Text 37"/>
-          <p:cNvSpPr/>
-          <p:nvPr/>
-        </p:nvSpPr>
-        <p:spPr>
-          <a:xfrm>
-            <a:off x="640080" y="3584448"/>
+          <p:cNvPr id="42" name="Shape 40"/>
+          <p:cNvSpPr/>
+          <p:nvPr/>
+        </p:nvSpPr>
+        <p:spPr>
+          <a:xfrm>
+            <a:off x="3291840" y="4041648"/>
+            <a:ext cx="1645920" cy="420624"/>
+          </a:xfrm>
+          <a:prstGeom prst="rect">
+            <a:avLst/>
+          </a:prstGeom>
+          <a:solidFill>
+            <a:srgbClr val="F1F5F9"/>
+          </a:solidFill>
+          <a:ln w="12700">
+            <a:solidFill>
+              <a:srgbClr val="E5E7EB"/>
+            </a:solidFill>
+            <a:prstDash val="solid"/>
+          </a:ln>
+        </p:spPr>
+      </p:sp>
+      <p:sp>
+        <p:nvSpPr>
+          <p:cNvPr id="43" name="Shape 41"/>
+          <p:cNvSpPr/>
+          <p:nvPr/>
+        </p:nvSpPr>
+        <p:spPr>
+          <a:xfrm>
+            <a:off x="5943600" y="4041648"/>
             <a:ext cx="1463040" cy="420624"/>
           </a:xfrm>
           <a:prstGeom prst="rect">
             <a:avLst/>
           </a:prstGeom>
+          <a:solidFill>
+            <a:srgbClr val="FCE7F3"/>
+          </a:solidFill>
+          <a:ln w="12700">
+            <a:solidFill>
+              <a:srgbClr val="E5E7EB"/>
+            </a:solidFill>
+            <a:prstDash val="solid"/>
+          </a:ln>
+        </p:spPr>
+      </p:sp>
+      <p:sp>
+        <p:nvSpPr>
+          <p:cNvPr id="44" name="Text 42"/>
+          <p:cNvSpPr/>
+          <p:nvPr/>
+        </p:nvSpPr>
+        <p:spPr>
+          <a:xfrm>
+            <a:off x="5943600" y="4041648"/>
+            <a:ext cx="1463040" cy="420624"/>
+          </a:xfrm>
+          <a:prstGeom prst="rect">
+            <a:avLst/>
+          </a:prstGeom>
           <a:noFill/>
           <a:ln/>
         </p:spPr>
@@ -39119,13 +41395,13 @@
             <a:r>
               <a:rPr lang="en-US" sz="1300" b="1" dirty="0">
                 <a:solidFill>
-                  <a:srgbClr val="4C1D95"/>
+                  <a:srgbClr val="9D174D"/>
                 </a:solidFill>
                 <a:latin typeface="Trebuchet MS" pitchFamily="34" charset="0"/>
                 <a:ea typeface="Trebuchet MS" pitchFamily="34" charset="-122"/>
                 <a:cs typeface="Trebuchet MS" pitchFamily="34" charset="-120"/>
               </a:rPr>
-              <a:t>sun-</a:t>
+              <a:t>-ing</a:t>
             </a:r>
             <a:endParaRPr lang="en-US" sz="1300" dirty="0"/>
           </a:p>
@@ -39133,102 +41409,13 @@
       </p:sp>
       <p:sp>
         <p:nvSpPr>
-          <p:cNvPr id="40" name="Shape 38"/>
-          <p:cNvSpPr/>
-          <p:nvPr/>
-        </p:nvSpPr>
-        <p:spPr>
-          <a:xfrm>
-            <a:off x="3291840" y="3584448"/>
-            <a:ext cx="1645920" cy="420624"/>
-          </a:xfrm>
-          <a:prstGeom prst="rect">
-            <a:avLst/>
-          </a:prstGeom>
-          <a:solidFill>
-            <a:srgbClr val="F8FAFC"/>
-          </a:solidFill>
-          <a:ln w="12700">
-            <a:solidFill>
-              <a:srgbClr val="E5E7EB"/>
-            </a:solidFill>
-            <a:prstDash val="solid"/>
-          </a:ln>
-        </p:spPr>
-      </p:sp>
-      <p:sp>
-        <p:nvSpPr>
-          <p:cNvPr id="41" name="Shape 39"/>
-          <p:cNvSpPr/>
-          <p:nvPr/>
-        </p:nvSpPr>
-        <p:spPr>
-          <a:xfrm>
-            <a:off x="5943600" y="3584448"/>
-            <a:ext cx="1463040" cy="420624"/>
-          </a:xfrm>
-          <a:prstGeom prst="rect">
-            <a:avLst/>
-          </a:prstGeom>
-          <a:solidFill>
-            <a:srgbClr val="FCE7F3"/>
-          </a:solidFill>
-          <a:ln w="12700">
-            <a:solidFill>
-              <a:srgbClr val="E5E7EB"/>
-            </a:solidFill>
-            <a:prstDash val="solid"/>
-          </a:ln>
-        </p:spPr>
-      </p:sp>
-      <p:sp>
-        <p:nvSpPr>
-          <p:cNvPr id="42" name="Text 40"/>
-          <p:cNvSpPr/>
-          <p:nvPr/>
-        </p:nvSpPr>
-        <p:spPr>
-          <a:xfrm>
-            <a:off x="5943600" y="3584448"/>
-            <a:ext cx="1463040" cy="420624"/>
-          </a:xfrm>
-          <a:prstGeom prst="rect">
-            <a:avLst/>
-          </a:prstGeom>
-          <a:noFill/>
-          <a:ln/>
-        </p:spPr>
-        <p:txBody>
-          <a:bodyPr wrap="square" lIns="0" tIns="0" rIns="0" bIns="0" rtlCol="0" anchor="ctr"/>
-          <a:lstStyle/>
-          <a:p>
-            <a:pPr algn="ctr" indent="0" marL="0">
-              <a:buNone/>
-            </a:pPr>
-            <a:r>
-              <a:rPr lang="en-US" sz="1300" b="1" dirty="0">
-                <a:solidFill>
-                  <a:srgbClr val="9D174D"/>
-                </a:solidFill>
-                <a:latin typeface="Trebuchet MS" pitchFamily="34" charset="0"/>
-                <a:ea typeface="Trebuchet MS" pitchFamily="34" charset="-122"/>
-                <a:cs typeface="Trebuchet MS" pitchFamily="34" charset="-120"/>
-              </a:rPr>
-              <a:t>-ness</a:t>
-            </a:r>
-            <a:endParaRPr lang="en-US" sz="1300" dirty="0"/>
-          </a:p>
-        </p:txBody>
-      </p:sp>
-      <p:sp>
-        <p:nvSpPr>
-          <p:cNvPr id="43" name="Text 41"/>
-          <p:cNvSpPr/>
-          <p:nvPr/>
-        </p:nvSpPr>
-        <p:spPr>
-          <a:xfrm>
-            <a:off x="365760" y="4178808"/>
+          <p:cNvPr id="45" name="Text 43"/>
+          <p:cNvSpPr/>
+          <p:nvPr/>
+        </p:nvSpPr>
+        <p:spPr>
+          <a:xfrm>
+            <a:off x="365760" y="4636008"/>
             <a:ext cx="1097280" cy="420624"/>
           </a:xfrm>
           <a:prstGeom prst="rect">
@@ -39261,13 +41448,13 @@
       </p:sp>
       <p:sp>
         <p:nvSpPr>
-          <p:cNvPr id="44" name="Shape 42"/>
-          <p:cNvSpPr/>
-          <p:nvPr/>
-        </p:nvSpPr>
-        <p:spPr>
-          <a:xfrm>
-            <a:off x="1508760" y="4178808"/>
+          <p:cNvPr id="46" name="Shape 44"/>
+          <p:cNvSpPr/>
+          <p:nvPr/>
+        </p:nvSpPr>
+        <p:spPr>
+          <a:xfrm>
+            <a:off x="1508760" y="4636008"/>
             <a:ext cx="822960" cy="420624"/>
           </a:xfrm>
           <a:prstGeom prst="rect">
@@ -39295,13 +41482,13 @@
       </p:sp>
       <p:sp>
         <p:nvSpPr>
-          <p:cNvPr id="45" name="Text 43"/>
-          <p:cNvSpPr/>
-          <p:nvPr/>
-        </p:nvSpPr>
-        <p:spPr>
-          <a:xfrm>
-            <a:off x="1508760" y="4178808"/>
+          <p:cNvPr id="47" name="Text 45"/>
+          <p:cNvSpPr/>
+          <p:nvPr/>
+        </p:nvSpPr>
+        <p:spPr>
+          <a:xfrm>
+            <a:off x="1508760" y="4636008"/>
             <a:ext cx="822960" cy="420624"/>
           </a:xfrm>
           <a:prstGeom prst="rect">
@@ -39334,13 +41521,13 @@
       </p:sp>
       <p:sp>
         <p:nvSpPr>
-          <p:cNvPr id="46" name="Text 44"/>
-          <p:cNvSpPr/>
-          <p:nvPr/>
-        </p:nvSpPr>
-        <p:spPr>
-          <a:xfrm>
-            <a:off x="2359152" y="4178808"/>
+          <p:cNvPr id="48" name="Text 46"/>
+          <p:cNvSpPr/>
+          <p:nvPr/>
+        </p:nvSpPr>
+        <p:spPr>
+          <a:xfrm>
+            <a:off x="2359152" y="4636008"/>
             <a:ext cx="320040" cy="420624"/>
           </a:xfrm>
           <a:prstGeom prst="rect">
@@ -39373,13 +41560,13 @@
       </p:sp>
       <p:sp>
         <p:nvSpPr>
-          <p:cNvPr id="47" name="Shape 45"/>
-          <p:cNvSpPr/>
-          <p:nvPr/>
-        </p:nvSpPr>
-        <p:spPr>
-          <a:xfrm>
-            <a:off x="2706624" y="4178808"/>
+          <p:cNvPr id="49" name="Shape 47"/>
+          <p:cNvSpPr/>
+          <p:nvPr/>
+        </p:nvSpPr>
+        <p:spPr>
+          <a:xfrm>
+            <a:off x="2706624" y="4636008"/>
             <a:ext cx="1389888" cy="420624"/>
           </a:xfrm>
           <a:prstGeom prst="rect">
@@ -39407,13 +41594,13 @@
       </p:sp>
       <p:sp>
         <p:nvSpPr>
-          <p:cNvPr id="48" name="Text 46"/>
-          <p:cNvSpPr/>
-          <p:nvPr/>
-        </p:nvSpPr>
-        <p:spPr>
-          <a:xfrm>
-            <a:off x="2706624" y="4178808"/>
+          <p:cNvPr id="50" name="Text 48"/>
+          <p:cNvSpPr/>
+          <p:nvPr/>
+        </p:nvSpPr>
+        <p:spPr>
+          <a:xfrm>
+            <a:off x="2706624" y="4636008"/>
             <a:ext cx="1389888" cy="420624"/>
           </a:xfrm>
           <a:prstGeom prst="rect">
@@ -39446,13 +41633,13 @@
       </p:sp>
       <p:sp>
         <p:nvSpPr>
-          <p:cNvPr id="49" name="Text 47"/>
-          <p:cNvSpPr/>
-          <p:nvPr/>
-        </p:nvSpPr>
-        <p:spPr>
-          <a:xfrm>
-            <a:off x="4123944" y="4178808"/>
+          <p:cNvPr id="51" name="Text 49"/>
+          <p:cNvSpPr/>
+          <p:nvPr/>
+        </p:nvSpPr>
+        <p:spPr>
+          <a:xfrm>
+            <a:off x="4123944" y="4636008"/>
             <a:ext cx="320040" cy="420624"/>
           </a:xfrm>
           <a:prstGeom prst="rect">
@@ -39485,13 +41672,13 @@
       </p:sp>
       <p:sp>
         <p:nvSpPr>
-          <p:cNvPr id="50" name="Shape 48"/>
-          <p:cNvSpPr/>
-          <p:nvPr/>
-        </p:nvSpPr>
-        <p:spPr>
-          <a:xfrm>
-            <a:off x="4471416" y="4178808"/>
+          <p:cNvPr id="52" name="Shape 50"/>
+          <p:cNvSpPr/>
+          <p:nvPr/>
+        </p:nvSpPr>
+        <p:spPr>
+          <a:xfrm>
+            <a:off x="4471416" y="4636008"/>
             <a:ext cx="822960" cy="420624"/>
           </a:xfrm>
           <a:prstGeom prst="rect">
@@ -39519,13 +41706,13 @@
       </p:sp>
       <p:sp>
         <p:nvSpPr>
-          <p:cNvPr id="51" name="Text 49"/>
-          <p:cNvSpPr/>
-          <p:nvPr/>
-        </p:nvSpPr>
-        <p:spPr>
-          <a:xfrm>
-            <a:off x="4471416" y="4178808"/>
+          <p:cNvPr id="53" name="Text 51"/>
+          <p:cNvSpPr/>
+          <p:nvPr/>
+        </p:nvSpPr>
+        <p:spPr>
+          <a:xfrm>
+            <a:off x="4471416" y="4636008"/>
             <a:ext cx="822960" cy="420624"/>
           </a:xfrm>
           <a:prstGeom prst="rect">
@@ -39558,13 +41745,13 @@
       </p:sp>
       <p:sp>
         <p:nvSpPr>
-          <p:cNvPr id="52" name="Text 50"/>
-          <p:cNvSpPr/>
-          <p:nvPr/>
-        </p:nvSpPr>
-        <p:spPr>
-          <a:xfrm>
-            <a:off x="5367528" y="4178808"/>
+          <p:cNvPr id="54" name="Text 52"/>
+          <p:cNvSpPr/>
+          <p:nvPr/>
+        </p:nvSpPr>
+        <p:spPr>
+          <a:xfrm>
+            <a:off x="5367528" y="4636008"/>
             <a:ext cx="365760" cy="420624"/>
           </a:xfrm>
           <a:prstGeom prst="rect">
@@ -39597,13 +41784,13 @@
       </p:sp>
       <p:sp>
         <p:nvSpPr>
-          <p:cNvPr id="53" name="Shape 51"/>
-          <p:cNvSpPr/>
-          <p:nvPr/>
-        </p:nvSpPr>
-        <p:spPr>
-          <a:xfrm>
-            <a:off x="5779008" y="4178808"/>
+          <p:cNvPr id="55" name="Shape 53"/>
+          <p:cNvSpPr/>
+          <p:nvPr/>
+        </p:nvSpPr>
+        <p:spPr>
+          <a:xfrm>
+            <a:off x="5779008" y="4636008"/>
             <a:ext cx="2194560" cy="420624"/>
           </a:xfrm>
           <a:prstGeom prst="rect">
@@ -39624,13 +41811,13 @@
       </p:sp>
       <p:sp>
         <p:nvSpPr>
-          <p:cNvPr id="54" name="Text 52"/>
-          <p:cNvSpPr/>
-          <p:nvPr/>
-        </p:nvSpPr>
-        <p:spPr>
-          <a:xfrm>
-            <a:off x="5779008" y="4178808"/>
+          <p:cNvPr id="56" name="Text 54"/>
+          <p:cNvSpPr/>
+          <p:nvPr/>
+        </p:nvSpPr>
+        <p:spPr>
+          <a:xfrm>
+            <a:off x="5779008" y="4636008"/>
             <a:ext cx="2194560" cy="420624"/>
           </a:xfrm>
           <a:prstGeom prst="rect">
@@ -39655,7 +41842,7 @@
                 <a:ea typeface="Trebuchet MS" pitchFamily="34" charset="-122"/>
                 <a:cs typeface="Trebuchet MS" pitchFamily="34" charset="-120"/>
               </a:rPr>
-              <a:t>daylight</a:t>
+              <a:t>light</a:t>
             </a:r>
             <a:endParaRPr lang="en-US" sz="1400" dirty="0"/>
           </a:p>
@@ -39947,7 +42134,7 @@
                 <a:ea typeface="Calibri" pitchFamily="34" charset="-122"/>
                 <a:cs typeface="Calibri" pitchFamily="34" charset="-120"/>
               </a:rPr>
-              <a:t>Word Labs  •  wordlabs.app  •  Root: 'light' = brightness, illumination, not heavy</a:t>
+              <a:t>Word Labs  •  wordlabs.app  •  Root: 'light' = brightness; not heavy</a:t>
             </a:r>
             <a:endParaRPr lang="en-US" sz="800" dirty="0"/>
           </a:p>
@@ -40059,7 +42246,7 @@
                 <a:ea typeface="Trebuchet MS" pitchFamily="34" charset="-122"/>
                 <a:cs typeface="Trebuchet MS" pitchFamily="34" charset="-120"/>
               </a:rPr>
-              <a:t>daylight</a:t>
+              <a:t>light</a:t>
             </a:r>
             <a:endParaRPr lang="en-US" sz="1200" dirty="0"/>
           </a:p>
@@ -40125,7 +42312,7 @@
                 <a:ea typeface="Calibri" pitchFamily="34" charset="-122"/>
                 <a:cs typeface="Calibri" pitchFamily="34" charset="-120"/>
               </a:rPr>
-              <a:t>The natural light you get during the day from the sun.</a:t>
+              <a:t>brightness that lets you see things</a:t>
             </a:r>
             <a:endParaRPr lang="en-US" sz="1200" dirty="0"/>
           </a:p>
@@ -40198,7 +42385,7 @@
                 <a:ea typeface="Trebuchet MS" pitchFamily="34" charset="-122"/>
                 <a:cs typeface="Trebuchet MS" pitchFamily="34" charset="-120"/>
               </a:rPr>
-              <a:t>delight</a:t>
+              <a:t>lights</a:t>
             </a:r>
             <a:endParaRPr lang="en-US" sz="1200" dirty="0"/>
           </a:p>
@@ -40264,7 +42451,7 @@
                 <a:ea typeface="Calibri" pitchFamily="34" charset="-122"/>
                 <a:cs typeface="Calibri" pitchFamily="34" charset="-120"/>
               </a:rPr>
-              <a:t>In a gentle way, without much force or pressure.</a:t>
+              <a:t>things that give great pleasure</a:t>
             </a:r>
             <a:endParaRPr lang="en-US" sz="1200" dirty="0"/>
           </a:p>
@@ -40337,7 +42524,7 @@
                 <a:ea typeface="Trebuchet MS" pitchFamily="34" charset="-122"/>
                 <a:cs typeface="Trebuchet MS" pitchFamily="34" charset="-120"/>
               </a:rPr>
-              <a:t>enlighten</a:t>
+              <a:t>delight</a:t>
             </a:r>
             <a:endParaRPr lang="en-US" sz="1200" dirty="0"/>
           </a:p>
@@ -40403,7 +42590,7 @@
                 <a:ea typeface="Calibri" pitchFamily="34" charset="-122"/>
                 <a:cs typeface="Calibri" pitchFamily="34" charset="-120"/>
               </a:rPr>
-              <a:t>To give someone new knowledge or understanding about something.</a:t>
+              <a:t>great pleasure or joy</a:t>
             </a:r>
             <a:endParaRPr lang="en-US" sz="1200" dirty="0"/>
           </a:p>
@@ -40476,7 +42663,7 @@
                 <a:ea typeface="Trebuchet MS" pitchFamily="34" charset="-122"/>
                 <a:cs typeface="Trebuchet MS" pitchFamily="34" charset="-120"/>
               </a:rPr>
-              <a:t>flashlight</a:t>
+              <a:t>lighted</a:t>
             </a:r>
             <a:endParaRPr lang="en-US" sz="1200" dirty="0"/>
           </a:p>
@@ -40542,7 +42729,7 @@
                 <a:ea typeface="Calibri" pitchFamily="34" charset="-122"/>
                 <a:cs typeface="Calibri" pitchFamily="34" charset="-120"/>
               </a:rPr>
-              <a:t>To mark or draw attention to the most important part of something.</a:t>
+              <a:t>less heavy than something else</a:t>
             </a:r>
             <a:endParaRPr lang="en-US" sz="1200" dirty="0"/>
           </a:p>
@@ -40615,7 +42802,7 @@
                 <a:ea typeface="Trebuchet MS" pitchFamily="34" charset="-122"/>
                 <a:cs typeface="Trebuchet MS" pitchFamily="34" charset="-120"/>
               </a:rPr>
-              <a:t>highlight</a:t>
+              <a:t>lighter</a:t>
             </a:r>
             <a:endParaRPr lang="en-US" sz="1200" dirty="0"/>
           </a:p>
@@ -40681,7 +42868,7 @@
                 <a:ea typeface="Calibri" pitchFamily="34" charset="-122"/>
                 <a:cs typeface="Calibri" pitchFamily="34" charset="-120"/>
               </a:rPr>
-              <a:t>A small handheld torch that uses a battery to make light.</a:t>
+              <a:t>made bright or set on fire</a:t>
             </a:r>
             <a:endParaRPr lang="en-US" sz="1200" dirty="0"/>
           </a:p>
@@ -40754,7 +42941,7 @@
                 <a:ea typeface="Trebuchet MS" pitchFamily="34" charset="-122"/>
                 <a:cs typeface="Trebuchet MS" pitchFamily="34" charset="-120"/>
               </a:rPr>
-              <a:t>lighten</a:t>
+              <a:t>lightly</a:t>
             </a:r>
             <a:endParaRPr lang="en-US" sz="1200" dirty="0"/>
           </a:p>
@@ -40820,7 +43007,7 @@
                 <a:ea typeface="Calibri" pitchFamily="34" charset="-122"/>
                 <a:cs typeface="Calibri" pitchFamily="34" charset="-120"/>
               </a:rPr>
-              <a:t>To make something brighter or less heavy.</a:t>
+              <a:t>in a gentle or soft way, without much force</a:t>
             </a:r>
             <a:endParaRPr lang="en-US" sz="1200" dirty="0"/>
           </a:p>
@@ -40893,7 +43080,7 @@
                 <a:ea typeface="Trebuchet MS" pitchFamily="34" charset="-122"/>
                 <a:cs typeface="Trebuchet MS" pitchFamily="34" charset="-120"/>
               </a:rPr>
-              <a:t>lightly</a:t>
+              <a:t>delights</a:t>
             </a:r>
             <a:endParaRPr lang="en-US" sz="1200" dirty="0"/>
           </a:p>
@@ -40959,7 +43146,7 @@
                 <a:ea typeface="Calibri" pitchFamily="34" charset="-122"/>
                 <a:cs typeface="Calibri" pitchFamily="34" charset="-120"/>
               </a:rPr>
-              <a:t>A feeling of great happiness or joy about something.</a:t>
+              <a:t>sources of brightness, such as lamps or bulbs</a:t>
             </a:r>
             <a:endParaRPr lang="en-US" sz="1200" dirty="0"/>
           </a:p>
@@ -41251,7 +43438,7 @@
                 <a:ea typeface="Calibri" pitchFamily="34" charset="-122"/>
                 <a:cs typeface="Calibri" pitchFamily="34" charset="-120"/>
               </a:rPr>
-              <a:t>Word Labs  •  wordlabs.app  •  Root: 'light' = brightness, illumination, not heavy</a:t>
+              <a:t>Word Labs  •  wordlabs.app  •  Root: 'light' = brightness; not heavy</a:t>
             </a:r>
             <a:endParaRPr lang="en-US" sz="800" dirty="0"/>
           </a:p>
@@ -41454,7 +43641,7 @@
                 <a:ea typeface="Calibri" pitchFamily="34" charset="-122"/>
                 <a:cs typeface="Calibri" pitchFamily="34" charset="-120"/>
               </a:rPr>
-              <a:t>The delight on the children's faces was clear when they saw the surprise party decorations.</a:t>
+              <a:t>Please turn on the light so we can see.</a:t>
             </a:r>
             <a:endParaRPr lang="en-US" sz="1500" dirty="0"/>
           </a:p>
@@ -41618,7 +43805,7 @@
                 <a:ea typeface="Calibri" pitchFamily="34" charset="-122"/>
                 <a:cs typeface="Calibri" pitchFamily="34" charset="-120"/>
               </a:rPr>
-              <a:t>She used a flashlight to find her way through the dark cave on the school excursion.</a:t>
+              <a:t>Turn off the lights before you leave the room.</a:t>
             </a:r>
             <a:endParaRPr lang="en-US" sz="1500" dirty="0"/>
           </a:p>
@@ -41782,7 +43969,7 @@
                 <a:ea typeface="Calibri" pitchFamily="34" charset="-122"/>
                 <a:cs typeface="Calibri" pitchFamily="34" charset="-120"/>
               </a:rPr>
-              <a:t>The teacher asked the students to highlight the most important sentences in the passage.</a:t>
+              <a:t>The children squealed with delight when they saw the puppy.</a:t>
             </a:r>
             <a:endParaRPr lang="en-US" sz="1500" dirty="0"/>
           </a:p>
